--- a/content/2026-2/cea055-estatistica-probabilidade/05-probabilidade-condicional/Aula_05_Probabilidade_Condicional_SITE.pptx
+++ b/content/2026-2/cea055-estatistica-probabilidade/05-probabilidade-condicional/Aula_05_Probabilidade_Condicional_SITE.pptx
@@ -5,25 +5,25 @@
     <p:sldMasterId id="2147483648" r:id="rId1"/>
   </p:sldMasterIdLst>
   <p:notesMasterIdLst>
-    <p:notesMasterId r:id="rId22"/>
+    <p:notesMasterId r:id="rId18"/>
   </p:notesMasterIdLst>
   <p:sldIdLst>
     <p:sldId id="628" r:id="rId2"/>
     <p:sldId id="278" r:id="rId3"/>
     <p:sldId id="275" r:id="rId4"/>
-    <p:sldId id="297" r:id="rId6"/>
-    <p:sldId id="280" r:id="rId7"/>
-    <p:sldId id="629" r:id="rId8"/>
-    <p:sldId id="281" r:id="rId9"/>
-    <p:sldId id="282" r:id="rId11"/>
-    <p:sldId id="614" r:id="rId12"/>
-    <p:sldId id="630" r:id="rId13"/>
-    <p:sldId id="615" r:id="rId15"/>
-    <p:sldId id="616" r:id="rId16"/>
-    <p:sldId id="617" r:id="rId17"/>
-    <p:sldId id="618" r:id="rId18"/>
-    <p:sldId id="601" r:id="rId20"/>
-    <p:sldId id="619" r:id="rId21"/>
+    <p:sldId id="297" r:id="rId5"/>
+    <p:sldId id="280" r:id="rId6"/>
+    <p:sldId id="629" r:id="rId7"/>
+    <p:sldId id="281" r:id="rId8"/>
+    <p:sldId id="282" r:id="rId9"/>
+    <p:sldId id="614" r:id="rId10"/>
+    <p:sldId id="630" r:id="rId11"/>
+    <p:sldId id="615" r:id="rId12"/>
+    <p:sldId id="616" r:id="rId13"/>
+    <p:sldId id="617" r:id="rId14"/>
+    <p:sldId id="618" r:id="rId15"/>
+    <p:sldId id="601" r:id="rId16"/>
+    <p:sldId id="619" r:id="rId17"/>
   </p:sldIdLst>
   <p:sldSz cx="12192000" cy="6858000"/>
   <p:notesSz cx="7099300" cy="10234613"/>
@@ -238,7 +238,7 @@
           <a:p>
             <a:fld id="{44623A65-BD25-40B6-8815-498297225DF7}" type="datetimeFigureOut">
               <a:rPr lang="pt-BR" smtClean="0"/>
-              <a:t>09/09/2026</a:t>
+              <a:t>22/10/2026</a:t>
             </a:fld>
             <a:endParaRPr lang="pt-BR" dirty="0"/>
           </a:p>
@@ -652,7 +652,7 @@
           <a:p>
             <a:fld id="{5B45E566-B383-4B2D-B951-1136FD38326E}" type="datetimeFigureOut">
               <a:rPr lang="pt-BR" smtClean="0"/>
-              <a:t>09/09/2026</a:t>
+              <a:t>22/10/2026</a:t>
             </a:fld>
             <a:endParaRPr lang="pt-BR" dirty="0"/>
           </a:p>
@@ -850,7 +850,7 @@
           <a:p>
             <a:fld id="{5B45E566-B383-4B2D-B951-1136FD38326E}" type="datetimeFigureOut">
               <a:rPr lang="pt-BR" smtClean="0"/>
-              <a:t>09/09/2026</a:t>
+              <a:t>22/10/2026</a:t>
             </a:fld>
             <a:endParaRPr lang="pt-BR" dirty="0"/>
           </a:p>
@@ -1058,7 +1058,7 @@
           <a:p>
             <a:fld id="{5B45E566-B383-4B2D-B951-1136FD38326E}" type="datetimeFigureOut">
               <a:rPr lang="pt-BR" smtClean="0"/>
-              <a:t>09/09/2026</a:t>
+              <a:t>22/10/2026</a:t>
             </a:fld>
             <a:endParaRPr lang="pt-BR" dirty="0"/>
           </a:p>
@@ -1256,7 +1256,7 @@
           <a:p>
             <a:fld id="{5B45E566-B383-4B2D-B951-1136FD38326E}" type="datetimeFigureOut">
               <a:rPr lang="pt-BR" smtClean="0"/>
-              <a:t>09/09/2026</a:t>
+              <a:t>22/10/2026</a:t>
             </a:fld>
             <a:endParaRPr lang="pt-BR" dirty="0"/>
           </a:p>
@@ -1531,7 +1531,7 @@
           <a:p>
             <a:fld id="{5B45E566-B383-4B2D-B951-1136FD38326E}" type="datetimeFigureOut">
               <a:rPr lang="pt-BR" smtClean="0"/>
-              <a:t>09/09/2026</a:t>
+              <a:t>22/10/2026</a:t>
             </a:fld>
             <a:endParaRPr lang="pt-BR" dirty="0"/>
           </a:p>
@@ -1796,7 +1796,7 @@
           <a:p>
             <a:fld id="{5B45E566-B383-4B2D-B951-1136FD38326E}" type="datetimeFigureOut">
               <a:rPr lang="pt-BR" smtClean="0"/>
-              <a:t>09/09/2026</a:t>
+              <a:t>22/10/2026</a:t>
             </a:fld>
             <a:endParaRPr lang="pt-BR" dirty="0"/>
           </a:p>
@@ -2208,7 +2208,7 @@
           <a:p>
             <a:fld id="{5B45E566-B383-4B2D-B951-1136FD38326E}" type="datetimeFigureOut">
               <a:rPr lang="pt-BR" smtClean="0"/>
-              <a:t>09/09/2026</a:t>
+              <a:t>22/10/2026</a:t>
             </a:fld>
             <a:endParaRPr lang="pt-BR" dirty="0"/>
           </a:p>
@@ -2349,7 +2349,7 @@
           <a:p>
             <a:fld id="{5B45E566-B383-4B2D-B951-1136FD38326E}" type="datetimeFigureOut">
               <a:rPr lang="pt-BR" smtClean="0"/>
-              <a:t>09/09/2026</a:t>
+              <a:t>22/10/2026</a:t>
             </a:fld>
             <a:endParaRPr lang="pt-BR" dirty="0"/>
           </a:p>
@@ -2462,7 +2462,7 @@
           <a:p>
             <a:fld id="{5B45E566-B383-4B2D-B951-1136FD38326E}" type="datetimeFigureOut">
               <a:rPr lang="pt-BR" smtClean="0"/>
-              <a:t>09/09/2026</a:t>
+              <a:t>22/10/2026</a:t>
             </a:fld>
             <a:endParaRPr lang="pt-BR" dirty="0"/>
           </a:p>
@@ -2773,7 +2773,7 @@
           <a:p>
             <a:fld id="{5B45E566-B383-4B2D-B951-1136FD38326E}" type="datetimeFigureOut">
               <a:rPr lang="pt-BR" smtClean="0"/>
-              <a:t>09/09/2026</a:t>
+              <a:t>22/10/2026</a:t>
             </a:fld>
             <a:endParaRPr lang="pt-BR" dirty="0"/>
           </a:p>
@@ -3061,7 +3061,7 @@
           <a:p>
             <a:fld id="{5B45E566-B383-4B2D-B951-1136FD38326E}" type="datetimeFigureOut">
               <a:rPr lang="pt-BR" smtClean="0"/>
-              <a:t>09/09/2026</a:t>
+              <a:t>22/10/2026</a:t>
             </a:fld>
             <a:endParaRPr lang="pt-BR" dirty="0"/>
           </a:p>
@@ -3326,7 +3326,7 @@
           <a:p>
             <a:fld id="{5B45E566-B383-4B2D-B951-1136FD38326E}" type="datetimeFigureOut">
               <a:rPr lang="pt-BR" smtClean="0"/>
-              <a:t>09/09/2026</a:t>
+              <a:t>22/10/2026</a:t>
             </a:fld>
             <a:endParaRPr lang="pt-BR" dirty="0"/>
           </a:p>
@@ -3808,7 +3808,7 @@
         <p:spPr>
           <a:xfrm>
             <a:off x="881687" y="1441868"/>
-            <a:ext cx="10067277" cy="5122941"/>
+            <a:ext cx="10067277" cy="4199611"/>
           </a:xfrm>
           <a:prstGeom prst="rect">
             <a:avLst/>
@@ -3891,7 +3891,15 @@
             </a:pPr>
             <a:r>
               <a:rPr lang="pt-BR" sz="2000" dirty="0"/>
-              <a:t>Montgomery, Runger. Applied Statistics and Probability for Engineers, 7th ed — Cap. 2 (2.5, 2.7)</a:t>
+              <a:t>Montgomery, Runger</a:t>
+            </a:r>
+            <a:r>
+              <a:rPr lang="pt-BR" sz="2000"/>
+              <a:t>. Estatística Aplicada e Probabilidade para Engenheiros, 7ª ed. — </a:t>
+            </a:r>
+            <a:r>
+              <a:rPr lang="pt-BR" sz="2000" dirty="0"/>
+              <a:t>Cap. 2 (2.5, 2.7)</a:t>
             </a:r>
           </a:p>
           <a:p>
@@ -4002,6 +4010,4324 @@
 </file>
 
 <file path=ppt/slides/slide10.xml><?xml version="1.0" encoding="utf-8"?>
+<p:sld xmlns:a="http://schemas.openxmlformats.org/drawingml/2006/main" xmlns:r="http://schemas.openxmlformats.org/officeDocument/2006/relationships" xmlns:p="http://schemas.openxmlformats.org/presentationml/2006/main">
+  <p:cSld>
+    <p:spTree>
+      <p:nvGrpSpPr>
+        <p:cNvPr id="1" name=""/>
+        <p:cNvGrpSpPr/>
+        <p:nvPr/>
+      </p:nvGrpSpPr>
+      <p:grpSpPr>
+        <a:xfrm>
+          <a:off x="0" y="0"/>
+          <a:ext cx="0" cy="0"/>
+          <a:chOff x="0" y="0"/>
+          <a:chExt cx="0" cy="0"/>
+        </a:xfrm>
+      </p:grpSpPr>
+      <p:sp>
+        <p:nvSpPr>
+          <p:cNvPr id="6" name="CaixaDeTexto 5">
+            <a:extLst>
+              <a:ext uri="{FF2B5EF4-FFF2-40B4-BE49-F238E27FC236}">
+                <a16:creationId xmlns:a16="http://schemas.microsoft.com/office/drawing/2014/main" id="{720B10DA-C761-4DEE-8D86-E170E1C2E981}"/>
+              </a:ext>
+            </a:extLst>
+          </p:cNvPr>
+          <p:cNvSpPr txBox="1"/>
+          <p:nvPr/>
+        </p:nvSpPr>
+        <p:spPr>
+          <a:xfrm>
+            <a:off x="629138" y="644086"/>
+            <a:ext cx="10748061" cy="5626027"/>
+          </a:xfrm>
+          <a:prstGeom prst="rect">
+            <a:avLst/>
+          </a:prstGeom>
+          <a:noFill/>
+        </p:spPr>
+        <p:txBody>
+          <a:bodyPr wrap="square" rtlCol="0">
+            <a:spAutoFit/>
+          </a:bodyPr>
+          <a:lstStyle/>
+          <a:p>
+            <a:pPr>
+              <a:lnSpc>
+                <a:spcPct val="150000"/>
+              </a:lnSpc>
+            </a:pPr>
+            <a:r>
+              <a:rPr lang="pt-BR" sz="2200" b="1" dirty="0"/>
+              <a:t>Exemplo. </a:t>
+            </a:r>
+            <a:r>
+              <a:rPr lang="pt-BR" sz="2200" dirty="0"/>
+              <a:t>Na mesma urna (2 brancas, 3 vermelhas, sem reposição), defina agora:</a:t>
+            </a:r>
+          </a:p>
+          <a:p>
+            <a:pPr marL="342900" indent="-342900">
+              <a:lnSpc>
+                <a:spcPct val="150000"/>
+              </a:lnSpc>
+              <a:buFont typeface="Arial" panose="020B0604020202020204" pitchFamily="34" charset="0"/>
+              <a:buChar char="•"/>
+            </a:pPr>
+            <a:r>
+              <a:rPr lang="pt-BR" sz="2200" dirty="0"/>
+              <a:t>A: a 1ª bola é branca; </a:t>
+            </a:r>
+          </a:p>
+          <a:p>
+            <a:pPr marL="342900" indent="-342900">
+              <a:lnSpc>
+                <a:spcPct val="150000"/>
+              </a:lnSpc>
+              <a:buFont typeface="Arial" panose="020B0604020202020204" pitchFamily="34" charset="0"/>
+              <a:buChar char="•"/>
+            </a:pPr>
+            <a:r>
+              <a:rPr lang="pt-BR" sz="2200" dirty="0"/>
+              <a:t>B: a 2ª bola é branca.</a:t>
+            </a:r>
+          </a:p>
+          <a:p>
+            <a:pPr>
+              <a:lnSpc>
+                <a:spcPct val="150000"/>
+              </a:lnSpc>
+            </a:pPr>
+            <a:r>
+              <a:rPr lang="pt-BR" sz="2200" dirty="0"/>
+              <a:t> A e B são independentes?</a:t>
+            </a:r>
+          </a:p>
+          <a:p>
+            <a:pPr>
+              <a:lnSpc>
+                <a:spcPct val="150000"/>
+              </a:lnSpc>
+            </a:pPr>
+            <a:r>
+              <a:rPr lang="pt-BR" sz="2200" dirty="0"/>
+              <a:t>Resposta:     P(A) = 2/5 (lido direto da árvore).</a:t>
+            </a:r>
+          </a:p>
+          <a:p>
+            <a:pPr lvl="3">
+              <a:lnSpc>
+                <a:spcPct val="150000"/>
+              </a:lnSpc>
+            </a:pPr>
+            <a:r>
+              <a:rPr lang="pt-BR" sz="2200" dirty="0"/>
+              <a:t>P(B) = P(BB) + P(VB) = 2/20 + 6/20 = 8/20 = 2/5 (somando os dois caminhos da árvore em que a 2ª bola sai branca). </a:t>
+            </a:r>
+          </a:p>
+          <a:p>
+            <a:pPr lvl="3">
+              <a:lnSpc>
+                <a:spcPct val="150000"/>
+              </a:lnSpc>
+            </a:pPr>
+            <a:r>
+              <a:rPr lang="pt-BR" sz="2200" dirty="0"/>
+              <a:t>P(A∩B) = P(BB) = 2/20 = 1/10.</a:t>
+            </a:r>
+          </a:p>
+          <a:p>
+            <a:pPr>
+              <a:lnSpc>
+                <a:spcPct val="150000"/>
+              </a:lnSpc>
+            </a:pPr>
+            <a:r>
+              <a:rPr lang="pt-BR" sz="2200" dirty="0"/>
+              <a:t>Se A e B fossem independentes, esperaríamos P(A∩B) = P(A)·P(B) = 2/5 · 2/5 = 4/25 = 0,16. Mas P(A∩B) = 0,1 ≠ 0,16.A e B não são independentes — faz sentido, já que a 2ª extração depende da 1ª (é exatamente o que a árvore mostra).</a:t>
+            </a:r>
+          </a:p>
+        </p:txBody>
+      </p:sp>
+      <p:sp>
+        <p:nvSpPr>
+          <p:cNvPr id="3" name="CaixaDeTexto 2">
+            <a:extLst>
+              <a:ext uri="{FF2B5EF4-FFF2-40B4-BE49-F238E27FC236}">
+                <a16:creationId xmlns:a16="http://schemas.microsoft.com/office/drawing/2014/main" id="{19131A04-B5D6-4211-8B49-4615DE5797E9}"/>
+              </a:ext>
+            </a:extLst>
+          </p:cNvPr>
+          <p:cNvSpPr txBox="1"/>
+          <p:nvPr/>
+        </p:nvSpPr>
+        <p:spPr>
+          <a:xfrm>
+            <a:off x="361188" y="6463893"/>
+            <a:ext cx="7772400" cy="308152"/>
+          </a:xfrm>
+          <a:prstGeom prst="rect">
+            <a:avLst/>
+          </a:prstGeom>
+          <a:noFill/>
+        </p:spPr>
+        <p:txBody>
+          <a:bodyPr wrap="none" rtlCol="0">
+            <a:spAutoFit/>
+          </a:bodyPr>
+          <a:lstStyle/>
+          <a:p>
+            <a:r>
+              <a:rPr lang="pt-BR" sz="1400" dirty="0"/>
+              <a:t>CEA055 – Estatística e Probabilidade – Prof. Marcos Goulart Lima</a:t>
+            </a:r>
+          </a:p>
+        </p:txBody>
+      </p:sp>
+    </p:spTree>
+    <p:extLst>
+      <p:ext uri="{BB962C8B-B14F-4D97-AF65-F5344CB8AC3E}">
+        <p14:creationId xmlns:p14="http://schemas.microsoft.com/office/powerpoint/2010/main" val="2533743284"/>
+      </p:ext>
+    </p:extLst>
+  </p:cSld>
+  <p:clrMapOvr>
+    <a:masterClrMapping/>
+  </p:clrMapOvr>
+</p:sld>
+</file>
+
+<file path=ppt/slides/slide11.xml><?xml version="1.0" encoding="utf-8"?>
+<p:sld xmlns:a="http://schemas.openxmlformats.org/drawingml/2006/main" xmlns:r="http://schemas.openxmlformats.org/officeDocument/2006/relationships" xmlns:p="http://schemas.openxmlformats.org/presentationml/2006/main">
+  <p:cSld>
+    <p:spTree>
+      <p:nvGrpSpPr>
+        <p:cNvPr id="1" name=""/>
+        <p:cNvGrpSpPr/>
+        <p:nvPr/>
+      </p:nvGrpSpPr>
+      <p:grpSpPr>
+        <a:xfrm>
+          <a:off x="0" y="0"/>
+          <a:ext cx="0" cy="0"/>
+          <a:chOff x="0" y="0"/>
+          <a:chExt cx="0" cy="0"/>
+        </a:xfrm>
+      </p:grpSpPr>
+      <mc:AlternateContent xmlns:mc="http://schemas.openxmlformats.org/markup-compatibility/2006" xmlns:a14="http://schemas.microsoft.com/office/drawing/2010/main">
+        <mc:Choice Requires="a14">
+          <p:sp>
+            <p:nvSpPr>
+              <p:cNvPr id="6" name="CaixaDeTexto 5">
+                <a:extLst>
+                  <a:ext uri="{FF2B5EF4-FFF2-40B4-BE49-F238E27FC236}">
+                    <a16:creationId xmlns:a16="http://schemas.microsoft.com/office/drawing/2014/main" id="{720B10DA-C761-4DEE-8D86-E170E1C2E981}"/>
+                  </a:ext>
+                </a:extLst>
+              </p:cNvPr>
+              <p:cNvSpPr txBox="1"/>
+              <p:nvPr/>
+            </p:nvSpPr>
+            <p:spPr>
+              <a:xfrm>
+                <a:off x="629138" y="644086"/>
+                <a:ext cx="10748061" cy="5626027"/>
+              </a:xfrm>
+              <a:prstGeom prst="rect">
+                <a:avLst/>
+              </a:prstGeom>
+              <a:noFill/>
+            </p:spPr>
+            <p:txBody>
+              <a:bodyPr wrap="square" rtlCol="0">
+                <a:spAutoFit/>
+              </a:bodyPr>
+              <a:lstStyle/>
+              <a:p>
+                <a:pPr>
+                  <a:lnSpc>
+                    <a:spcPct val="150000"/>
+                  </a:lnSpc>
+                </a:pPr>
+                <a:r>
+                  <a:rPr lang="pt-BR" sz="2200" b="1" dirty="0"/>
+                  <a:t>Independência de três eventos</a:t>
+                </a:r>
+              </a:p>
+              <a:p>
+                <a:pPr>
+                  <a:lnSpc>
+                    <a:spcPct val="150000"/>
+                  </a:lnSpc>
+                </a:pPr>
+                <a:endParaRPr lang="pt-BR" sz="2200" dirty="0"/>
+              </a:p>
+              <a:p>
+                <a:pPr>
+                  <a:lnSpc>
+                    <a:spcPct val="150000"/>
+                  </a:lnSpc>
+                </a:pPr>
+                <a:r>
+                  <a:rPr lang="pt-BR" sz="2200" dirty="0"/>
+                  <a:t>Para que os eventos A, B e C sejam independentes, 4 condições precisam valer ao mesmo tempo:</a:t>
+                </a:r>
+              </a:p>
+              <a:p>
+                <a:pPr>
+                  <a:lnSpc>
+                    <a:spcPct val="150000"/>
+                  </a:lnSpc>
+                </a:pPr>
+                <a:endParaRPr lang="pt-BR" sz="2200" dirty="0"/>
+              </a:p>
+              <a:p>
+                <a:pPr marL="342900" indent="-342900">
+                  <a:lnSpc>
+                    <a:spcPct val="150000"/>
+                  </a:lnSpc>
+                  <a:buFont typeface="Arial" panose="020B0604020202020204" pitchFamily="34" charset="0"/>
+                  <a:buChar char="•"/>
+                </a:pPr>
+                <a14:m>
+                  <m:oMath xmlns:m="http://schemas.openxmlformats.org/officeDocument/2006/math">
+                    <m:r>
+                      <a:rPr lang="pt-BR" sz="2200" i="1" dirty="0" smtClean="0">
+                        <a:latin typeface="Cambria Math" panose="02040503050406030204" pitchFamily="18" charset="0"/>
+                      </a:rPr>
+                      <m:t>𝑃</m:t>
+                    </m:r>
+                    <m:r>
+                      <a:rPr lang="pt-BR" sz="2200" i="1" dirty="0" smtClean="0">
+                        <a:latin typeface="Cambria Math" panose="02040503050406030204" pitchFamily="18" charset="0"/>
+                      </a:rPr>
+                      <m:t>(</m:t>
+                    </m:r>
+                    <m:r>
+                      <a:rPr lang="pt-BR" sz="2200" i="1" dirty="0" smtClean="0">
+                        <a:latin typeface="Cambria Math" panose="02040503050406030204" pitchFamily="18" charset="0"/>
+                      </a:rPr>
+                      <m:t>𝐴</m:t>
+                    </m:r>
+                    <m:r>
+                      <a:rPr lang="pt-BR" sz="2200" i="1" dirty="0" smtClean="0">
+                        <a:latin typeface="Cambria Math" panose="02040503050406030204" pitchFamily="18" charset="0"/>
+                      </a:rPr>
+                      <m:t>∩</m:t>
+                    </m:r>
+                    <m:r>
+                      <a:rPr lang="pt-BR" sz="2200" i="1" dirty="0" smtClean="0">
+                        <a:latin typeface="Cambria Math" panose="02040503050406030204" pitchFamily="18" charset="0"/>
+                      </a:rPr>
+                      <m:t>𝐵</m:t>
+                    </m:r>
+                    <m:r>
+                      <a:rPr lang="pt-BR" sz="2200" i="1" dirty="0" smtClean="0">
+                        <a:latin typeface="Cambria Math" panose="02040503050406030204" pitchFamily="18" charset="0"/>
+                      </a:rPr>
+                      <m:t>) = </m:t>
+                    </m:r>
+                    <m:r>
+                      <a:rPr lang="pt-BR" sz="2200" i="1" dirty="0" smtClean="0">
+                        <a:latin typeface="Cambria Math" panose="02040503050406030204" pitchFamily="18" charset="0"/>
+                      </a:rPr>
+                      <m:t>𝑃</m:t>
+                    </m:r>
+                    <m:r>
+                      <a:rPr lang="pt-BR" sz="2200" i="1" dirty="0" smtClean="0">
+                        <a:latin typeface="Cambria Math" panose="02040503050406030204" pitchFamily="18" charset="0"/>
+                      </a:rPr>
+                      <m:t>(</m:t>
+                    </m:r>
+                    <m:r>
+                      <a:rPr lang="pt-BR" sz="2200" i="1" dirty="0" smtClean="0">
+                        <a:latin typeface="Cambria Math" panose="02040503050406030204" pitchFamily="18" charset="0"/>
+                      </a:rPr>
+                      <m:t>𝐴</m:t>
+                    </m:r>
+                    <m:r>
+                      <a:rPr lang="pt-BR" sz="2200" i="1" dirty="0" smtClean="0">
+                        <a:latin typeface="Cambria Math" panose="02040503050406030204" pitchFamily="18" charset="0"/>
+                      </a:rPr>
+                      <m:t>)·</m:t>
+                    </m:r>
+                    <m:r>
+                      <a:rPr lang="pt-BR" sz="2200" i="1" dirty="0" smtClean="0">
+                        <a:latin typeface="Cambria Math" panose="02040503050406030204" pitchFamily="18" charset="0"/>
+                      </a:rPr>
+                      <m:t>𝑃</m:t>
+                    </m:r>
+                    <m:r>
+                      <a:rPr lang="pt-BR" sz="2200" i="1" dirty="0" smtClean="0">
+                        <a:latin typeface="Cambria Math" panose="02040503050406030204" pitchFamily="18" charset="0"/>
+                      </a:rPr>
+                      <m:t>(</m:t>
+                    </m:r>
+                    <m:r>
+                      <a:rPr lang="pt-BR" sz="2200" i="1" dirty="0" smtClean="0">
+                        <a:latin typeface="Cambria Math" panose="02040503050406030204" pitchFamily="18" charset="0"/>
+                      </a:rPr>
+                      <m:t>𝐵</m:t>
+                    </m:r>
+                    <m:r>
+                      <a:rPr lang="pt-BR" sz="2200" i="1" dirty="0" smtClean="0">
+                        <a:latin typeface="Cambria Math" panose="02040503050406030204" pitchFamily="18" charset="0"/>
+                      </a:rPr>
+                      <m:t>)</m:t>
+                    </m:r>
+                  </m:oMath>
+                </a14:m>
+                <a:endParaRPr lang="pt-BR" sz="2200" dirty="0"/>
+              </a:p>
+              <a:p>
+                <a:pPr marL="342900" indent="-342900">
+                  <a:lnSpc>
+                    <a:spcPct val="150000"/>
+                  </a:lnSpc>
+                  <a:buFont typeface="Arial" panose="020B0604020202020204" pitchFamily="34" charset="0"/>
+                  <a:buChar char="•"/>
+                </a:pPr>
+                <a14:m>
+                  <m:oMath xmlns:m="http://schemas.openxmlformats.org/officeDocument/2006/math">
+                    <m:r>
+                      <a:rPr lang="pt-BR" sz="2200" i="1" dirty="0" smtClean="0">
+                        <a:latin typeface="Cambria Math" panose="02040503050406030204" pitchFamily="18" charset="0"/>
+                      </a:rPr>
+                      <m:t>𝑃</m:t>
+                    </m:r>
+                    <m:r>
+                      <a:rPr lang="pt-BR" sz="2200" i="1" dirty="0" smtClean="0">
+                        <a:latin typeface="Cambria Math" panose="02040503050406030204" pitchFamily="18" charset="0"/>
+                      </a:rPr>
+                      <m:t>(</m:t>
+                    </m:r>
+                    <m:r>
+                      <a:rPr lang="pt-BR" sz="2200" i="1" dirty="0" smtClean="0">
+                        <a:latin typeface="Cambria Math" panose="02040503050406030204" pitchFamily="18" charset="0"/>
+                      </a:rPr>
+                      <m:t>𝐴</m:t>
+                    </m:r>
+                    <m:r>
+                      <a:rPr lang="pt-BR" sz="2200" i="1" dirty="0" smtClean="0">
+                        <a:latin typeface="Cambria Math" panose="02040503050406030204" pitchFamily="18" charset="0"/>
+                      </a:rPr>
+                      <m:t>∩</m:t>
+                    </m:r>
+                    <m:r>
+                      <a:rPr lang="pt-BR" sz="2200" i="1" dirty="0" smtClean="0">
+                        <a:latin typeface="Cambria Math" panose="02040503050406030204" pitchFamily="18" charset="0"/>
+                      </a:rPr>
+                      <m:t>𝐶</m:t>
+                    </m:r>
+                    <m:r>
+                      <a:rPr lang="pt-BR" sz="2200" i="1" dirty="0" smtClean="0">
+                        <a:latin typeface="Cambria Math" panose="02040503050406030204" pitchFamily="18" charset="0"/>
+                      </a:rPr>
+                      <m:t>) = </m:t>
+                    </m:r>
+                    <m:r>
+                      <a:rPr lang="pt-BR" sz="2200" i="1" dirty="0" smtClean="0">
+                        <a:latin typeface="Cambria Math" panose="02040503050406030204" pitchFamily="18" charset="0"/>
+                      </a:rPr>
+                      <m:t>𝑃</m:t>
+                    </m:r>
+                    <m:r>
+                      <a:rPr lang="pt-BR" sz="2200" i="1" dirty="0" smtClean="0">
+                        <a:latin typeface="Cambria Math" panose="02040503050406030204" pitchFamily="18" charset="0"/>
+                      </a:rPr>
+                      <m:t>(</m:t>
+                    </m:r>
+                    <m:r>
+                      <a:rPr lang="pt-BR" sz="2200" i="1" dirty="0" smtClean="0">
+                        <a:latin typeface="Cambria Math" panose="02040503050406030204" pitchFamily="18" charset="0"/>
+                      </a:rPr>
+                      <m:t>𝐴</m:t>
+                    </m:r>
+                    <m:r>
+                      <a:rPr lang="pt-BR" sz="2200" i="1" dirty="0" smtClean="0">
+                        <a:latin typeface="Cambria Math" panose="02040503050406030204" pitchFamily="18" charset="0"/>
+                      </a:rPr>
+                      <m:t>)·</m:t>
+                    </m:r>
+                    <m:r>
+                      <a:rPr lang="pt-BR" sz="2200" i="1" dirty="0" smtClean="0">
+                        <a:latin typeface="Cambria Math" panose="02040503050406030204" pitchFamily="18" charset="0"/>
+                      </a:rPr>
+                      <m:t>𝑃</m:t>
+                    </m:r>
+                    <m:r>
+                      <a:rPr lang="pt-BR" sz="2200" i="1" dirty="0" smtClean="0">
+                        <a:latin typeface="Cambria Math" panose="02040503050406030204" pitchFamily="18" charset="0"/>
+                      </a:rPr>
+                      <m:t>(</m:t>
+                    </m:r>
+                    <m:r>
+                      <a:rPr lang="pt-BR" sz="2200" i="1" dirty="0" smtClean="0">
+                        <a:latin typeface="Cambria Math" panose="02040503050406030204" pitchFamily="18" charset="0"/>
+                      </a:rPr>
+                      <m:t>𝐶</m:t>
+                    </m:r>
+                    <m:r>
+                      <a:rPr lang="pt-BR" sz="2200" i="1" dirty="0" smtClean="0">
+                        <a:latin typeface="Cambria Math" panose="02040503050406030204" pitchFamily="18" charset="0"/>
+                      </a:rPr>
+                      <m:t>)</m:t>
+                    </m:r>
+                  </m:oMath>
+                </a14:m>
+                <a:endParaRPr lang="pt-BR" sz="2200" dirty="0"/>
+              </a:p>
+              <a:p>
+                <a:pPr marL="342900" indent="-342900">
+                  <a:lnSpc>
+                    <a:spcPct val="150000"/>
+                  </a:lnSpc>
+                  <a:buFont typeface="Arial" panose="020B0604020202020204" pitchFamily="34" charset="0"/>
+                  <a:buChar char="•"/>
+                </a:pPr>
+                <a14:m>
+                  <m:oMath xmlns:m="http://schemas.openxmlformats.org/officeDocument/2006/math">
+                    <m:r>
+                      <a:rPr lang="pt-BR" sz="2200" i="1" dirty="0" smtClean="0">
+                        <a:latin typeface="Cambria Math" panose="02040503050406030204" pitchFamily="18" charset="0"/>
+                      </a:rPr>
+                      <m:t>𝑃</m:t>
+                    </m:r>
+                    <m:r>
+                      <a:rPr lang="pt-BR" sz="2200" i="1" dirty="0" smtClean="0">
+                        <a:latin typeface="Cambria Math" panose="02040503050406030204" pitchFamily="18" charset="0"/>
+                      </a:rPr>
+                      <m:t>(</m:t>
+                    </m:r>
+                    <m:r>
+                      <a:rPr lang="pt-BR" sz="2200" i="1" dirty="0" smtClean="0">
+                        <a:latin typeface="Cambria Math" panose="02040503050406030204" pitchFamily="18" charset="0"/>
+                      </a:rPr>
+                      <m:t>𝐵</m:t>
+                    </m:r>
+                    <m:r>
+                      <a:rPr lang="pt-BR" sz="2200" i="1" dirty="0" smtClean="0">
+                        <a:latin typeface="Cambria Math" panose="02040503050406030204" pitchFamily="18" charset="0"/>
+                      </a:rPr>
+                      <m:t>∩</m:t>
+                    </m:r>
+                    <m:r>
+                      <a:rPr lang="pt-BR" sz="2200" i="1" dirty="0" smtClean="0">
+                        <a:latin typeface="Cambria Math" panose="02040503050406030204" pitchFamily="18" charset="0"/>
+                      </a:rPr>
+                      <m:t>𝐶</m:t>
+                    </m:r>
+                    <m:r>
+                      <a:rPr lang="pt-BR" sz="2200" i="1" dirty="0" smtClean="0">
+                        <a:latin typeface="Cambria Math" panose="02040503050406030204" pitchFamily="18" charset="0"/>
+                      </a:rPr>
+                      <m:t>) = </m:t>
+                    </m:r>
+                    <m:r>
+                      <a:rPr lang="pt-BR" sz="2200" i="1" dirty="0" smtClean="0">
+                        <a:latin typeface="Cambria Math" panose="02040503050406030204" pitchFamily="18" charset="0"/>
+                      </a:rPr>
+                      <m:t>𝑃</m:t>
+                    </m:r>
+                    <m:r>
+                      <a:rPr lang="pt-BR" sz="2200" i="1" dirty="0" smtClean="0">
+                        <a:latin typeface="Cambria Math" panose="02040503050406030204" pitchFamily="18" charset="0"/>
+                      </a:rPr>
+                      <m:t>(</m:t>
+                    </m:r>
+                    <m:r>
+                      <a:rPr lang="pt-BR" sz="2200" i="1" dirty="0" smtClean="0">
+                        <a:latin typeface="Cambria Math" panose="02040503050406030204" pitchFamily="18" charset="0"/>
+                      </a:rPr>
+                      <m:t>𝐵</m:t>
+                    </m:r>
+                    <m:r>
+                      <a:rPr lang="pt-BR" sz="2200" i="1" dirty="0" smtClean="0">
+                        <a:latin typeface="Cambria Math" panose="02040503050406030204" pitchFamily="18" charset="0"/>
+                      </a:rPr>
+                      <m:t>)·</m:t>
+                    </m:r>
+                    <m:r>
+                      <a:rPr lang="pt-BR" sz="2200" i="1" dirty="0" smtClean="0">
+                        <a:latin typeface="Cambria Math" panose="02040503050406030204" pitchFamily="18" charset="0"/>
+                      </a:rPr>
+                      <m:t>𝑃</m:t>
+                    </m:r>
+                    <m:r>
+                      <a:rPr lang="pt-BR" sz="2200" i="1" dirty="0" smtClean="0">
+                        <a:latin typeface="Cambria Math" panose="02040503050406030204" pitchFamily="18" charset="0"/>
+                      </a:rPr>
+                      <m:t>(</m:t>
+                    </m:r>
+                    <m:r>
+                      <a:rPr lang="pt-BR" sz="2200" i="1" dirty="0" smtClean="0">
+                        <a:latin typeface="Cambria Math" panose="02040503050406030204" pitchFamily="18" charset="0"/>
+                      </a:rPr>
+                      <m:t>𝐶</m:t>
+                    </m:r>
+                    <m:r>
+                      <a:rPr lang="pt-BR" sz="2200" i="1" dirty="0" smtClean="0">
+                        <a:latin typeface="Cambria Math" panose="02040503050406030204" pitchFamily="18" charset="0"/>
+                      </a:rPr>
+                      <m:t>)</m:t>
+                    </m:r>
+                  </m:oMath>
+                </a14:m>
+                <a:endParaRPr lang="pt-BR" sz="2200" dirty="0"/>
+              </a:p>
+              <a:p>
+                <a:pPr marL="342900" indent="-342900">
+                  <a:lnSpc>
+                    <a:spcPct val="150000"/>
+                  </a:lnSpc>
+                  <a:buFont typeface="Arial" panose="020B0604020202020204" pitchFamily="34" charset="0"/>
+                  <a:buChar char="•"/>
+                </a:pPr>
+                <a14:m>
+                  <m:oMath xmlns:m="http://schemas.openxmlformats.org/officeDocument/2006/math">
+                    <m:r>
+                      <a:rPr lang="pt-BR" sz="2200" i="1" dirty="0" smtClean="0">
+                        <a:latin typeface="Cambria Math" panose="02040503050406030204" pitchFamily="18" charset="0"/>
+                      </a:rPr>
+                      <m:t>𝑃</m:t>
+                    </m:r>
+                    <m:r>
+                      <a:rPr lang="pt-BR" sz="2200" i="1" dirty="0" smtClean="0">
+                        <a:latin typeface="Cambria Math" panose="02040503050406030204" pitchFamily="18" charset="0"/>
+                      </a:rPr>
+                      <m:t>(</m:t>
+                    </m:r>
+                    <m:r>
+                      <a:rPr lang="pt-BR" sz="2200" i="1" dirty="0" smtClean="0">
+                        <a:latin typeface="Cambria Math" panose="02040503050406030204" pitchFamily="18" charset="0"/>
+                      </a:rPr>
+                      <m:t>𝐴</m:t>
+                    </m:r>
+                    <m:r>
+                      <a:rPr lang="pt-BR" sz="2200" i="1" dirty="0" smtClean="0">
+                        <a:latin typeface="Cambria Math" panose="02040503050406030204" pitchFamily="18" charset="0"/>
+                      </a:rPr>
+                      <m:t>∩</m:t>
+                    </m:r>
+                    <m:r>
+                      <a:rPr lang="pt-BR" sz="2200" i="1" dirty="0" smtClean="0">
+                        <a:latin typeface="Cambria Math" panose="02040503050406030204" pitchFamily="18" charset="0"/>
+                      </a:rPr>
+                      <m:t>𝐵</m:t>
+                    </m:r>
+                    <m:r>
+                      <a:rPr lang="pt-BR" sz="2200" i="1" dirty="0" smtClean="0">
+                        <a:latin typeface="Cambria Math" panose="02040503050406030204" pitchFamily="18" charset="0"/>
+                      </a:rPr>
+                      <m:t>∩</m:t>
+                    </m:r>
+                    <m:r>
+                      <a:rPr lang="pt-BR" sz="2200" i="1" dirty="0" smtClean="0">
+                        <a:latin typeface="Cambria Math" panose="02040503050406030204" pitchFamily="18" charset="0"/>
+                      </a:rPr>
+                      <m:t>𝐶</m:t>
+                    </m:r>
+                    <m:r>
+                      <a:rPr lang="pt-BR" sz="2200" i="1" dirty="0" smtClean="0">
+                        <a:latin typeface="Cambria Math" panose="02040503050406030204" pitchFamily="18" charset="0"/>
+                      </a:rPr>
+                      <m:t>) = </m:t>
+                    </m:r>
+                    <m:r>
+                      <a:rPr lang="pt-BR" sz="2200" i="1" dirty="0" smtClean="0">
+                        <a:latin typeface="Cambria Math" panose="02040503050406030204" pitchFamily="18" charset="0"/>
+                      </a:rPr>
+                      <m:t>𝑃</m:t>
+                    </m:r>
+                    <m:r>
+                      <a:rPr lang="pt-BR" sz="2200" i="1" dirty="0" smtClean="0">
+                        <a:latin typeface="Cambria Math" panose="02040503050406030204" pitchFamily="18" charset="0"/>
+                      </a:rPr>
+                      <m:t>(</m:t>
+                    </m:r>
+                    <m:r>
+                      <a:rPr lang="pt-BR" sz="2200" i="1" dirty="0" smtClean="0">
+                        <a:latin typeface="Cambria Math" panose="02040503050406030204" pitchFamily="18" charset="0"/>
+                      </a:rPr>
+                      <m:t>𝐴</m:t>
+                    </m:r>
+                    <m:r>
+                      <a:rPr lang="pt-BR" sz="2200" i="1" dirty="0" smtClean="0">
+                        <a:latin typeface="Cambria Math" panose="02040503050406030204" pitchFamily="18" charset="0"/>
+                      </a:rPr>
+                      <m:t>)·</m:t>
+                    </m:r>
+                    <m:r>
+                      <a:rPr lang="pt-BR" sz="2200" i="1" dirty="0" smtClean="0">
+                        <a:latin typeface="Cambria Math" panose="02040503050406030204" pitchFamily="18" charset="0"/>
+                      </a:rPr>
+                      <m:t>𝑃</m:t>
+                    </m:r>
+                    <m:r>
+                      <a:rPr lang="pt-BR" sz="2200" i="1" dirty="0" smtClean="0">
+                        <a:latin typeface="Cambria Math" panose="02040503050406030204" pitchFamily="18" charset="0"/>
+                      </a:rPr>
+                      <m:t>(</m:t>
+                    </m:r>
+                    <m:r>
+                      <a:rPr lang="pt-BR" sz="2200" i="1" dirty="0" smtClean="0">
+                        <a:latin typeface="Cambria Math" panose="02040503050406030204" pitchFamily="18" charset="0"/>
+                      </a:rPr>
+                      <m:t>𝐵</m:t>
+                    </m:r>
+                    <m:r>
+                      <a:rPr lang="pt-BR" sz="2200" i="1" dirty="0" smtClean="0">
+                        <a:latin typeface="Cambria Math" panose="02040503050406030204" pitchFamily="18" charset="0"/>
+                      </a:rPr>
+                      <m:t>)·</m:t>
+                    </m:r>
+                    <m:r>
+                      <a:rPr lang="pt-BR" sz="2200" i="1" dirty="0" smtClean="0">
+                        <a:latin typeface="Cambria Math" panose="02040503050406030204" pitchFamily="18" charset="0"/>
+                      </a:rPr>
+                      <m:t>𝑃</m:t>
+                    </m:r>
+                    <m:r>
+                      <a:rPr lang="pt-BR" sz="2200" i="1" dirty="0" smtClean="0">
+                        <a:latin typeface="Cambria Math" panose="02040503050406030204" pitchFamily="18" charset="0"/>
+                      </a:rPr>
+                      <m:t>(</m:t>
+                    </m:r>
+                    <m:r>
+                      <a:rPr lang="pt-BR" sz="2200" i="1" dirty="0" smtClean="0">
+                        <a:latin typeface="Cambria Math" panose="02040503050406030204" pitchFamily="18" charset="0"/>
+                      </a:rPr>
+                      <m:t>𝐶</m:t>
+                    </m:r>
+                    <m:r>
+                      <a:rPr lang="pt-BR" sz="2200" i="1" dirty="0" smtClean="0">
+                        <a:latin typeface="Cambria Math" panose="02040503050406030204" pitchFamily="18" charset="0"/>
+                      </a:rPr>
+                      <m:t>)</m:t>
+                    </m:r>
+                  </m:oMath>
+                </a14:m>
+                <a:endParaRPr lang="pt-BR" sz="2200" dirty="0"/>
+              </a:p>
+              <a:p>
+                <a:pPr>
+                  <a:lnSpc>
+                    <a:spcPct val="150000"/>
+                  </a:lnSpc>
+                </a:pPr>
+                <a:endParaRPr lang="pt-BR" sz="2200" dirty="0"/>
+              </a:p>
+              <a:p>
+                <a:pPr>
+                  <a:lnSpc>
+                    <a:spcPct val="150000"/>
+                  </a:lnSpc>
+                </a:pPr>
+                <a:r>
+                  <a:rPr lang="pt-BR" sz="2200" dirty="0"/>
+                  <a:t>Se apenas uma dessas condições falhar, os eventos não são independentes.</a:t>
+                </a:r>
+              </a:p>
+            </p:txBody>
+          </p:sp>
+        </mc:Choice>
+        <mc:Fallback xmlns="">
+          <p:sp>
+            <p:nvSpPr>
+              <p:cNvPr id="6" name="CaixaDeTexto 5">
+                <a:extLst>
+                  <a:ext uri="{FF2B5EF4-FFF2-40B4-BE49-F238E27FC236}">
+                    <a16:creationId xmlns:a16="http://schemas.microsoft.com/office/drawing/2014/main" id="{720B10DA-C761-4DEE-8D86-E170E1C2E981}"/>
+                  </a:ext>
+                </a:extLst>
+              </p:cNvPr>
+              <p:cNvSpPr txBox="1">
+                <a:spLocks noRot="1" noChangeAspect="1" noMove="1" noResize="1" noEditPoints="1" noAdjustHandles="1" noChangeArrowheads="1" noChangeShapeType="1" noTextEdit="1"/>
+              </p:cNvSpPr>
+              <p:nvPr/>
+            </p:nvSpPr>
+            <p:spPr>
+              <a:xfrm>
+                <a:off x="629138" y="644086"/>
+                <a:ext cx="10748061" cy="5626027"/>
+              </a:xfrm>
+              <a:prstGeom prst="rect">
+                <a:avLst/>
+              </a:prstGeom>
+              <a:blipFill>
+                <a:blip r:embed="rId2"/>
+                <a:stretch>
+                  <a:fillRect l="-737" b="-1192"/>
+                </a:stretch>
+              </a:blipFill>
+            </p:spPr>
+            <p:txBody>
+              <a:bodyPr/>
+              <a:lstStyle/>
+              <a:p>
+                <a:r>
+                  <a:rPr lang="pt-BR">
+                    <a:noFill/>
+                  </a:rPr>
+                  <a:t> </a:t>
+                </a:r>
+              </a:p>
+            </p:txBody>
+          </p:sp>
+        </mc:Fallback>
+      </mc:AlternateContent>
+      <p:sp>
+        <p:nvSpPr>
+          <p:cNvPr id="3" name="CaixaDeTexto 2">
+            <a:extLst>
+              <a:ext uri="{FF2B5EF4-FFF2-40B4-BE49-F238E27FC236}">
+                <a16:creationId xmlns:a16="http://schemas.microsoft.com/office/drawing/2014/main" id="{19131A04-B5D6-4211-8B49-4615DE5797E9}"/>
+              </a:ext>
+            </a:extLst>
+          </p:cNvPr>
+          <p:cNvSpPr txBox="1"/>
+          <p:nvPr/>
+        </p:nvSpPr>
+        <p:spPr>
+          <a:xfrm>
+            <a:off x="361188" y="6463893"/>
+            <a:ext cx="7772400" cy="308152"/>
+          </a:xfrm>
+          <a:prstGeom prst="rect">
+            <a:avLst/>
+          </a:prstGeom>
+          <a:noFill/>
+        </p:spPr>
+        <p:txBody>
+          <a:bodyPr wrap="none" rtlCol="0">
+            <a:spAutoFit/>
+          </a:bodyPr>
+          <a:lstStyle/>
+          <a:p>
+            <a:r>
+              <a:rPr lang="pt-BR" sz="1400" dirty="0"/>
+              <a:t>CEA055 – Estatística e Probabilidade – Prof. Marcos Goulart Lima</a:t>
+            </a:r>
+          </a:p>
+        </p:txBody>
+      </p:sp>
+    </p:spTree>
+    <p:extLst>
+      <p:ext uri="{BB962C8B-B14F-4D97-AF65-F5344CB8AC3E}">
+        <p14:creationId xmlns:p14="http://schemas.microsoft.com/office/powerpoint/2010/main" val="3046554799"/>
+      </p:ext>
+    </p:extLst>
+  </p:cSld>
+  <p:clrMapOvr>
+    <a:masterClrMapping/>
+  </p:clrMapOvr>
+</p:sld>
+</file>
+
+<file path=ppt/slides/slide12.xml><?xml version="1.0" encoding="utf-8"?>
+<p:sld xmlns:a="http://schemas.openxmlformats.org/drawingml/2006/main" xmlns:r="http://schemas.openxmlformats.org/officeDocument/2006/relationships" xmlns:p="http://schemas.openxmlformats.org/presentationml/2006/main">
+  <p:cSld>
+    <p:spTree>
+      <p:nvGrpSpPr>
+        <p:cNvPr id="1" name=""/>
+        <p:cNvGrpSpPr/>
+        <p:nvPr/>
+      </p:nvGrpSpPr>
+      <p:grpSpPr>
+        <a:xfrm>
+          <a:off x="0" y="0"/>
+          <a:ext cx="0" cy="0"/>
+          <a:chOff x="0" y="0"/>
+          <a:chExt cx="0" cy="0"/>
+        </a:xfrm>
+      </p:grpSpPr>
+      <p:sp>
+        <p:nvSpPr>
+          <p:cNvPr id="6" name="CaixaDeTexto 5">
+            <a:extLst>
+              <a:ext uri="{FF2B5EF4-FFF2-40B4-BE49-F238E27FC236}">
+                <a16:creationId xmlns:a16="http://schemas.microsoft.com/office/drawing/2014/main" id="{720B10DA-C761-4DEE-8D86-E170E1C2E981}"/>
+              </a:ext>
+            </a:extLst>
+          </p:cNvPr>
+          <p:cNvSpPr txBox="1"/>
+          <p:nvPr/>
+        </p:nvSpPr>
+        <p:spPr>
+          <a:xfrm>
+            <a:off x="629138" y="644086"/>
+            <a:ext cx="10748061" cy="5021055"/>
+          </a:xfrm>
+          <a:prstGeom prst="rect">
+            <a:avLst/>
+          </a:prstGeom>
+          <a:noFill/>
+        </p:spPr>
+        <p:txBody>
+          <a:bodyPr wrap="square" rtlCol="0">
+            <a:spAutoFit/>
+          </a:bodyPr>
+          <a:lstStyle/>
+          <a:p>
+            <a:pPr>
+              <a:lnSpc>
+                <a:spcPct val="150000"/>
+              </a:lnSpc>
+            </a:pPr>
+            <a:r>
+              <a:rPr lang="pt-BR" sz="2400" b="1" dirty="0"/>
+              <a:t>Exclusivos não são independentes</a:t>
+            </a:r>
+          </a:p>
+          <a:p>
+            <a:pPr>
+              <a:lnSpc>
+                <a:spcPct val="150000"/>
+              </a:lnSpc>
+            </a:pPr>
+            <a:endParaRPr lang="pt-BR" sz="2400" dirty="0"/>
+          </a:p>
+          <a:p>
+            <a:pPr>
+              <a:lnSpc>
+                <a:spcPct val="150000"/>
+              </a:lnSpc>
+            </a:pPr>
+            <a:r>
+              <a:rPr lang="pt-BR" sz="2400" dirty="0"/>
+              <a:t>Se A e B são mutuamente exclusivos, então A e B são dependentes. </a:t>
+            </a:r>
+          </a:p>
+          <a:p>
+            <a:pPr>
+              <a:lnSpc>
+                <a:spcPct val="150000"/>
+              </a:lnSpc>
+            </a:pPr>
+            <a:r>
+              <a:rPr lang="pt-BR" sz="2400" dirty="0"/>
+              <a:t>Se A ocorre, B não ocorre — a ocorrência de um condiciona a não ocorrência do outro.</a:t>
+            </a:r>
+          </a:p>
+          <a:p>
+            <a:pPr>
+              <a:lnSpc>
+                <a:spcPct val="150000"/>
+              </a:lnSpc>
+            </a:pPr>
+            <a:endParaRPr lang="pt-BR" sz="2400" dirty="0"/>
+          </a:p>
+          <a:p>
+            <a:pPr>
+              <a:lnSpc>
+                <a:spcPct val="150000"/>
+              </a:lnSpc>
+            </a:pPr>
+            <a:r>
+              <a:rPr lang="pt-BR" sz="2400" b="1" dirty="0"/>
+              <a:t>Matematicamente:</a:t>
+            </a:r>
+            <a:r>
+              <a:rPr lang="pt-BR" sz="2400" dirty="0"/>
+              <a:t> se A e B são mutuamente exclusivos, A∩B = ∅, logo P(A∩B) = 0. Mas se P(A) &gt; 0 e P(B) &gt; 0, então P(A)·P(B) &gt; 0. Como P(A∩B) ≠ P(A)·P(B), a definição de independência falha — </a:t>
+            </a:r>
+            <a:r>
+              <a:rPr lang="pt-BR" sz="2400" b="1" dirty="0"/>
+              <a:t>A e B são dependentes</a:t>
+            </a:r>
+            <a:r>
+              <a:rPr lang="pt-BR" sz="2400" dirty="0"/>
+              <a:t>.</a:t>
+            </a:r>
+          </a:p>
+        </p:txBody>
+      </p:sp>
+      <p:sp>
+        <p:nvSpPr>
+          <p:cNvPr id="3" name="CaixaDeTexto 2">
+            <a:extLst>
+              <a:ext uri="{FF2B5EF4-FFF2-40B4-BE49-F238E27FC236}">
+                <a16:creationId xmlns:a16="http://schemas.microsoft.com/office/drawing/2014/main" id="{19131A04-B5D6-4211-8B49-4615DE5797E9}"/>
+              </a:ext>
+            </a:extLst>
+          </p:cNvPr>
+          <p:cNvSpPr txBox="1"/>
+          <p:nvPr/>
+        </p:nvSpPr>
+        <p:spPr>
+          <a:xfrm>
+            <a:off x="361188" y="6463893"/>
+            <a:ext cx="7772400" cy="308152"/>
+          </a:xfrm>
+          <a:prstGeom prst="rect">
+            <a:avLst/>
+          </a:prstGeom>
+          <a:noFill/>
+        </p:spPr>
+        <p:txBody>
+          <a:bodyPr wrap="none" rtlCol="0">
+            <a:spAutoFit/>
+          </a:bodyPr>
+          <a:lstStyle/>
+          <a:p>
+            <a:r>
+              <a:rPr lang="pt-BR" sz="1400" dirty="0"/>
+              <a:t>CEA055 – Estatística e Probabilidade – Prof. Marcos Goulart Lima</a:t>
+            </a:r>
+          </a:p>
+        </p:txBody>
+      </p:sp>
+    </p:spTree>
+    <p:extLst>
+      <p:ext uri="{BB962C8B-B14F-4D97-AF65-F5344CB8AC3E}">
+        <p14:creationId xmlns:p14="http://schemas.microsoft.com/office/powerpoint/2010/main" val="735068485"/>
+      </p:ext>
+    </p:extLst>
+  </p:cSld>
+  <p:clrMapOvr>
+    <a:masterClrMapping/>
+  </p:clrMapOvr>
+</p:sld>
+</file>
+
+<file path=ppt/slides/slide13.xml><?xml version="1.0" encoding="utf-8"?>
+<p:sld xmlns:a="http://schemas.openxmlformats.org/drawingml/2006/main" xmlns:r="http://schemas.openxmlformats.org/officeDocument/2006/relationships" xmlns:p="http://schemas.openxmlformats.org/presentationml/2006/main">
+  <p:cSld>
+    <p:spTree>
+      <p:nvGrpSpPr>
+        <p:cNvPr id="1" name=""/>
+        <p:cNvGrpSpPr/>
+        <p:nvPr/>
+      </p:nvGrpSpPr>
+      <p:grpSpPr>
+        <a:xfrm>
+          <a:off x="0" y="0"/>
+          <a:ext cx="0" cy="0"/>
+          <a:chOff x="0" y="0"/>
+          <a:chExt cx="0" cy="0"/>
+        </a:xfrm>
+      </p:grpSpPr>
+      <mc:AlternateContent xmlns:mc="http://schemas.openxmlformats.org/markup-compatibility/2006" xmlns:a14="http://schemas.microsoft.com/office/drawing/2010/main">
+        <mc:Choice Requires="a14">
+          <p:sp>
+            <p:nvSpPr>
+              <p:cNvPr id="6" name="CaixaDeTexto 5">
+                <a:extLst>
+                  <a:ext uri="{FF2B5EF4-FFF2-40B4-BE49-F238E27FC236}">
+                    <a16:creationId xmlns:a16="http://schemas.microsoft.com/office/drawing/2014/main" id="{720B10DA-C761-4DEE-8D86-E170E1C2E981}"/>
+                  </a:ext>
+                </a:extLst>
+              </p:cNvPr>
+              <p:cNvSpPr txBox="1"/>
+              <p:nvPr/>
+            </p:nvSpPr>
+            <p:spPr>
+              <a:xfrm>
+                <a:off x="629138" y="644086"/>
+                <a:ext cx="10748061" cy="4464620"/>
+              </a:xfrm>
+              <a:prstGeom prst="rect">
+                <a:avLst/>
+              </a:prstGeom>
+              <a:noFill/>
+            </p:spPr>
+            <p:txBody>
+              <a:bodyPr wrap="square" rtlCol="0">
+                <a:spAutoFit/>
+              </a:bodyPr>
+              <a:lstStyle/>
+              <a:p>
+                <a:pPr>
+                  <a:lnSpc>
+                    <a:spcPct val="150000"/>
+                  </a:lnSpc>
+                </a:pPr>
+                <a:r>
+                  <a:rPr lang="pt-BR" sz="2400" b="1" dirty="0"/>
+                  <a:t>Exemplo. </a:t>
+                </a:r>
+                <a:r>
+                  <a:rPr lang="pt-BR" sz="2400" dirty="0"/>
+                  <a:t>Sejam </a:t>
+                </a:r>
+                <a14:m>
+                  <m:oMath xmlns:m="http://schemas.openxmlformats.org/officeDocument/2006/math">
+                    <m:r>
+                      <a:rPr lang="pt-BR" sz="2400" i="1" dirty="0" smtClean="0">
+                        <a:latin typeface="Cambria Math" panose="02040503050406030204" pitchFamily="18" charset="0"/>
+                      </a:rPr>
+                      <m:t>𝑃</m:t>
+                    </m:r>
+                    <m:r>
+                      <a:rPr lang="pt-BR" sz="2400" i="1" dirty="0" smtClean="0">
+                        <a:latin typeface="Cambria Math" panose="02040503050406030204" pitchFamily="18" charset="0"/>
+                      </a:rPr>
+                      <m:t>(</m:t>
+                    </m:r>
+                    <m:r>
+                      <a:rPr lang="pt-BR" sz="2400" i="1" dirty="0" smtClean="0">
+                        <a:latin typeface="Cambria Math" panose="02040503050406030204" pitchFamily="18" charset="0"/>
+                      </a:rPr>
+                      <m:t>𝐴</m:t>
+                    </m:r>
+                    <m:r>
+                      <a:rPr lang="pt-BR" sz="2400" i="1" dirty="0" smtClean="0">
+                        <a:latin typeface="Cambria Math" panose="02040503050406030204" pitchFamily="18" charset="0"/>
+                      </a:rPr>
+                      <m:t>)=0,2</m:t>
+                    </m:r>
+                  </m:oMath>
+                </a14:m>
+                <a:r>
+                  <a:rPr lang="pt-BR" sz="2400" dirty="0"/>
+                  <a:t> e </a:t>
+                </a:r>
+                <a14:m>
+                  <m:oMath xmlns:m="http://schemas.openxmlformats.org/officeDocument/2006/math">
+                    <m:r>
+                      <a:rPr lang="pt-BR" sz="2400" i="1" dirty="0" smtClean="0">
+                        <a:latin typeface="Cambria Math" panose="02040503050406030204" pitchFamily="18" charset="0"/>
+                      </a:rPr>
+                      <m:t>𝑃</m:t>
+                    </m:r>
+                    <m:r>
+                      <a:rPr lang="pt-BR" sz="2400" i="1" dirty="0" smtClean="0">
+                        <a:latin typeface="Cambria Math" panose="02040503050406030204" pitchFamily="18" charset="0"/>
+                      </a:rPr>
+                      <m:t>(</m:t>
+                    </m:r>
+                    <m:r>
+                      <a:rPr lang="pt-BR" sz="2400" i="1" dirty="0" smtClean="0">
+                        <a:latin typeface="Cambria Math" panose="02040503050406030204" pitchFamily="18" charset="0"/>
+                      </a:rPr>
+                      <m:t>𝐴</m:t>
+                    </m:r>
+                    <m:r>
+                      <a:rPr lang="pt-BR" sz="2400" i="1" dirty="0" smtClean="0">
+                        <a:latin typeface="Cambria Math" panose="02040503050406030204" pitchFamily="18" charset="0"/>
+                      </a:rPr>
+                      <m:t>∪</m:t>
+                    </m:r>
+                    <m:r>
+                      <a:rPr lang="pt-BR" sz="2400" i="1" dirty="0" smtClean="0">
+                        <a:latin typeface="Cambria Math" panose="02040503050406030204" pitchFamily="18" charset="0"/>
+                      </a:rPr>
+                      <m:t>𝐵</m:t>
+                    </m:r>
+                    <m:r>
+                      <a:rPr lang="pt-BR" sz="2400" i="1" dirty="0" smtClean="0">
+                        <a:latin typeface="Cambria Math" panose="02040503050406030204" pitchFamily="18" charset="0"/>
+                      </a:rPr>
+                      <m:t>)=0,6</m:t>
+                    </m:r>
+                  </m:oMath>
+                </a14:m>
+                <a:r>
+                  <a:rPr lang="pt-BR" sz="2400" dirty="0"/>
+                  <a:t>. Calcule P(B), supondo A e B:</a:t>
+                </a:r>
+              </a:p>
+              <a:p>
+                <a:pPr>
+                  <a:lnSpc>
+                    <a:spcPct val="150000"/>
+                  </a:lnSpc>
+                </a:pPr>
+                <a:r>
+                  <a:rPr lang="pt-BR" sz="2400" dirty="0"/>
+                  <a:t>a) mutuamente exclusivos;</a:t>
+                </a:r>
+              </a:p>
+              <a:p>
+                <a:pPr>
+                  <a:lnSpc>
+                    <a:spcPct val="150000"/>
+                  </a:lnSpc>
+                </a:pPr>
+                <a:r>
+                  <a:rPr lang="pt-BR" sz="2400" dirty="0"/>
+                  <a:t>b) independentes.</a:t>
+                </a:r>
+              </a:p>
+              <a:p>
+                <a:pPr>
+                  <a:lnSpc>
+                    <a:spcPct val="150000"/>
+                  </a:lnSpc>
+                </a:pPr>
+                <a:endParaRPr lang="pt-BR" sz="2400" dirty="0"/>
+              </a:p>
+              <a:p>
+                <a:pPr>
+                  <a:lnSpc>
+                    <a:spcPct val="150000"/>
+                  </a:lnSpc>
+                </a:pPr>
+                <a:r>
+                  <a:rPr lang="pt-BR" sz="2400" dirty="0"/>
+                  <a:t>Resposta:</a:t>
+                </a:r>
+              </a:p>
+              <a:p>
+                <a:pPr>
+                  <a:lnSpc>
+                    <a:spcPct val="150000"/>
+                  </a:lnSpc>
+                </a:pPr>
+                <a:r>
+                  <a:rPr lang="pt-BR" sz="2400" dirty="0"/>
+                  <a:t>a) Se mutuamente exclusivos: P(A∪B) = P(A) + P(B) ⟹ 0,6 = 0,2 + P(B) ⟹ P(B) = 0,4.</a:t>
+                </a:r>
+              </a:p>
+              <a:p>
+                <a:pPr>
+                  <a:lnSpc>
+                    <a:spcPct val="150000"/>
+                  </a:lnSpc>
+                </a:pPr>
+                <a:r>
+                  <a:rPr lang="pt-BR" sz="2400" dirty="0"/>
+                  <a:t>b) Se independentes: P(A∪B) = P(A) + P(B) − P(A)·P(B) ⟹ 0,6 = 0,2 + P(B) − 0,2·P(B) </a:t>
+                </a:r>
+              </a:p>
+              <a:p>
+                <a:pPr>
+                  <a:lnSpc>
+                    <a:spcPct val="150000"/>
+                  </a:lnSpc>
+                </a:pPr>
+                <a:r>
+                  <a:rPr lang="pt-BR" sz="2400" dirty="0"/>
+                  <a:t>⟹ P(B) = 0,5.</a:t>
+                </a:r>
+              </a:p>
+            </p:txBody>
+          </p:sp>
+        </mc:Choice>
+        <mc:Fallback xmlns="">
+          <p:sp>
+            <p:nvSpPr>
+              <p:cNvPr id="6" name="CaixaDeTexto 5">
+                <a:extLst>
+                  <a:ext uri="{FF2B5EF4-FFF2-40B4-BE49-F238E27FC236}">
+                    <a16:creationId xmlns:a16="http://schemas.microsoft.com/office/drawing/2014/main" id="{720B10DA-C761-4DEE-8D86-E170E1C2E981}"/>
+                  </a:ext>
+                </a:extLst>
+              </p:cNvPr>
+              <p:cNvSpPr txBox="1">
+                <a:spLocks noRot="1" noChangeAspect="1" noMove="1" noResize="1" noEditPoints="1" noAdjustHandles="1" noChangeArrowheads="1" noChangeShapeType="1" noTextEdit="1"/>
+              </p:cNvSpPr>
+              <p:nvPr/>
+            </p:nvSpPr>
+            <p:spPr>
+              <a:xfrm>
+                <a:off x="629138" y="644086"/>
+                <a:ext cx="10748061" cy="4464620"/>
+              </a:xfrm>
+              <a:prstGeom prst="rect">
+                <a:avLst/>
+              </a:prstGeom>
+              <a:blipFill>
+                <a:blip r:embed="rId2"/>
+                <a:stretch>
+                  <a:fillRect l="-851" b="-2322"/>
+                </a:stretch>
+              </a:blipFill>
+            </p:spPr>
+            <p:txBody>
+              <a:bodyPr/>
+              <a:lstStyle/>
+              <a:p>
+                <a:r>
+                  <a:rPr lang="pt-BR">
+                    <a:noFill/>
+                  </a:rPr>
+                  <a:t> </a:t>
+                </a:r>
+              </a:p>
+            </p:txBody>
+          </p:sp>
+        </mc:Fallback>
+      </mc:AlternateContent>
+      <p:sp>
+        <p:nvSpPr>
+          <p:cNvPr id="3" name="CaixaDeTexto 2">
+            <a:extLst>
+              <a:ext uri="{FF2B5EF4-FFF2-40B4-BE49-F238E27FC236}">
+                <a16:creationId xmlns:a16="http://schemas.microsoft.com/office/drawing/2014/main" id="{19131A04-B5D6-4211-8B49-4615DE5797E9}"/>
+              </a:ext>
+            </a:extLst>
+          </p:cNvPr>
+          <p:cNvSpPr txBox="1"/>
+          <p:nvPr/>
+        </p:nvSpPr>
+        <p:spPr>
+          <a:xfrm>
+            <a:off x="361188" y="6463893"/>
+            <a:ext cx="7772400" cy="308152"/>
+          </a:xfrm>
+          <a:prstGeom prst="rect">
+            <a:avLst/>
+          </a:prstGeom>
+          <a:noFill/>
+        </p:spPr>
+        <p:txBody>
+          <a:bodyPr wrap="none" rtlCol="0">
+            <a:spAutoFit/>
+          </a:bodyPr>
+          <a:lstStyle/>
+          <a:p>
+            <a:r>
+              <a:rPr lang="pt-BR" sz="1400" dirty="0"/>
+              <a:t>CEA055 – Estatística e Probabilidade – Prof. Marcos Goulart Lima</a:t>
+            </a:r>
+          </a:p>
+        </p:txBody>
+      </p:sp>
+    </p:spTree>
+    <p:extLst>
+      <p:ext uri="{BB962C8B-B14F-4D97-AF65-F5344CB8AC3E}">
+        <p14:creationId xmlns:p14="http://schemas.microsoft.com/office/powerpoint/2010/main" val="2730708802"/>
+      </p:ext>
+    </p:extLst>
+  </p:cSld>
+  <p:clrMapOvr>
+    <a:masterClrMapping/>
+  </p:clrMapOvr>
+</p:sld>
+</file>
+
+<file path=ppt/slides/slide14.xml><?xml version="1.0" encoding="utf-8"?>
+<p:sld xmlns:a="http://schemas.openxmlformats.org/drawingml/2006/main" xmlns:r="http://schemas.openxmlformats.org/officeDocument/2006/relationships" xmlns:p="http://schemas.openxmlformats.org/presentationml/2006/main">
+  <p:cSld>
+    <p:spTree>
+      <p:nvGrpSpPr>
+        <p:cNvPr id="1" name=""/>
+        <p:cNvGrpSpPr/>
+        <p:nvPr/>
+      </p:nvGrpSpPr>
+      <p:grpSpPr>
+        <a:xfrm>
+          <a:off x="0" y="0"/>
+          <a:ext cx="0" cy="0"/>
+          <a:chOff x="0" y="0"/>
+          <a:chExt cx="0" cy="0"/>
+        </a:xfrm>
+      </p:grpSpPr>
+      <mc:AlternateContent xmlns:mc="http://schemas.openxmlformats.org/markup-compatibility/2006" xmlns:a14="http://schemas.microsoft.com/office/drawing/2010/main">
+        <mc:Choice Requires="a14">
+          <p:sp>
+            <p:nvSpPr>
+              <p:cNvPr id="6" name="CaixaDeTexto 5">
+                <a:extLst>
+                  <a:ext uri="{FF2B5EF4-FFF2-40B4-BE49-F238E27FC236}">
+                    <a16:creationId xmlns:a16="http://schemas.microsoft.com/office/drawing/2014/main" id="{720B10DA-C761-4DEE-8D86-E170E1C2E981}"/>
+                  </a:ext>
+                </a:extLst>
+              </p:cNvPr>
+              <p:cNvSpPr txBox="1"/>
+              <p:nvPr/>
+            </p:nvSpPr>
+            <p:spPr>
+              <a:xfrm>
+                <a:off x="629138" y="644086"/>
+                <a:ext cx="10748061" cy="4996432"/>
+              </a:xfrm>
+              <a:prstGeom prst="rect">
+                <a:avLst/>
+              </a:prstGeom>
+              <a:noFill/>
+            </p:spPr>
+            <p:txBody>
+              <a:bodyPr wrap="square" rtlCol="0">
+                <a:spAutoFit/>
+              </a:bodyPr>
+              <a:lstStyle/>
+              <a:p>
+                <a:pPr>
+                  <a:lnSpc>
+                    <a:spcPct val="150000"/>
+                  </a:lnSpc>
+                </a:pPr>
+                <a:r>
+                  <a:rPr lang="pt-BR" sz="2200" b="1" dirty="0"/>
+                  <a:t>Exemplo. </a:t>
+                </a:r>
+                <a:r>
+                  <a:rPr lang="pt-BR" sz="2200" dirty="0"/>
+                  <a:t>Suponha que P(homem vivo em 30 anos) = 2/5; P(mulher viva em 30 anos) = 2/3. Os eventos são independentes. Calcule a probabilidade de que, daqui a 30 anos:</a:t>
+                </a:r>
+              </a:p>
+              <a:p>
+                <a:pPr>
+                  <a:lnSpc>
+                    <a:spcPct val="150000"/>
+                  </a:lnSpc>
+                </a:pPr>
+                <a:r>
+                  <a:rPr lang="pt-BR" sz="2200" dirty="0"/>
+                  <a:t>a) ambos estejam vivos</a:t>
+                </a:r>
+              </a:p>
+              <a:p>
+                <a:pPr>
+                  <a:lnSpc>
+                    <a:spcPct val="150000"/>
+                  </a:lnSpc>
+                </a:pPr>
+                <a:r>
+                  <a:rPr lang="pt-BR" sz="2200" dirty="0"/>
+                  <a:t>b) só o homem esteja vivo</a:t>
+                </a:r>
+              </a:p>
+              <a:p>
+                <a:pPr>
+                  <a:lnSpc>
+                    <a:spcPct val="150000"/>
+                  </a:lnSpc>
+                </a:pPr>
+                <a:r>
+                  <a:rPr lang="pt-BR" sz="2200" dirty="0"/>
+                  <a:t>c) só a mulher esteja viva</a:t>
+                </a:r>
+              </a:p>
+              <a:p>
+                <a:pPr>
+                  <a:lnSpc>
+                    <a:spcPct val="150000"/>
+                  </a:lnSpc>
+                </a:pPr>
+                <a:r>
+                  <a:rPr lang="pt-BR" sz="2200" dirty="0"/>
+                  <a:t>d) nenhum esteja vivo</a:t>
+                </a:r>
+              </a:p>
+              <a:p>
+                <a:pPr>
+                  <a:lnSpc>
+                    <a:spcPct val="150000"/>
+                  </a:lnSpc>
+                </a:pPr>
+                <a:r>
+                  <a:rPr lang="pt-BR" sz="2200" dirty="0"/>
+                  <a:t>e) pelo menos um esteja vivo</a:t>
+                </a:r>
+              </a:p>
+              <a:p>
+                <a:pPr>
+                  <a:lnSpc>
+                    <a:spcPct val="150000"/>
+                  </a:lnSpc>
+                </a:pPr>
+                <a:r>
+                  <a:rPr lang="pt-BR" sz="2200" dirty="0"/>
+                  <a:t>Resposta:</a:t>
+                </a:r>
+              </a:p>
+              <a:p>
+                <a:pPr>
+                  <a:lnSpc>
+                    <a:spcPct val="150000"/>
+                  </a:lnSpc>
+                </a:pPr>
+                <a:r>
+                  <a:rPr lang="pt-BR" sz="2200" dirty="0"/>
+                  <a:t>a) </a:t>
+                </a:r>
+                <a14:m>
+                  <m:oMath xmlns:m="http://schemas.openxmlformats.org/officeDocument/2006/math">
+                    <m:f>
+                      <m:fPr>
+                        <m:ctrlPr>
+                          <a:rPr lang="pt-BR" sz="2200" i="1" dirty="0" smtClean="0">
+                            <a:latin typeface="Cambria Math" panose="02040503050406030204" pitchFamily="18" charset="0"/>
+                          </a:rPr>
+                        </m:ctrlPr>
+                      </m:fPr>
+                      <m:num>
+                        <m:r>
+                          <a:rPr lang="pt-BR" sz="2200" i="1" dirty="0" smtClean="0">
+                            <a:latin typeface="Cambria Math" panose="02040503050406030204" pitchFamily="18" charset="0"/>
+                          </a:rPr>
+                          <m:t>2</m:t>
+                        </m:r>
+                      </m:num>
+                      <m:den>
+                        <m:r>
+                          <a:rPr lang="pt-BR" sz="2200" i="1" dirty="0" smtClean="0">
+                            <a:latin typeface="Cambria Math" panose="02040503050406030204" pitchFamily="18" charset="0"/>
+                          </a:rPr>
+                          <m:t>5</m:t>
+                        </m:r>
+                      </m:den>
+                    </m:f>
+                    <m:r>
+                      <a:rPr lang="pt-BR" sz="2200" i="1" dirty="0" smtClean="0">
+                        <a:latin typeface="Cambria Math" panose="02040503050406030204" pitchFamily="18" charset="0"/>
+                      </a:rPr>
+                      <m:t>·</m:t>
+                    </m:r>
+                    <m:f>
+                      <m:fPr>
+                        <m:ctrlPr>
+                          <a:rPr lang="pt-BR" sz="2200" i="1" dirty="0" smtClean="0">
+                            <a:latin typeface="Cambria Math" panose="02040503050406030204" pitchFamily="18" charset="0"/>
+                          </a:rPr>
+                        </m:ctrlPr>
+                      </m:fPr>
+                      <m:num>
+                        <m:r>
+                          <a:rPr lang="pt-BR" sz="2200" i="1" dirty="0" smtClean="0">
+                            <a:latin typeface="Cambria Math" panose="02040503050406030204" pitchFamily="18" charset="0"/>
+                          </a:rPr>
+                          <m:t>2</m:t>
+                        </m:r>
+                      </m:num>
+                      <m:den>
+                        <m:r>
+                          <a:rPr lang="pt-BR" sz="2200" i="1" dirty="0" smtClean="0">
+                            <a:latin typeface="Cambria Math" panose="02040503050406030204" pitchFamily="18" charset="0"/>
+                          </a:rPr>
+                          <m:t>3</m:t>
+                        </m:r>
+                      </m:den>
+                    </m:f>
+                    <m:r>
+                      <a:rPr lang="pt-BR" sz="2200" i="1" dirty="0" smtClean="0">
+                        <a:latin typeface="Cambria Math" panose="02040503050406030204" pitchFamily="18" charset="0"/>
+                      </a:rPr>
+                      <m:t>=</m:t>
+                    </m:r>
+                    <m:f>
+                      <m:fPr>
+                        <m:ctrlPr>
+                          <a:rPr lang="pt-BR" sz="2200" i="1" dirty="0" smtClean="0">
+                            <a:latin typeface="Cambria Math" panose="02040503050406030204" pitchFamily="18" charset="0"/>
+                          </a:rPr>
+                        </m:ctrlPr>
+                      </m:fPr>
+                      <m:num>
+                        <m:r>
+                          <a:rPr lang="pt-BR" sz="2200" i="1" dirty="0" smtClean="0">
+                            <a:latin typeface="Cambria Math" panose="02040503050406030204" pitchFamily="18" charset="0"/>
+                          </a:rPr>
+                          <m:t>4</m:t>
+                        </m:r>
+                      </m:num>
+                      <m:den>
+                        <m:r>
+                          <a:rPr lang="pt-BR" sz="2200" i="1" dirty="0" smtClean="0">
+                            <a:latin typeface="Cambria Math" panose="02040503050406030204" pitchFamily="18" charset="0"/>
+                          </a:rPr>
+                          <m:t>15</m:t>
+                        </m:r>
+                      </m:den>
+                    </m:f>
+                    <m:r>
+                      <a:rPr lang="pt-BR" sz="2200" i="1" dirty="0" smtClean="0">
+                        <a:latin typeface="Cambria Math" panose="02040503050406030204" pitchFamily="18" charset="0"/>
+                      </a:rPr>
+                      <m:t>, </m:t>
+                    </m:r>
+                    <m:r>
+                      <a:rPr lang="pt-BR" sz="2200" b="0" i="1" dirty="0" smtClean="0">
+                        <a:latin typeface="Cambria Math" panose="02040503050406030204" pitchFamily="18" charset="0"/>
+                      </a:rPr>
+                      <m:t> </m:t>
+                    </m:r>
+                    <m:r>
+                      <a:rPr lang="pt-BR" sz="2200" i="1" dirty="0" smtClean="0">
+                        <a:latin typeface="Cambria Math" panose="02040503050406030204" pitchFamily="18" charset="0"/>
+                      </a:rPr>
+                      <m:t>𝑏</m:t>
+                    </m:r>
+                    <m:r>
+                      <a:rPr lang="pt-BR" sz="2200" i="1" dirty="0" smtClean="0">
+                        <a:latin typeface="Cambria Math" panose="02040503050406030204" pitchFamily="18" charset="0"/>
+                      </a:rPr>
+                      <m:t>)</m:t>
+                    </m:r>
+                    <m:f>
+                      <m:fPr>
+                        <m:ctrlPr>
+                          <a:rPr lang="pt-BR" sz="2200" i="1" dirty="0" smtClean="0">
+                            <a:latin typeface="Cambria Math" panose="02040503050406030204" pitchFamily="18" charset="0"/>
+                          </a:rPr>
+                        </m:ctrlPr>
+                      </m:fPr>
+                      <m:num>
+                        <m:r>
+                          <a:rPr lang="pt-BR" sz="2200" i="1" dirty="0" smtClean="0">
+                            <a:latin typeface="Cambria Math" panose="02040503050406030204" pitchFamily="18" charset="0"/>
+                          </a:rPr>
+                          <m:t>2</m:t>
+                        </m:r>
+                      </m:num>
+                      <m:den>
+                        <m:r>
+                          <a:rPr lang="pt-BR" sz="2200" i="1" dirty="0" smtClean="0">
+                            <a:latin typeface="Cambria Math" panose="02040503050406030204" pitchFamily="18" charset="0"/>
+                          </a:rPr>
+                          <m:t>5</m:t>
+                        </m:r>
+                      </m:den>
+                    </m:f>
+                    <m:r>
+                      <a:rPr lang="pt-BR" sz="2200" i="1" dirty="0" smtClean="0">
+                        <a:latin typeface="Cambria Math" panose="02040503050406030204" pitchFamily="18" charset="0"/>
+                      </a:rPr>
+                      <m:t> ·</m:t>
+                    </m:r>
+                    <m:f>
+                      <m:fPr>
+                        <m:ctrlPr>
+                          <a:rPr lang="pt-BR" sz="2200" i="1" dirty="0" smtClean="0">
+                            <a:latin typeface="Cambria Math" panose="02040503050406030204" pitchFamily="18" charset="0"/>
+                          </a:rPr>
+                        </m:ctrlPr>
+                      </m:fPr>
+                      <m:num>
+                        <m:r>
+                          <a:rPr lang="pt-BR" sz="2200" i="1" dirty="0" smtClean="0">
+                            <a:latin typeface="Cambria Math" panose="02040503050406030204" pitchFamily="18" charset="0"/>
+                          </a:rPr>
+                          <m:t>1</m:t>
+                        </m:r>
+                      </m:num>
+                      <m:den>
+                        <m:r>
+                          <a:rPr lang="pt-BR" sz="2200" i="1" dirty="0" smtClean="0">
+                            <a:latin typeface="Cambria Math" panose="02040503050406030204" pitchFamily="18" charset="0"/>
+                          </a:rPr>
+                          <m:t>3</m:t>
+                        </m:r>
+                      </m:den>
+                    </m:f>
+                    <m:r>
+                      <a:rPr lang="pt-BR" sz="2200" i="1" dirty="0" smtClean="0">
+                        <a:latin typeface="Cambria Math" panose="02040503050406030204" pitchFamily="18" charset="0"/>
+                      </a:rPr>
+                      <m:t> =</m:t>
+                    </m:r>
+                    <m:f>
+                      <m:fPr>
+                        <m:ctrlPr>
+                          <a:rPr lang="pt-BR" sz="2200" i="1" dirty="0" smtClean="0">
+                            <a:latin typeface="Cambria Math" panose="02040503050406030204" pitchFamily="18" charset="0"/>
+                          </a:rPr>
+                        </m:ctrlPr>
+                      </m:fPr>
+                      <m:num>
+                        <m:r>
+                          <a:rPr lang="pt-BR" sz="2200" i="1" dirty="0" smtClean="0">
+                            <a:latin typeface="Cambria Math" panose="02040503050406030204" pitchFamily="18" charset="0"/>
+                          </a:rPr>
+                          <m:t>2</m:t>
+                        </m:r>
+                      </m:num>
+                      <m:den>
+                        <m:r>
+                          <a:rPr lang="pt-BR" sz="2200" i="1" dirty="0" smtClean="0">
+                            <a:latin typeface="Cambria Math" panose="02040503050406030204" pitchFamily="18" charset="0"/>
+                          </a:rPr>
+                          <m:t>15</m:t>
+                        </m:r>
+                      </m:den>
+                    </m:f>
+                    <m:r>
+                      <a:rPr lang="pt-BR" sz="2200" i="1" dirty="0" smtClean="0">
+                        <a:latin typeface="Cambria Math" panose="02040503050406030204" pitchFamily="18" charset="0"/>
+                      </a:rPr>
+                      <m:t>, </m:t>
+                    </m:r>
+                    <m:r>
+                      <a:rPr lang="pt-BR" sz="2200" b="0" i="1" dirty="0" smtClean="0">
+                        <a:latin typeface="Cambria Math" panose="02040503050406030204" pitchFamily="18" charset="0"/>
+                      </a:rPr>
+                      <m:t> </m:t>
+                    </m:r>
+                    <m:r>
+                      <a:rPr lang="pt-BR" sz="2200" i="1" dirty="0" smtClean="0">
+                        <a:latin typeface="Cambria Math" panose="02040503050406030204" pitchFamily="18" charset="0"/>
+                      </a:rPr>
+                      <m:t>𝑐</m:t>
+                    </m:r>
+                    <m:r>
+                      <a:rPr lang="pt-BR" sz="2200" i="1" dirty="0" smtClean="0">
+                        <a:latin typeface="Cambria Math" panose="02040503050406030204" pitchFamily="18" charset="0"/>
+                      </a:rPr>
+                      <m:t>)</m:t>
+                    </m:r>
+                    <m:f>
+                      <m:fPr>
+                        <m:ctrlPr>
+                          <a:rPr lang="pt-BR" sz="2200" i="1" dirty="0" smtClean="0">
+                            <a:latin typeface="Cambria Math" panose="02040503050406030204" pitchFamily="18" charset="0"/>
+                          </a:rPr>
+                        </m:ctrlPr>
+                      </m:fPr>
+                      <m:num>
+                        <m:r>
+                          <a:rPr lang="pt-BR" sz="2200" i="1" dirty="0" smtClean="0">
+                            <a:latin typeface="Cambria Math" panose="02040503050406030204" pitchFamily="18" charset="0"/>
+                          </a:rPr>
+                          <m:t>3</m:t>
+                        </m:r>
+                      </m:num>
+                      <m:den>
+                        <m:r>
+                          <a:rPr lang="pt-BR" sz="2200" i="1" dirty="0" smtClean="0">
+                            <a:latin typeface="Cambria Math" panose="02040503050406030204" pitchFamily="18" charset="0"/>
+                          </a:rPr>
+                          <m:t>5</m:t>
+                        </m:r>
+                      </m:den>
+                    </m:f>
+                    <m:r>
+                      <a:rPr lang="pt-BR" sz="2200" i="1" dirty="0" smtClean="0">
+                        <a:latin typeface="Cambria Math" panose="02040503050406030204" pitchFamily="18" charset="0"/>
+                      </a:rPr>
+                      <m:t> ·</m:t>
+                    </m:r>
+                    <m:f>
+                      <m:fPr>
+                        <m:ctrlPr>
+                          <a:rPr lang="pt-BR" sz="2200" i="1" dirty="0" smtClean="0">
+                            <a:latin typeface="Cambria Math" panose="02040503050406030204" pitchFamily="18" charset="0"/>
+                          </a:rPr>
+                        </m:ctrlPr>
+                      </m:fPr>
+                      <m:num>
+                        <m:r>
+                          <a:rPr lang="pt-BR" sz="2200" i="1" dirty="0" smtClean="0">
+                            <a:latin typeface="Cambria Math" panose="02040503050406030204" pitchFamily="18" charset="0"/>
+                          </a:rPr>
+                          <m:t>2</m:t>
+                        </m:r>
+                      </m:num>
+                      <m:den>
+                        <m:r>
+                          <a:rPr lang="pt-BR" sz="2200" i="1" dirty="0" smtClean="0">
+                            <a:latin typeface="Cambria Math" panose="02040503050406030204" pitchFamily="18" charset="0"/>
+                          </a:rPr>
+                          <m:t>3</m:t>
+                        </m:r>
+                      </m:den>
+                    </m:f>
+                    <m:r>
+                      <a:rPr lang="pt-BR" sz="2200" i="1" dirty="0" smtClean="0">
+                        <a:latin typeface="Cambria Math" panose="02040503050406030204" pitchFamily="18" charset="0"/>
+                      </a:rPr>
+                      <m:t> =</m:t>
+                    </m:r>
+                    <m:f>
+                      <m:fPr>
+                        <m:ctrlPr>
+                          <a:rPr lang="pt-BR" sz="2200" i="1" dirty="0" smtClean="0">
+                            <a:latin typeface="Cambria Math" panose="02040503050406030204" pitchFamily="18" charset="0"/>
+                          </a:rPr>
+                        </m:ctrlPr>
+                      </m:fPr>
+                      <m:num>
+                        <m:r>
+                          <a:rPr lang="pt-BR" sz="2200" i="1" dirty="0" smtClean="0">
+                            <a:latin typeface="Cambria Math" panose="02040503050406030204" pitchFamily="18" charset="0"/>
+                          </a:rPr>
+                          <m:t>2</m:t>
+                        </m:r>
+                      </m:num>
+                      <m:den>
+                        <m:r>
+                          <a:rPr lang="pt-BR" sz="2200" i="1" dirty="0" smtClean="0">
+                            <a:latin typeface="Cambria Math" panose="02040503050406030204" pitchFamily="18" charset="0"/>
+                          </a:rPr>
+                          <m:t>5</m:t>
+                        </m:r>
+                      </m:den>
+                    </m:f>
+                    <m:r>
+                      <a:rPr lang="pt-BR" sz="2200" i="1" dirty="0" smtClean="0">
+                        <a:latin typeface="Cambria Math" panose="02040503050406030204" pitchFamily="18" charset="0"/>
+                      </a:rPr>
+                      <m:t>, </m:t>
+                    </m:r>
+                    <m:r>
+                      <a:rPr lang="pt-BR" sz="2200" b="0" i="1" dirty="0" smtClean="0">
+                        <a:latin typeface="Cambria Math" panose="02040503050406030204" pitchFamily="18" charset="0"/>
+                      </a:rPr>
+                      <m:t> </m:t>
+                    </m:r>
+                    <m:r>
+                      <a:rPr lang="pt-BR" sz="2200" i="1" dirty="0" smtClean="0">
+                        <a:latin typeface="Cambria Math" panose="02040503050406030204" pitchFamily="18" charset="0"/>
+                      </a:rPr>
+                      <m:t>𝑑</m:t>
+                    </m:r>
+                    <m:r>
+                      <a:rPr lang="pt-BR" sz="2200" i="1" dirty="0" smtClean="0">
+                        <a:latin typeface="Cambria Math" panose="02040503050406030204" pitchFamily="18" charset="0"/>
+                      </a:rPr>
+                      <m:t>)</m:t>
+                    </m:r>
+                    <m:f>
+                      <m:fPr>
+                        <m:ctrlPr>
+                          <a:rPr lang="pt-BR" sz="2200" i="1" dirty="0" smtClean="0">
+                            <a:latin typeface="Cambria Math" panose="02040503050406030204" pitchFamily="18" charset="0"/>
+                          </a:rPr>
+                        </m:ctrlPr>
+                      </m:fPr>
+                      <m:num>
+                        <m:r>
+                          <a:rPr lang="pt-BR" sz="2200" i="1" dirty="0" smtClean="0">
+                            <a:latin typeface="Cambria Math" panose="02040503050406030204" pitchFamily="18" charset="0"/>
+                          </a:rPr>
+                          <m:t>3</m:t>
+                        </m:r>
+                      </m:num>
+                      <m:den>
+                        <m:r>
+                          <a:rPr lang="pt-BR" sz="2200" i="1" dirty="0" smtClean="0">
+                            <a:latin typeface="Cambria Math" panose="02040503050406030204" pitchFamily="18" charset="0"/>
+                          </a:rPr>
+                          <m:t>5</m:t>
+                        </m:r>
+                      </m:den>
+                    </m:f>
+                    <m:r>
+                      <a:rPr lang="pt-BR" sz="2200" i="1" dirty="0" smtClean="0">
+                        <a:latin typeface="Cambria Math" panose="02040503050406030204" pitchFamily="18" charset="0"/>
+                      </a:rPr>
+                      <m:t> ·</m:t>
+                    </m:r>
+                    <m:f>
+                      <m:fPr>
+                        <m:ctrlPr>
+                          <a:rPr lang="pt-BR" sz="2200" i="1" dirty="0" smtClean="0">
+                            <a:latin typeface="Cambria Math" panose="02040503050406030204" pitchFamily="18" charset="0"/>
+                          </a:rPr>
+                        </m:ctrlPr>
+                      </m:fPr>
+                      <m:num>
+                        <m:r>
+                          <a:rPr lang="pt-BR" sz="2200" i="1" dirty="0" smtClean="0">
+                            <a:latin typeface="Cambria Math" panose="02040503050406030204" pitchFamily="18" charset="0"/>
+                          </a:rPr>
+                          <m:t>1</m:t>
+                        </m:r>
+                      </m:num>
+                      <m:den>
+                        <m:r>
+                          <a:rPr lang="pt-BR" sz="2200" i="1" dirty="0" smtClean="0">
+                            <a:latin typeface="Cambria Math" panose="02040503050406030204" pitchFamily="18" charset="0"/>
+                          </a:rPr>
+                          <m:t>3</m:t>
+                        </m:r>
+                      </m:den>
+                    </m:f>
+                    <m:r>
+                      <a:rPr lang="pt-BR" sz="2200" i="1" dirty="0" smtClean="0">
+                        <a:latin typeface="Cambria Math" panose="02040503050406030204" pitchFamily="18" charset="0"/>
+                      </a:rPr>
+                      <m:t> =</m:t>
+                    </m:r>
+                    <m:f>
+                      <m:fPr>
+                        <m:ctrlPr>
+                          <a:rPr lang="pt-BR" sz="2200" i="1" dirty="0" smtClean="0">
+                            <a:latin typeface="Cambria Math" panose="02040503050406030204" pitchFamily="18" charset="0"/>
+                          </a:rPr>
+                        </m:ctrlPr>
+                      </m:fPr>
+                      <m:num>
+                        <m:r>
+                          <a:rPr lang="pt-BR" sz="2200" i="1" dirty="0" smtClean="0">
+                            <a:latin typeface="Cambria Math" panose="02040503050406030204" pitchFamily="18" charset="0"/>
+                          </a:rPr>
+                          <m:t>1</m:t>
+                        </m:r>
+                      </m:num>
+                      <m:den>
+                        <m:r>
+                          <a:rPr lang="pt-BR" sz="2200" i="1" dirty="0" smtClean="0">
+                            <a:latin typeface="Cambria Math" panose="02040503050406030204" pitchFamily="18" charset="0"/>
+                          </a:rPr>
+                          <m:t>5</m:t>
+                        </m:r>
+                      </m:den>
+                    </m:f>
+                    <m:r>
+                      <a:rPr lang="pt-BR" sz="2200" i="1" dirty="0" smtClean="0">
+                        <a:latin typeface="Cambria Math" panose="02040503050406030204" pitchFamily="18" charset="0"/>
+                      </a:rPr>
+                      <m:t>, </m:t>
+                    </m:r>
+                    <m:r>
+                      <a:rPr lang="pt-BR" sz="2200" i="1" dirty="0" smtClean="0">
+                        <a:latin typeface="Cambria Math" panose="02040503050406030204" pitchFamily="18" charset="0"/>
+                      </a:rPr>
+                      <m:t>𝑒</m:t>
+                    </m:r>
+                    <m:r>
+                      <a:rPr lang="pt-BR" sz="2200" i="1" dirty="0" smtClean="0">
+                        <a:latin typeface="Cambria Math" panose="02040503050406030204" pitchFamily="18" charset="0"/>
+                      </a:rPr>
+                      <m:t>) 1 −</m:t>
+                    </m:r>
+                    <m:f>
+                      <m:fPr>
+                        <m:ctrlPr>
+                          <a:rPr lang="pt-BR" sz="2200" i="1" dirty="0" smtClean="0">
+                            <a:latin typeface="Cambria Math" panose="02040503050406030204" pitchFamily="18" charset="0"/>
+                          </a:rPr>
+                        </m:ctrlPr>
+                      </m:fPr>
+                      <m:num>
+                        <m:r>
+                          <a:rPr lang="pt-BR" sz="2200" i="1" dirty="0" smtClean="0">
+                            <a:latin typeface="Cambria Math" panose="02040503050406030204" pitchFamily="18" charset="0"/>
+                          </a:rPr>
+                          <m:t>1</m:t>
+                        </m:r>
+                      </m:num>
+                      <m:den>
+                        <m:r>
+                          <a:rPr lang="pt-BR" sz="2200" i="1" dirty="0" smtClean="0">
+                            <a:latin typeface="Cambria Math" panose="02040503050406030204" pitchFamily="18" charset="0"/>
+                          </a:rPr>
+                          <m:t>5</m:t>
+                        </m:r>
+                      </m:den>
+                    </m:f>
+                    <m:r>
+                      <a:rPr lang="pt-BR" sz="2200" i="1" dirty="0" smtClean="0">
+                        <a:latin typeface="Cambria Math" panose="02040503050406030204" pitchFamily="18" charset="0"/>
+                      </a:rPr>
+                      <m:t>=</m:t>
+                    </m:r>
+                    <m:f>
+                      <m:fPr>
+                        <m:ctrlPr>
+                          <a:rPr lang="pt-BR" sz="2200" i="1" dirty="0" smtClean="0">
+                            <a:latin typeface="Cambria Math" panose="02040503050406030204" pitchFamily="18" charset="0"/>
+                          </a:rPr>
+                        </m:ctrlPr>
+                      </m:fPr>
+                      <m:num>
+                        <m:r>
+                          <a:rPr lang="pt-BR" sz="2200" i="1" dirty="0" smtClean="0">
+                            <a:latin typeface="Cambria Math" panose="02040503050406030204" pitchFamily="18" charset="0"/>
+                          </a:rPr>
+                          <m:t>4</m:t>
+                        </m:r>
+                      </m:num>
+                      <m:den>
+                        <m:r>
+                          <a:rPr lang="pt-BR" sz="2200" i="1" dirty="0" smtClean="0">
+                            <a:latin typeface="Cambria Math" panose="02040503050406030204" pitchFamily="18" charset="0"/>
+                          </a:rPr>
+                          <m:t>5</m:t>
+                        </m:r>
+                      </m:den>
+                    </m:f>
+                  </m:oMath>
+                </a14:m>
+                <a:endParaRPr lang="pt-BR" sz="2200" dirty="0"/>
+              </a:p>
+            </p:txBody>
+          </p:sp>
+        </mc:Choice>
+        <mc:Fallback xmlns="">
+          <p:sp>
+            <p:nvSpPr>
+              <p:cNvPr id="6" name="CaixaDeTexto 5">
+                <a:extLst>
+                  <a:ext uri="{FF2B5EF4-FFF2-40B4-BE49-F238E27FC236}">
+                    <a16:creationId xmlns:a16="http://schemas.microsoft.com/office/drawing/2014/main" id="{720B10DA-C761-4DEE-8D86-E170E1C2E981}"/>
+                  </a:ext>
+                </a:extLst>
+              </p:cNvPr>
+              <p:cNvSpPr txBox="1">
+                <a:spLocks noRot="1" noChangeAspect="1" noMove="1" noResize="1" noEditPoints="1" noAdjustHandles="1" noChangeArrowheads="1" noChangeShapeType="1" noTextEdit="1"/>
+              </p:cNvSpPr>
+              <p:nvPr/>
+            </p:nvSpPr>
+            <p:spPr>
+              <a:xfrm>
+                <a:off x="629138" y="644086"/>
+                <a:ext cx="10748061" cy="4996432"/>
+              </a:xfrm>
+              <a:prstGeom prst="rect">
+                <a:avLst/>
+              </a:prstGeom>
+              <a:blipFill>
+                <a:blip r:embed="rId2"/>
+                <a:stretch>
+                  <a:fillRect l="-737"/>
+                </a:stretch>
+              </a:blipFill>
+            </p:spPr>
+            <p:txBody>
+              <a:bodyPr/>
+              <a:lstStyle/>
+              <a:p>
+                <a:r>
+                  <a:rPr lang="pt-BR">
+                    <a:noFill/>
+                  </a:rPr>
+                  <a:t> </a:t>
+                </a:r>
+              </a:p>
+            </p:txBody>
+          </p:sp>
+        </mc:Fallback>
+      </mc:AlternateContent>
+      <p:sp>
+        <p:nvSpPr>
+          <p:cNvPr id="3" name="CaixaDeTexto 2">
+            <a:extLst>
+              <a:ext uri="{FF2B5EF4-FFF2-40B4-BE49-F238E27FC236}">
+                <a16:creationId xmlns:a16="http://schemas.microsoft.com/office/drawing/2014/main" id="{19131A04-B5D6-4211-8B49-4615DE5797E9}"/>
+              </a:ext>
+            </a:extLst>
+          </p:cNvPr>
+          <p:cNvSpPr txBox="1"/>
+          <p:nvPr/>
+        </p:nvSpPr>
+        <p:spPr>
+          <a:xfrm>
+            <a:off x="361188" y="6463893"/>
+            <a:ext cx="7772400" cy="308152"/>
+          </a:xfrm>
+          <a:prstGeom prst="rect">
+            <a:avLst/>
+          </a:prstGeom>
+          <a:noFill/>
+        </p:spPr>
+        <p:txBody>
+          <a:bodyPr wrap="none" rtlCol="0">
+            <a:spAutoFit/>
+          </a:bodyPr>
+          <a:lstStyle/>
+          <a:p>
+            <a:r>
+              <a:rPr lang="pt-BR" sz="1400" dirty="0"/>
+              <a:t>CEA055 – Estatística e Probabilidade – Prof. Marcos Goulart Lima</a:t>
+            </a:r>
+          </a:p>
+        </p:txBody>
+      </p:sp>
+    </p:spTree>
+    <p:extLst>
+      <p:ext uri="{BB962C8B-B14F-4D97-AF65-F5344CB8AC3E}">
+        <p14:creationId xmlns:p14="http://schemas.microsoft.com/office/powerpoint/2010/main" val="4266711625"/>
+      </p:ext>
+    </p:extLst>
+  </p:cSld>
+  <p:clrMapOvr>
+    <a:masterClrMapping/>
+  </p:clrMapOvr>
+</p:sld>
+</file>
+
+<file path=ppt/slides/slide15.xml><?xml version="1.0" encoding="utf-8"?>
+<p:sld xmlns:a="http://schemas.openxmlformats.org/drawingml/2006/main" xmlns:r="http://schemas.openxmlformats.org/officeDocument/2006/relationships" xmlns:p="http://schemas.openxmlformats.org/presentationml/2006/main">
+  <p:cSld>
+    <p:spTree>
+      <p:nvGrpSpPr>
+        <p:cNvPr id="1" name=""/>
+        <p:cNvGrpSpPr/>
+        <p:nvPr/>
+      </p:nvGrpSpPr>
+      <p:grpSpPr>
+        <a:xfrm>
+          <a:off x="0" y="0"/>
+          <a:ext cx="0" cy="0"/>
+          <a:chOff x="0" y="0"/>
+          <a:chExt cx="0" cy="0"/>
+        </a:xfrm>
+      </p:grpSpPr>
+      <p:sp>
+        <p:nvSpPr>
+          <p:cNvPr id="6" name="CaixaDeTexto 5">
+            <a:extLst>
+              <a:ext uri="{FF2B5EF4-FFF2-40B4-BE49-F238E27FC236}">
+                <a16:creationId xmlns:a16="http://schemas.microsoft.com/office/drawing/2014/main" id="{720B10DA-C761-4DEE-8D86-E170E1C2E981}"/>
+              </a:ext>
+            </a:extLst>
+          </p:cNvPr>
+          <p:cNvSpPr txBox="1"/>
+          <p:nvPr/>
+        </p:nvSpPr>
+        <p:spPr>
+          <a:xfrm>
+            <a:off x="812018" y="771308"/>
+            <a:ext cx="10067277" cy="3257174"/>
+          </a:xfrm>
+          <a:prstGeom prst="rect">
+            <a:avLst/>
+          </a:prstGeom>
+          <a:noFill/>
+        </p:spPr>
+        <p:txBody>
+          <a:bodyPr wrap="square" rtlCol="0">
+            <a:spAutoFit/>
+          </a:bodyPr>
+          <a:lstStyle/>
+          <a:p>
+            <a:pPr>
+              <a:lnSpc>
+                <a:spcPct val="150000"/>
+              </a:lnSpc>
+            </a:pPr>
+            <a:r>
+              <a:rPr sz="2800" b="1" dirty="0" err="1"/>
+              <a:t>Leitura</a:t>
+            </a:r>
+            <a:r>
+              <a:rPr sz="2800" b="1" dirty="0"/>
+              <a:t> </a:t>
+            </a:r>
+            <a:r>
+              <a:rPr sz="2800" b="1" dirty="0" err="1"/>
+              <a:t>recomendada</a:t>
+            </a:r>
+            <a:r>
+              <a:rPr sz="2800" b="1" dirty="0"/>
+              <a:t>:</a:t>
+            </a:r>
+            <a:endParaRPr lang="pt-BR" sz="2800" dirty="0"/>
+          </a:p>
+          <a:p>
+            <a:pPr>
+              <a:lnSpc>
+                <a:spcPct val="150000"/>
+              </a:lnSpc>
+            </a:pPr>
+            <a:r>
+              <a:rPr sz="2800" b="0" dirty="0" err="1"/>
+              <a:t>Bussab</a:t>
+            </a:r>
+            <a:r>
+              <a:rPr sz="2800" b="0" dirty="0"/>
+              <a:t> &amp; </a:t>
+            </a:r>
+            <a:r>
+              <a:rPr sz="2800" b="0" dirty="0" err="1"/>
+              <a:t>Morettin</a:t>
+            </a:r>
+            <a:r>
+              <a:rPr sz="2800" b="0" dirty="0"/>
+              <a:t> — Cap. 5 (5.3)</a:t>
+            </a:r>
+          </a:p>
+          <a:p>
+            <a:pPr>
+              <a:lnSpc>
+                <a:spcPct val="150000"/>
+              </a:lnSpc>
+            </a:pPr>
+            <a:r>
+              <a:rPr sz="2800" b="0" dirty="0"/>
+              <a:t>Montgomery &amp; </a:t>
+            </a:r>
+            <a:r>
+              <a:rPr sz="2800" b="0" dirty="0" err="1"/>
+              <a:t>Runger</a:t>
+            </a:r>
+            <a:r>
+              <a:rPr sz="2800" b="0" dirty="0"/>
+              <a:t> — Cap. 2 (2.5, 2.7)</a:t>
+            </a:r>
+          </a:p>
+          <a:p>
+            <a:pPr>
+              <a:lnSpc>
+                <a:spcPct val="150000"/>
+              </a:lnSpc>
+            </a:pPr>
+            <a:r>
+              <a:rPr sz="2800" b="0" dirty="0" err="1"/>
+              <a:t>Magalhães</a:t>
+            </a:r>
+            <a:r>
+              <a:rPr sz="2800" b="0" dirty="0"/>
+              <a:t> &amp; Lima — Cap. 2 (2.2)</a:t>
+            </a:r>
+          </a:p>
+          <a:p>
+            <a:pPr>
+              <a:lnSpc>
+                <a:spcPct val="150000"/>
+              </a:lnSpc>
+            </a:pPr>
+            <a:r>
+              <a:rPr sz="2800" b="0" dirty="0" err="1"/>
+              <a:t>Morettin</a:t>
+            </a:r>
+            <a:r>
+              <a:rPr sz="2800" b="0" dirty="0"/>
+              <a:t> — Cap. 2 (2.4, 2.5)</a:t>
+            </a:r>
+          </a:p>
+        </p:txBody>
+      </p:sp>
+      <p:sp>
+        <p:nvSpPr>
+          <p:cNvPr id="3" name="CaixaDeTexto 2">
+            <a:extLst>
+              <a:ext uri="{FF2B5EF4-FFF2-40B4-BE49-F238E27FC236}">
+                <a16:creationId xmlns:a16="http://schemas.microsoft.com/office/drawing/2014/main" id="{19131A04-B5D6-4211-8B49-4615DE5797E9}"/>
+              </a:ext>
+            </a:extLst>
+          </p:cNvPr>
+          <p:cNvSpPr txBox="1"/>
+          <p:nvPr/>
+        </p:nvSpPr>
+        <p:spPr>
+          <a:xfrm>
+            <a:off x="361188" y="6463893"/>
+            <a:ext cx="7772400" cy="308152"/>
+          </a:xfrm>
+          <a:prstGeom prst="rect">
+            <a:avLst/>
+          </a:prstGeom>
+          <a:noFill/>
+        </p:spPr>
+        <p:txBody>
+          <a:bodyPr wrap="none" rtlCol="0">
+            <a:spAutoFit/>
+          </a:bodyPr>
+          <a:lstStyle/>
+          <a:p>
+            <a:r>
+              <a:rPr lang="pt-BR" sz="1400" dirty="0"/>
+              <a:t>CEA055 – Estatística e Probabilidade – Prof. Marcos Goulart Lima</a:t>
+            </a:r>
+          </a:p>
+        </p:txBody>
+      </p:sp>
+    </p:spTree>
+    <p:extLst>
+      <p:ext uri="{BB962C8B-B14F-4D97-AF65-F5344CB8AC3E}">
+        <p14:creationId xmlns:p14="http://schemas.microsoft.com/office/powerpoint/2010/main" val="3831451249"/>
+      </p:ext>
+    </p:extLst>
+  </p:cSld>
+  <p:clrMapOvr>
+    <a:masterClrMapping/>
+  </p:clrMapOvr>
+</p:sld>
+</file>
+
+<file path=ppt/slides/slide16.xml><?xml version="1.0" encoding="utf-8"?>
+<p:sld xmlns:a="http://schemas.openxmlformats.org/drawingml/2006/main" xmlns:r="http://schemas.openxmlformats.org/officeDocument/2006/relationships" xmlns:p="http://schemas.openxmlformats.org/presentationml/2006/main">
+  <p:cSld>
+    <p:spTree>
+      <p:nvGrpSpPr>
+        <p:cNvPr id="1" name=""/>
+        <p:cNvGrpSpPr/>
+        <p:nvPr/>
+      </p:nvGrpSpPr>
+      <p:grpSpPr>
+        <a:xfrm>
+          <a:off x="0" y="0"/>
+          <a:ext cx="0" cy="0"/>
+          <a:chOff x="0" y="0"/>
+          <a:chExt cx="0" cy="0"/>
+        </a:xfrm>
+      </p:grpSpPr>
+      <p:sp>
+        <p:nvSpPr>
+          <p:cNvPr id="6" name="CaixaDeTexto 5">
+            <a:extLst>
+              <a:ext uri="{FF2B5EF4-FFF2-40B4-BE49-F238E27FC236}">
+                <a16:creationId xmlns:a16="http://schemas.microsoft.com/office/drawing/2014/main" id="{720B10DA-C761-4DEE-8D86-E170E1C2E981}"/>
+              </a:ext>
+            </a:extLst>
+          </p:cNvPr>
+          <p:cNvSpPr txBox="1"/>
+          <p:nvPr/>
+        </p:nvSpPr>
+        <p:spPr>
+          <a:xfrm>
+            <a:off x="812018" y="771308"/>
+            <a:ext cx="10067277" cy="4549835"/>
+          </a:xfrm>
+          <a:prstGeom prst="rect">
+            <a:avLst/>
+          </a:prstGeom>
+          <a:noFill/>
+        </p:spPr>
+        <p:txBody>
+          <a:bodyPr wrap="square" rtlCol="0">
+            <a:spAutoFit/>
+          </a:bodyPr>
+          <a:lstStyle/>
+          <a:p>
+            <a:pPr>
+              <a:lnSpc>
+                <a:spcPct val="150000"/>
+              </a:lnSpc>
+            </a:pPr>
+            <a:r>
+              <a:rPr sz="2800" b="1" dirty="0" err="1"/>
+              <a:t>Exercícios</a:t>
+            </a:r>
+            <a:r>
+              <a:rPr sz="2800" b="1" dirty="0"/>
+              <a:t> </a:t>
+            </a:r>
+            <a:r>
+              <a:rPr sz="2800" b="1" dirty="0" err="1"/>
+              <a:t>recomendados</a:t>
+            </a:r>
+            <a:r>
+              <a:rPr sz="2800" b="1" dirty="0"/>
+              <a:t>:</a:t>
+            </a:r>
+            <a:endParaRPr lang="pt-BR" sz="2800" dirty="0"/>
+          </a:p>
+          <a:p>
+            <a:pPr>
+              <a:lnSpc>
+                <a:spcPct val="150000"/>
+              </a:lnSpc>
+            </a:pPr>
+            <a:r>
+              <a:rPr sz="2800" b="0" dirty="0" err="1"/>
+              <a:t>Bussab</a:t>
+            </a:r>
+            <a:r>
+              <a:rPr sz="2800" b="0" dirty="0"/>
+              <a:t> &amp; </a:t>
+            </a:r>
+            <a:r>
+              <a:rPr sz="2800" b="0" dirty="0" err="1"/>
+              <a:t>Morettin</a:t>
+            </a:r>
+            <a:r>
+              <a:rPr sz="2800" b="0" dirty="0"/>
+              <a:t>, Cap. 5: </a:t>
+            </a:r>
+            <a:r>
+              <a:rPr sz="2800" b="0" dirty="0" err="1"/>
+              <a:t>Problemas</a:t>
+            </a:r>
+            <a:r>
+              <a:rPr sz="2800" b="0" dirty="0"/>
+              <a:t> 15, 16, 17, 18, 19, 20, 21 e 22</a:t>
+            </a:r>
+          </a:p>
+          <a:p>
+            <a:pPr>
+              <a:lnSpc>
+                <a:spcPct val="150000"/>
+              </a:lnSpc>
+            </a:pPr>
+            <a:r>
+              <a:rPr sz="2800" b="0" dirty="0" err="1"/>
+              <a:t>Magalhães</a:t>
+            </a:r>
+            <a:r>
+              <a:rPr sz="2800" b="0" dirty="0"/>
+              <a:t> &amp; Lima, Cap. 2 (§2.3): </a:t>
+            </a:r>
+            <a:r>
+              <a:rPr sz="2800" b="0" dirty="0" err="1"/>
+              <a:t>Exercícios</a:t>
+            </a:r>
+            <a:r>
+              <a:rPr sz="2800" b="0" dirty="0"/>
+              <a:t> 10, 11, 12, 13, 14, 17, 19, 20, 21 e 22</a:t>
+            </a:r>
+          </a:p>
+          <a:p>
+            <a:pPr>
+              <a:lnSpc>
+                <a:spcPct val="150000"/>
+              </a:lnSpc>
+            </a:pPr>
+            <a:r>
+              <a:rPr sz="2800" b="0" dirty="0"/>
+              <a:t>Montgomery &amp; </a:t>
+            </a:r>
+            <a:r>
+              <a:rPr sz="2800" b="0" dirty="0" err="1"/>
+              <a:t>Runger</a:t>
+            </a:r>
+            <a:r>
+              <a:rPr sz="2800" b="0" dirty="0"/>
+              <a:t>, Cap. 2: </a:t>
+            </a:r>
+            <a:r>
+              <a:rPr sz="2800" b="0" dirty="0" err="1"/>
+              <a:t>Exercícios</a:t>
+            </a:r>
+            <a:r>
+              <a:rPr sz="2800" b="0" dirty="0"/>
+              <a:t> 2.5.1, 2.5.4, 2.5.6, 2.5.9, 2.5.11, 2.7.1, 2.7.2, 2.7.4, 2.7.6 e 2.7.10</a:t>
+            </a:r>
+          </a:p>
+          <a:p>
+            <a:pPr>
+              <a:lnSpc>
+                <a:spcPct val="150000"/>
+              </a:lnSpc>
+            </a:pPr>
+            <a:r>
+              <a:rPr sz="2800" b="0" dirty="0" err="1"/>
+              <a:t>Morettin</a:t>
+            </a:r>
+            <a:r>
+              <a:rPr sz="2800" b="0" dirty="0"/>
+              <a:t>, Cap. 2: </a:t>
+            </a:r>
+            <a:r>
+              <a:rPr sz="2800" b="0" dirty="0" err="1"/>
+              <a:t>Exercício</a:t>
+            </a:r>
+            <a:r>
+              <a:rPr sz="2800" b="0" dirty="0"/>
+              <a:t> 18</a:t>
+            </a:r>
+          </a:p>
+        </p:txBody>
+      </p:sp>
+      <p:sp>
+        <p:nvSpPr>
+          <p:cNvPr id="3" name="CaixaDeTexto 2">
+            <a:extLst>
+              <a:ext uri="{FF2B5EF4-FFF2-40B4-BE49-F238E27FC236}">
+                <a16:creationId xmlns:a16="http://schemas.microsoft.com/office/drawing/2014/main" id="{19131A04-B5D6-4211-8B49-4615DE5797E9}"/>
+              </a:ext>
+            </a:extLst>
+          </p:cNvPr>
+          <p:cNvSpPr txBox="1"/>
+          <p:nvPr/>
+        </p:nvSpPr>
+        <p:spPr>
+          <a:xfrm>
+            <a:off x="361188" y="6463893"/>
+            <a:ext cx="7772400" cy="308152"/>
+          </a:xfrm>
+          <a:prstGeom prst="rect">
+            <a:avLst/>
+          </a:prstGeom>
+          <a:noFill/>
+        </p:spPr>
+        <p:txBody>
+          <a:bodyPr wrap="none" rtlCol="0">
+            <a:spAutoFit/>
+          </a:bodyPr>
+          <a:lstStyle/>
+          <a:p>
+            <a:r>
+              <a:rPr lang="pt-BR" sz="1400" dirty="0"/>
+              <a:t>CEA055 – Estatística e Probabilidade – Prof. Marcos Goulart Lima</a:t>
+            </a:r>
+          </a:p>
+        </p:txBody>
+      </p:sp>
+    </p:spTree>
+    <p:extLst>
+      <p:ext uri="{BB962C8B-B14F-4D97-AF65-F5344CB8AC3E}">
+        <p14:creationId xmlns:p14="http://schemas.microsoft.com/office/powerpoint/2010/main" val="3303928548"/>
+      </p:ext>
+    </p:extLst>
+  </p:cSld>
+  <p:clrMapOvr>
+    <a:masterClrMapping/>
+  </p:clrMapOvr>
+</p:sld>
+</file>
+
+<file path=ppt/slides/slide2.xml><?xml version="1.0" encoding="utf-8"?>
+<p:sld xmlns:a="http://schemas.openxmlformats.org/drawingml/2006/main" xmlns:r="http://schemas.openxmlformats.org/officeDocument/2006/relationships" xmlns:p="http://schemas.openxmlformats.org/presentationml/2006/main">
+  <p:cSld>
+    <p:spTree>
+      <p:nvGrpSpPr>
+        <p:cNvPr id="1" name=""/>
+        <p:cNvGrpSpPr/>
+        <p:nvPr/>
+      </p:nvGrpSpPr>
+      <p:grpSpPr>
+        <a:xfrm>
+          <a:off x="0" y="0"/>
+          <a:ext cx="0" cy="0"/>
+          <a:chOff x="0" y="0"/>
+          <a:chExt cx="0" cy="0"/>
+        </a:xfrm>
+      </p:grpSpPr>
+      <p:sp>
+        <p:nvSpPr>
+          <p:cNvPr id="6" name="CaixaDeTexto 5">
+            <a:extLst>
+              <a:ext uri="{FF2B5EF4-FFF2-40B4-BE49-F238E27FC236}">
+                <a16:creationId xmlns:a16="http://schemas.microsoft.com/office/drawing/2014/main" id="{720B10DA-C761-4DEE-8D86-E170E1C2E981}"/>
+              </a:ext>
+            </a:extLst>
+          </p:cNvPr>
+          <p:cNvSpPr txBox="1"/>
+          <p:nvPr/>
+        </p:nvSpPr>
+        <p:spPr>
+          <a:xfrm>
+            <a:off x="629138" y="602580"/>
+            <a:ext cx="10748061" cy="5579861"/>
+          </a:xfrm>
+          <a:prstGeom prst="rect">
+            <a:avLst/>
+          </a:prstGeom>
+          <a:noFill/>
+        </p:spPr>
+        <p:txBody>
+          <a:bodyPr wrap="square" rtlCol="0">
+            <a:spAutoFit/>
+          </a:bodyPr>
+          <a:lstStyle/>
+          <a:p>
+            <a:r>
+              <a:rPr lang="pt-BR" sz="2400" b="1" dirty="0"/>
+              <a:t>Exemplo. </a:t>
+            </a:r>
+            <a:r>
+              <a:rPr lang="pt-BR" sz="2400" dirty="0"/>
+              <a:t>Uma universidade tem a seguinte distribuição de alunos, segundo o sexo e a escolha de curso:</a:t>
+            </a:r>
+          </a:p>
+          <a:p>
+            <a:endParaRPr lang="pt-BR" sz="2400" dirty="0"/>
+          </a:p>
+          <a:p>
+            <a:endParaRPr lang="pt-BR" sz="2400" dirty="0"/>
+          </a:p>
+          <a:p>
+            <a:endParaRPr lang="pt-BR" sz="2400" dirty="0"/>
+          </a:p>
+          <a:p>
+            <a:endParaRPr lang="pt-BR" sz="2400" dirty="0"/>
+          </a:p>
+          <a:p>
+            <a:endParaRPr lang="pt-BR" sz="2400" dirty="0"/>
+          </a:p>
+          <a:p>
+            <a:endParaRPr lang="pt-BR" sz="2400" dirty="0"/>
+          </a:p>
+          <a:p>
+            <a:pPr>
+              <a:lnSpc>
+                <a:spcPct val="150000"/>
+              </a:lnSpc>
+            </a:pPr>
+            <a:r>
+              <a:rPr lang="pt-BR" sz="2400" dirty="0"/>
+              <a:t>a) </a:t>
+            </a:r>
+            <a:r>
+              <a:rPr lang="pt-BR" sz="2200" dirty="0"/>
+              <a:t>Escolhido ao acaso um aluno do curso de Matemática Aplicada, qual a probabilidade de ele ser homem? E de ser mulher?</a:t>
+            </a:r>
+          </a:p>
+          <a:p>
+            <a:pPr>
+              <a:lnSpc>
+                <a:spcPct val="150000"/>
+              </a:lnSpc>
+            </a:pPr>
+            <a:r>
+              <a:rPr lang="pt-BR" sz="2200" dirty="0"/>
+              <a:t>b) Escolhido ao acaso um homem dentre todos os alunos da universidade, qual a probabilidade de ele ser do curso de Matemática Aplicada? E escolhida ao acaso uma mulher dentre todas, qual a probabilidade de ela ser do curso de </a:t>
+            </a:r>
+            <a:r>
+              <a:rPr lang="pt-BR" sz="2200" dirty="0" err="1"/>
+              <a:t>MatemáticaAplicada</a:t>
+            </a:r>
+            <a:r>
+              <a:rPr lang="pt-BR" sz="2200" dirty="0"/>
+              <a:t>?</a:t>
+            </a:r>
+          </a:p>
+        </p:txBody>
+      </p:sp>
+      <p:sp>
+        <p:nvSpPr>
+          <p:cNvPr id="3" name="CaixaDeTexto 2">
+            <a:extLst>
+              <a:ext uri="{FF2B5EF4-FFF2-40B4-BE49-F238E27FC236}">
+                <a16:creationId xmlns:a16="http://schemas.microsoft.com/office/drawing/2014/main" id="{19131A04-B5D6-4211-8B49-4615DE5797E9}"/>
+              </a:ext>
+            </a:extLst>
+          </p:cNvPr>
+          <p:cNvSpPr txBox="1"/>
+          <p:nvPr/>
+        </p:nvSpPr>
+        <p:spPr>
+          <a:xfrm>
+            <a:off x="361188" y="6463893"/>
+            <a:ext cx="7772400" cy="308152"/>
+          </a:xfrm>
+          <a:prstGeom prst="rect">
+            <a:avLst/>
+          </a:prstGeom>
+          <a:noFill/>
+        </p:spPr>
+        <p:txBody>
+          <a:bodyPr wrap="none" rtlCol="0">
+            <a:spAutoFit/>
+          </a:bodyPr>
+          <a:lstStyle/>
+          <a:p>
+            <a:r>
+              <a:rPr lang="pt-BR" sz="1400" dirty="0"/>
+              <a:t>CEA055 – Estatística e Probabilidade – Prof. Marcos Goulart Lima</a:t>
+            </a:r>
+          </a:p>
+        </p:txBody>
+      </p:sp>
+      <p:pic>
+        <p:nvPicPr>
+          <p:cNvPr id="4" name="Imagem 3">
+            <a:extLst>
+              <a:ext uri="{FF2B5EF4-FFF2-40B4-BE49-F238E27FC236}">
+                <a16:creationId xmlns:a16="http://schemas.microsoft.com/office/drawing/2014/main" id="{45BF1ABE-2001-ED4B-7383-480A8D7B71D1}"/>
+              </a:ext>
+            </a:extLst>
+          </p:cNvPr>
+          <p:cNvPicPr>
+            <a:picLocks noChangeAspect="1"/>
+          </p:cNvPicPr>
+          <p:nvPr/>
+        </p:nvPicPr>
+        <p:blipFill>
+          <a:blip r:embed="rId2"/>
+          <a:stretch>
+            <a:fillRect/>
+          </a:stretch>
+        </p:blipFill>
+        <p:spPr>
+          <a:xfrm>
+            <a:off x="3807856" y="1156394"/>
+            <a:ext cx="6099305" cy="2462344"/>
+          </a:xfrm>
+          <a:prstGeom prst="rect">
+            <a:avLst/>
+          </a:prstGeom>
+        </p:spPr>
+      </p:pic>
+    </p:spTree>
+    <p:extLst>
+      <p:ext uri="{BB962C8B-B14F-4D97-AF65-F5344CB8AC3E}">
+        <p14:creationId xmlns:p14="http://schemas.microsoft.com/office/powerpoint/2010/main" val="4137224127"/>
+      </p:ext>
+    </p:extLst>
+  </p:cSld>
+  <p:clrMapOvr>
+    <a:masterClrMapping/>
+  </p:clrMapOvr>
+</p:sld>
+</file>
+
+<file path=ppt/slides/slide3.xml><?xml version="1.0" encoding="utf-8"?>
+<p:sld xmlns:a="http://schemas.openxmlformats.org/drawingml/2006/main" xmlns:r="http://schemas.openxmlformats.org/officeDocument/2006/relationships" xmlns:p="http://schemas.openxmlformats.org/presentationml/2006/main">
+  <p:cSld>
+    <p:spTree>
+      <p:nvGrpSpPr>
+        <p:cNvPr id="1" name=""/>
+        <p:cNvGrpSpPr/>
+        <p:nvPr/>
+      </p:nvGrpSpPr>
+      <p:grpSpPr>
+        <a:xfrm>
+          <a:off x="0" y="0"/>
+          <a:ext cx="0" cy="0"/>
+          <a:chOff x="0" y="0"/>
+          <a:chExt cx="0" cy="0"/>
+        </a:xfrm>
+      </p:grpSpPr>
+      <mc:AlternateContent xmlns:mc="http://schemas.openxmlformats.org/markup-compatibility/2006" xmlns:a14="http://schemas.microsoft.com/office/drawing/2010/main">
+        <mc:Choice Requires="a14">
+          <p:sp>
+            <p:nvSpPr>
+              <p:cNvPr id="6" name="CaixaDeTexto 5">
+                <a:extLst>
+                  <a:ext uri="{FF2B5EF4-FFF2-40B4-BE49-F238E27FC236}">
+                    <a16:creationId xmlns:a16="http://schemas.microsoft.com/office/drawing/2014/main" id="{720B10DA-C761-4DEE-8D86-E170E1C2E981}"/>
+                  </a:ext>
+                </a:extLst>
+              </p:cNvPr>
+              <p:cNvSpPr txBox="1"/>
+              <p:nvPr/>
+            </p:nvSpPr>
+            <p:spPr>
+              <a:xfrm>
+                <a:off x="721969" y="652794"/>
+                <a:ext cx="10748061" cy="5143716"/>
+              </a:xfrm>
+              <a:prstGeom prst="rect">
+                <a:avLst/>
+              </a:prstGeom>
+              <a:noFill/>
+            </p:spPr>
+            <p:txBody>
+              <a:bodyPr wrap="square" rtlCol="0">
+                <a:spAutoFit/>
+              </a:bodyPr>
+              <a:lstStyle/>
+              <a:p>
+                <a:pPr>
+                  <a:lnSpc>
+                    <a:spcPct val="150000"/>
+                  </a:lnSpc>
+                </a:pPr>
+                <a:r>
+                  <a:rPr lang="pt-BR" sz="2400" b="1" dirty="0"/>
+                  <a:t>Probabilidade Condicional e Independência</a:t>
+                </a:r>
+              </a:p>
+              <a:p>
+                <a:pPr>
+                  <a:lnSpc>
+                    <a:spcPct val="150000"/>
+                  </a:lnSpc>
+                </a:pPr>
+                <a:r>
+                  <a:rPr lang="pt-BR" sz="2400" dirty="0"/>
+                  <a:t>Para dois eventos quaisquer </a:t>
+                </a:r>
+                <a14:m>
+                  <m:oMath xmlns:m="http://schemas.openxmlformats.org/officeDocument/2006/math">
+                    <m:r>
+                      <a:rPr lang="pt-BR" sz="2400" b="0" i="1" smtClean="0">
+                        <a:latin typeface="Cambria Math" panose="02040503050406030204" pitchFamily="18" charset="0"/>
+                      </a:rPr>
+                      <m:t>𝐴</m:t>
+                    </m:r>
+                  </m:oMath>
+                </a14:m>
+                <a:r>
+                  <a:rPr lang="pt-BR" sz="2400" dirty="0"/>
+                  <a:t> e </a:t>
+                </a:r>
+                <a14:m>
+                  <m:oMath xmlns:m="http://schemas.openxmlformats.org/officeDocument/2006/math">
+                    <m:r>
+                      <a:rPr lang="pt-BR" sz="2400" b="0" i="1" smtClean="0">
+                        <a:latin typeface="Cambria Math" panose="02040503050406030204" pitchFamily="18" charset="0"/>
+                      </a:rPr>
+                      <m:t>𝐵</m:t>
+                    </m:r>
+                  </m:oMath>
+                </a14:m>
+                <a:r>
+                  <a:rPr lang="pt-BR" sz="2400" dirty="0"/>
+                  <a:t>, sendo </a:t>
+                </a:r>
+                <a14:m>
+                  <m:oMath xmlns:m="http://schemas.openxmlformats.org/officeDocument/2006/math">
+                    <m:r>
+                      <a:rPr lang="pt-BR" sz="2400" b="0" i="1" smtClean="0">
+                        <a:latin typeface="Cambria Math" panose="02040503050406030204" pitchFamily="18" charset="0"/>
+                      </a:rPr>
+                      <m:t>𝑃</m:t>
+                    </m:r>
+                    <m:d>
+                      <m:dPr>
+                        <m:ctrlPr>
+                          <a:rPr lang="pt-BR" sz="2400" b="0" i="1" smtClean="0">
+                            <a:latin typeface="Cambria Math" panose="02040503050406030204" pitchFamily="18" charset="0"/>
+                          </a:rPr>
+                        </m:ctrlPr>
+                      </m:dPr>
+                      <m:e>
+                        <m:r>
+                          <a:rPr lang="pt-BR" sz="2400" b="0" i="1" smtClean="0">
+                            <a:latin typeface="Cambria Math" panose="02040503050406030204" pitchFamily="18" charset="0"/>
+                          </a:rPr>
+                          <m:t>𝐵</m:t>
+                        </m:r>
+                      </m:e>
+                    </m:d>
+                    <m:r>
+                      <a:rPr lang="pt-BR" sz="2400" b="0" i="1" smtClean="0">
+                        <a:latin typeface="Cambria Math" panose="02040503050406030204" pitchFamily="18" charset="0"/>
+                      </a:rPr>
+                      <m:t>&gt;</m:t>
+                    </m:r>
+                    <m:r>
+                      <a:rPr lang="pt-BR" sz="2400" b="0" i="1" smtClean="0">
+                        <a:latin typeface="Cambria Math" panose="02040503050406030204" pitchFamily="18" charset="0"/>
+                      </a:rPr>
+                      <m:t>0</m:t>
+                    </m:r>
+                  </m:oMath>
+                </a14:m>
+                <a:r>
+                  <a:rPr lang="pt-BR" sz="2400" dirty="0"/>
+                  <a:t>, definimos a probabilidade condicional de </a:t>
+                </a:r>
+                <a14:m>
+                  <m:oMath xmlns:m="http://schemas.openxmlformats.org/officeDocument/2006/math">
+                    <m:r>
+                      <a:rPr lang="pt-BR" sz="2400" b="0" i="1" smtClean="0">
+                        <a:latin typeface="Cambria Math" panose="02040503050406030204" pitchFamily="18" charset="0"/>
+                      </a:rPr>
+                      <m:t>𝐴</m:t>
+                    </m:r>
+                  </m:oMath>
+                </a14:m>
+                <a:r>
+                  <a:rPr lang="pt-BR" sz="2400" dirty="0"/>
+                  <a:t> dado </a:t>
+                </a:r>
+                <a14:m>
+                  <m:oMath xmlns:m="http://schemas.openxmlformats.org/officeDocument/2006/math">
+                    <m:r>
+                      <a:rPr lang="pt-BR" sz="2400" b="0" i="1" smtClean="0">
+                        <a:latin typeface="Cambria Math" panose="02040503050406030204" pitchFamily="18" charset="0"/>
+                      </a:rPr>
+                      <m:t>𝐵</m:t>
+                    </m:r>
+                  </m:oMath>
+                </a14:m>
+                <a:r>
+                  <a:rPr lang="pt-BR" sz="2400" dirty="0"/>
+                  <a:t>, </a:t>
+                </a:r>
+                <a14:m>
+                  <m:oMath xmlns:m="http://schemas.openxmlformats.org/officeDocument/2006/math">
+                    <m:r>
+                      <a:rPr lang="pt-BR" sz="2400" b="0" i="1" smtClean="0">
+                        <a:latin typeface="Cambria Math" panose="02040503050406030204" pitchFamily="18" charset="0"/>
+                      </a:rPr>
+                      <m:t>𝑃</m:t>
+                    </m:r>
+                    <m:r>
+                      <a:rPr lang="pt-BR" sz="2400" b="0" i="1" smtClean="0">
+                        <a:latin typeface="Cambria Math" panose="02040503050406030204" pitchFamily="18" charset="0"/>
+                      </a:rPr>
+                      <m:t>(</m:t>
+                    </m:r>
+                    <m:r>
+                      <a:rPr lang="pt-BR" sz="2400" b="0" i="1" smtClean="0">
+                        <a:latin typeface="Cambria Math" panose="02040503050406030204" pitchFamily="18" charset="0"/>
+                      </a:rPr>
+                      <m:t>𝐴</m:t>
+                    </m:r>
+                    <m:r>
+                      <a:rPr lang="pt-BR" sz="2400" b="0" i="1" smtClean="0">
+                        <a:latin typeface="Cambria Math" panose="02040503050406030204" pitchFamily="18" charset="0"/>
+                      </a:rPr>
+                      <m:t>|</m:t>
+                    </m:r>
+                    <m:r>
+                      <a:rPr lang="pt-BR" sz="2400" b="0" i="1" smtClean="0">
+                        <a:latin typeface="Cambria Math" panose="02040503050406030204" pitchFamily="18" charset="0"/>
+                      </a:rPr>
+                      <m:t>𝐵</m:t>
+                    </m:r>
+                    <m:r>
+                      <a:rPr lang="pt-BR" sz="2400" b="0" i="1" smtClean="0">
+                        <a:latin typeface="Cambria Math" panose="02040503050406030204" pitchFamily="18" charset="0"/>
+                      </a:rPr>
+                      <m:t>)</m:t>
+                    </m:r>
+                  </m:oMath>
+                </a14:m>
+                <a:r>
+                  <a:rPr lang="pt-BR" sz="2400" dirty="0"/>
+                  <a:t>, como</a:t>
+                </a:r>
+              </a:p>
+              <a:p>
+                <a:pPr>
+                  <a:lnSpc>
+                    <a:spcPct val="150000"/>
+                  </a:lnSpc>
+                </a:pPr>
+                <a:endParaRPr lang="pt-BR" sz="2400" dirty="0"/>
+              </a:p>
+              <a:p>
+                <a:pPr>
+                  <a:lnSpc>
+                    <a:spcPct val="150000"/>
+                  </a:lnSpc>
+                </a:pPr>
+                <a14:m>
+                  <m:oMathPara xmlns:m="http://schemas.openxmlformats.org/officeDocument/2006/math">
+                    <m:oMathParaPr>
+                      <m:jc m:val="centerGroup"/>
+                    </m:oMathParaPr>
+                    <m:oMath xmlns:m="http://schemas.openxmlformats.org/officeDocument/2006/math">
+                      <m:r>
+                        <a:rPr lang="pt-BR" sz="2400" b="0" i="1" smtClean="0">
+                          <a:latin typeface="Cambria Math" panose="02040503050406030204" pitchFamily="18" charset="0"/>
+                        </a:rPr>
+                        <m:t>𝑃</m:t>
+                      </m:r>
+                      <m:d>
+                        <m:dPr>
+                          <m:ctrlPr>
+                            <a:rPr lang="pt-BR" sz="2400" b="0" i="1" smtClean="0">
+                              <a:latin typeface="Cambria Math" panose="02040503050406030204" pitchFamily="18" charset="0"/>
+                            </a:rPr>
+                          </m:ctrlPr>
+                        </m:dPr>
+                        <m:e>
+                          <m:r>
+                            <a:rPr lang="pt-BR" sz="2400" b="0" i="1" smtClean="0">
+                              <a:latin typeface="Cambria Math" panose="02040503050406030204" pitchFamily="18" charset="0"/>
+                            </a:rPr>
+                            <m:t>𝐴</m:t>
+                          </m:r>
+                        </m:e>
+                        <m:e>
+                          <m:r>
+                            <a:rPr lang="pt-BR" sz="2400" b="0" i="1" smtClean="0">
+                              <a:latin typeface="Cambria Math" panose="02040503050406030204" pitchFamily="18" charset="0"/>
+                            </a:rPr>
+                            <m:t>𝐵</m:t>
+                          </m:r>
+                        </m:e>
+                      </m:d>
+                      <m:r>
+                        <a:rPr lang="pt-BR" sz="2400" b="0" i="1" smtClean="0">
+                          <a:latin typeface="Cambria Math" panose="02040503050406030204" pitchFamily="18" charset="0"/>
+                        </a:rPr>
+                        <m:t>=</m:t>
+                      </m:r>
+                      <m:f>
+                        <m:fPr>
+                          <m:ctrlPr>
+                            <a:rPr lang="pt-BR" sz="2400" b="0" i="1" smtClean="0">
+                              <a:latin typeface="Cambria Math" panose="02040503050406030204" pitchFamily="18" charset="0"/>
+                            </a:rPr>
+                          </m:ctrlPr>
+                        </m:fPr>
+                        <m:num>
+                          <m:r>
+                            <a:rPr lang="pt-BR" sz="2400" b="0" i="1" smtClean="0">
+                              <a:latin typeface="Cambria Math" panose="02040503050406030204" pitchFamily="18" charset="0"/>
+                            </a:rPr>
+                            <m:t>𝑃</m:t>
+                          </m:r>
+                          <m:d>
+                            <m:dPr>
+                              <m:ctrlPr>
+                                <a:rPr lang="pt-BR" sz="2400" b="0" i="1" smtClean="0">
+                                  <a:latin typeface="Cambria Math" panose="02040503050406030204" pitchFamily="18" charset="0"/>
+                                </a:rPr>
+                              </m:ctrlPr>
+                            </m:dPr>
+                            <m:e>
+                              <m:r>
+                                <a:rPr lang="pt-BR" sz="2400" b="0" i="1" smtClean="0">
+                                  <a:latin typeface="Cambria Math" panose="02040503050406030204" pitchFamily="18" charset="0"/>
+                                </a:rPr>
+                                <m:t>𝐴</m:t>
+                              </m:r>
+                              <m:r>
+                                <a:rPr lang="pt-BR" sz="2400" b="0" i="1" smtClean="0">
+                                  <a:latin typeface="Cambria Math" panose="02040503050406030204" pitchFamily="18" charset="0"/>
+                                </a:rPr>
+                                <m:t>∩</m:t>
+                              </m:r>
+                              <m:r>
+                                <a:rPr lang="pt-BR" sz="2400" b="0" i="1" smtClean="0">
+                                  <a:latin typeface="Cambria Math" panose="02040503050406030204" pitchFamily="18" charset="0"/>
+                                </a:rPr>
+                                <m:t>𝐵</m:t>
+                              </m:r>
+                            </m:e>
+                          </m:d>
+                        </m:num>
+                        <m:den>
+                          <m:r>
+                            <a:rPr lang="pt-BR" sz="2400" b="0" i="1" smtClean="0">
+                              <a:latin typeface="Cambria Math" panose="02040503050406030204" pitchFamily="18" charset="0"/>
+                            </a:rPr>
+                            <m:t>𝑃</m:t>
+                          </m:r>
+                          <m:r>
+                            <a:rPr lang="pt-BR" sz="2400" b="0" i="1" smtClean="0">
+                              <a:latin typeface="Cambria Math" panose="02040503050406030204" pitchFamily="18" charset="0"/>
+                            </a:rPr>
+                            <m:t>(</m:t>
+                          </m:r>
+                          <m:r>
+                            <a:rPr lang="pt-BR" sz="2400" b="0" i="1" smtClean="0">
+                              <a:latin typeface="Cambria Math" panose="02040503050406030204" pitchFamily="18" charset="0"/>
+                            </a:rPr>
+                            <m:t>𝐵</m:t>
+                          </m:r>
+                          <m:r>
+                            <a:rPr lang="pt-BR" sz="2400" b="0" i="1" smtClean="0">
+                              <a:latin typeface="Cambria Math" panose="02040503050406030204" pitchFamily="18" charset="0"/>
+                            </a:rPr>
+                            <m:t>)</m:t>
+                          </m:r>
+                        </m:den>
+                      </m:f>
+                      <m:r>
+                        <a:rPr lang="pt-BR" sz="2400" b="0" i="1" smtClean="0">
+                          <a:latin typeface="Cambria Math" panose="02040503050406030204" pitchFamily="18" charset="0"/>
+                        </a:rPr>
+                        <m:t>.</m:t>
+                      </m:r>
+                    </m:oMath>
+                  </m:oMathPara>
+                </a14:m>
+                <a:endParaRPr lang="pt-BR" sz="2400" b="0" dirty="0"/>
+              </a:p>
+              <a:p>
+                <a:pPr>
+                  <a:lnSpc>
+                    <a:spcPct val="150000"/>
+                  </a:lnSpc>
+                </a:pPr>
+                <a:endParaRPr lang="pt-BR" sz="2400" dirty="0"/>
+              </a:p>
+              <a:p>
+                <a:pPr>
+                  <a:lnSpc>
+                    <a:spcPct val="150000"/>
+                  </a:lnSpc>
+                </a:pPr>
+                <a:r>
+                  <a:rPr lang="pt-BR" sz="2400" dirty="0"/>
+                  <a:t>Observe que da definição podemos extrair a </a:t>
+                </a:r>
+                <a:r>
+                  <a:rPr lang="pt-BR" sz="2400" b="1" dirty="0"/>
+                  <a:t>regra do produto de probabilidades</a:t>
+                </a:r>
+              </a:p>
+              <a:p>
+                <a:pPr>
+                  <a:lnSpc>
+                    <a:spcPct val="150000"/>
+                  </a:lnSpc>
+                </a:pPr>
+                <a14:m>
+                  <m:oMathPara xmlns:m="http://schemas.openxmlformats.org/officeDocument/2006/math">
+                    <m:oMathParaPr>
+                      <m:jc m:val="centerGroup"/>
+                    </m:oMathParaPr>
+                    <m:oMath xmlns:m="http://schemas.openxmlformats.org/officeDocument/2006/math">
+                      <m:r>
+                        <a:rPr lang="pt-BR" sz="2400" i="1">
+                          <a:latin typeface="Cambria Math" panose="02040503050406030204" pitchFamily="18" charset="0"/>
+                        </a:rPr>
+                        <m:t>𝑃</m:t>
+                      </m:r>
+                      <m:d>
+                        <m:dPr>
+                          <m:ctrlPr>
+                            <a:rPr lang="pt-BR" sz="2400" i="1">
+                              <a:latin typeface="Cambria Math" panose="02040503050406030204" pitchFamily="18" charset="0"/>
+                            </a:rPr>
+                          </m:ctrlPr>
+                        </m:dPr>
+                        <m:e>
+                          <m:r>
+                            <a:rPr lang="pt-BR" sz="2400" i="1">
+                              <a:latin typeface="Cambria Math" panose="02040503050406030204" pitchFamily="18" charset="0"/>
+                            </a:rPr>
+                            <m:t>𝐴</m:t>
+                          </m:r>
+                          <m:r>
+                            <a:rPr lang="pt-BR" sz="2400" i="1">
+                              <a:latin typeface="Cambria Math" panose="02040503050406030204" pitchFamily="18" charset="0"/>
+                            </a:rPr>
+                            <m:t>∩</m:t>
+                          </m:r>
+                          <m:r>
+                            <a:rPr lang="pt-BR" sz="2400" i="1">
+                              <a:latin typeface="Cambria Math" panose="02040503050406030204" pitchFamily="18" charset="0"/>
+                            </a:rPr>
+                            <m:t>𝐵</m:t>
+                          </m:r>
+                        </m:e>
+                      </m:d>
+                      <m:r>
+                        <a:rPr lang="pt-BR" sz="2400" b="0" i="1" smtClean="0">
+                          <a:latin typeface="Cambria Math" panose="02040503050406030204" pitchFamily="18" charset="0"/>
+                        </a:rPr>
+                        <m:t>=</m:t>
+                      </m:r>
+                      <m:r>
+                        <a:rPr lang="pt-BR" sz="2400" b="0" i="1" smtClean="0">
+                          <a:latin typeface="Cambria Math" panose="02040503050406030204" pitchFamily="18" charset="0"/>
+                        </a:rPr>
+                        <m:t>𝑃</m:t>
+                      </m:r>
+                      <m:d>
+                        <m:dPr>
+                          <m:ctrlPr>
+                            <a:rPr lang="pt-BR" sz="2400" b="0" i="1" smtClean="0">
+                              <a:latin typeface="Cambria Math" panose="02040503050406030204" pitchFamily="18" charset="0"/>
+                            </a:rPr>
+                          </m:ctrlPr>
+                        </m:dPr>
+                        <m:e>
+                          <m:r>
+                            <a:rPr lang="pt-BR" sz="2400" b="0" i="1" smtClean="0">
+                              <a:latin typeface="Cambria Math" panose="02040503050406030204" pitchFamily="18" charset="0"/>
+                            </a:rPr>
+                            <m:t>𝐵</m:t>
+                          </m:r>
+                        </m:e>
+                      </m:d>
+                      <m:r>
+                        <a:rPr lang="pt-BR" sz="2400" i="1">
+                          <a:latin typeface="Cambria Math" panose="02040503050406030204" pitchFamily="18" charset="0"/>
+                        </a:rPr>
+                        <m:t>𝑃</m:t>
+                      </m:r>
+                      <m:d>
+                        <m:dPr>
+                          <m:ctrlPr>
+                            <a:rPr lang="pt-BR" sz="2400" i="1">
+                              <a:latin typeface="Cambria Math" panose="02040503050406030204" pitchFamily="18" charset="0"/>
+                            </a:rPr>
+                          </m:ctrlPr>
+                        </m:dPr>
+                        <m:e>
+                          <m:r>
+                            <a:rPr lang="pt-BR" sz="2400" i="1">
+                              <a:latin typeface="Cambria Math" panose="02040503050406030204" pitchFamily="18" charset="0"/>
+                            </a:rPr>
+                            <m:t>𝐴</m:t>
+                          </m:r>
+                        </m:e>
+                        <m:e>
+                          <m:r>
+                            <a:rPr lang="pt-BR" sz="2400" i="1">
+                              <a:latin typeface="Cambria Math" panose="02040503050406030204" pitchFamily="18" charset="0"/>
+                            </a:rPr>
+                            <m:t>𝐵</m:t>
+                          </m:r>
+                        </m:e>
+                      </m:d>
+                      <m:r>
+                        <a:rPr lang="pt-BR" sz="2400" i="1">
+                          <a:latin typeface="Cambria Math" panose="02040503050406030204" pitchFamily="18" charset="0"/>
+                        </a:rPr>
+                        <m:t>.</m:t>
+                      </m:r>
+                    </m:oMath>
+                  </m:oMathPara>
+                </a14:m>
+                <a:endParaRPr lang="pt-BR" sz="2400" dirty="0"/>
+              </a:p>
+            </p:txBody>
+          </p:sp>
+        </mc:Choice>
+        <mc:Fallback xmlns="">
+          <p:sp>
+            <p:nvSpPr>
+              <p:cNvPr id="6" name="CaixaDeTexto 5">
+                <a:extLst>
+                  <a:ext uri="{FF2B5EF4-FFF2-40B4-BE49-F238E27FC236}">
+                    <a16:creationId xmlns:a16="http://schemas.microsoft.com/office/drawing/2014/main" id="{720B10DA-C761-4DEE-8D86-E170E1C2E981}"/>
+                  </a:ext>
+                </a:extLst>
+              </p:cNvPr>
+              <p:cNvSpPr txBox="1">
+                <a:spLocks noRot="1" noChangeAspect="1" noMove="1" noResize="1" noEditPoints="1" noAdjustHandles="1" noChangeArrowheads="1" noChangeShapeType="1" noTextEdit="1"/>
+              </p:cNvSpPr>
+              <p:nvPr/>
+            </p:nvSpPr>
+            <p:spPr>
+              <a:xfrm>
+                <a:off x="721969" y="652794"/>
+                <a:ext cx="10748061" cy="5143716"/>
+              </a:xfrm>
+              <a:prstGeom prst="rect">
+                <a:avLst/>
+              </a:prstGeom>
+              <a:blipFill>
+                <a:blip r:embed="rId2"/>
+                <a:stretch>
+                  <a:fillRect l="-850"/>
+                </a:stretch>
+              </a:blipFill>
+            </p:spPr>
+            <p:txBody>
+              <a:bodyPr/>
+              <a:lstStyle/>
+              <a:p>
+                <a:r>
+                  <a:rPr lang="pt-BR">
+                    <a:noFill/>
+                  </a:rPr>
+                  <a:t> </a:t>
+                </a:r>
+              </a:p>
+            </p:txBody>
+          </p:sp>
+        </mc:Fallback>
+      </mc:AlternateContent>
+      <p:sp>
+        <p:nvSpPr>
+          <p:cNvPr id="3" name="CaixaDeTexto 2">
+            <a:extLst>
+              <a:ext uri="{FF2B5EF4-FFF2-40B4-BE49-F238E27FC236}">
+                <a16:creationId xmlns:a16="http://schemas.microsoft.com/office/drawing/2014/main" id="{19131A04-B5D6-4211-8B49-4615DE5797E9}"/>
+              </a:ext>
+            </a:extLst>
+          </p:cNvPr>
+          <p:cNvSpPr txBox="1"/>
+          <p:nvPr/>
+        </p:nvSpPr>
+        <p:spPr>
+          <a:xfrm>
+            <a:off x="361188" y="6463893"/>
+            <a:ext cx="7772400" cy="308152"/>
+          </a:xfrm>
+          <a:prstGeom prst="rect">
+            <a:avLst/>
+          </a:prstGeom>
+          <a:noFill/>
+        </p:spPr>
+        <p:txBody>
+          <a:bodyPr wrap="none" rtlCol="0">
+            <a:spAutoFit/>
+          </a:bodyPr>
+          <a:lstStyle/>
+          <a:p>
+            <a:r>
+              <a:rPr lang="pt-BR" sz="1400" dirty="0"/>
+              <a:t>CEA055 – Estatística e Probabilidade – Prof. Marcos Goulart Lima</a:t>
+            </a:r>
+          </a:p>
+        </p:txBody>
+      </p:sp>
+    </p:spTree>
+    <p:extLst>
+      <p:ext uri="{BB962C8B-B14F-4D97-AF65-F5344CB8AC3E}">
+        <p14:creationId xmlns:p14="http://schemas.microsoft.com/office/powerpoint/2010/main" val="86929316"/>
+      </p:ext>
+    </p:extLst>
+  </p:cSld>
+  <p:clrMapOvr>
+    <a:masterClrMapping/>
+  </p:clrMapOvr>
+</p:sld>
+</file>
+
+<file path=ppt/slides/slide4.xml><?xml version="1.0" encoding="utf-8"?>
+<p:sld xmlns:a="http://schemas.openxmlformats.org/drawingml/2006/main" xmlns:r="http://schemas.openxmlformats.org/officeDocument/2006/relationships" xmlns:p="http://schemas.openxmlformats.org/presentationml/2006/main">
+  <p:cSld>
+    <p:spTree>
+      <p:nvGrpSpPr>
+        <p:cNvPr id="1" name=""/>
+        <p:cNvGrpSpPr/>
+        <p:nvPr/>
+      </p:nvGrpSpPr>
+      <p:grpSpPr>
+        <a:xfrm>
+          <a:off x="0" y="0"/>
+          <a:ext cx="0" cy="0"/>
+          <a:chOff x="0" y="0"/>
+          <a:chExt cx="0" cy="0"/>
+        </a:xfrm>
+      </p:grpSpPr>
+      <p:sp>
+        <p:nvSpPr>
+          <p:cNvPr id="6" name="CaixaDeTexto 5">
+            <a:extLst>
+              <a:ext uri="{FF2B5EF4-FFF2-40B4-BE49-F238E27FC236}">
+                <a16:creationId xmlns:a16="http://schemas.microsoft.com/office/drawing/2014/main" id="{720B10DA-C761-4DEE-8D86-E170E1C2E981}"/>
+              </a:ext>
+            </a:extLst>
+          </p:cNvPr>
+          <p:cNvSpPr txBox="1"/>
+          <p:nvPr/>
+        </p:nvSpPr>
+        <p:spPr>
+          <a:xfrm>
+            <a:off x="721969" y="678920"/>
+            <a:ext cx="10748061" cy="4401205"/>
+          </a:xfrm>
+          <a:prstGeom prst="rect">
+            <a:avLst/>
+          </a:prstGeom>
+          <a:noFill/>
+        </p:spPr>
+        <p:txBody>
+          <a:bodyPr wrap="square" rtlCol="0">
+            <a:spAutoFit/>
+          </a:bodyPr>
+          <a:lstStyle/>
+          <a:p>
+            <a:r>
+              <a:rPr lang="pt-BR" sz="2800" b="1" dirty="0"/>
+              <a:t>Exemplo. Calculando P(A|B)</a:t>
+            </a:r>
+          </a:p>
+          <a:p>
+            <a:endParaRPr lang="pt-BR" sz="2800" dirty="0"/>
+          </a:p>
+          <a:p>
+            <a:r>
+              <a:rPr lang="pt-BR" sz="2800" dirty="0"/>
+              <a:t>Se P(A) = 1/3, P(B) = 3/4 e P(A∪B) = 11/12, calcule P(A|B).</a:t>
+            </a:r>
+          </a:p>
+          <a:p>
+            <a:endParaRPr lang="pt-BR" sz="2800" dirty="0"/>
+          </a:p>
+          <a:p>
+            <a:r>
+              <a:rPr lang="pt-BR" sz="2800" dirty="0"/>
+              <a:t>Resposta:</a:t>
+            </a:r>
+          </a:p>
+          <a:p>
+            <a:endParaRPr lang="pt-BR" sz="2800" dirty="0"/>
+          </a:p>
+          <a:p>
+            <a:r>
+              <a:rPr lang="pt-BR" sz="2800" dirty="0"/>
+              <a:t>Da regra da soma: P(A∩B) = P(A) + P(B) − P(A∪B) = 1/3 + 3/4 − 11/12 = 1/6.</a:t>
+            </a:r>
+          </a:p>
+          <a:p>
+            <a:endParaRPr lang="pt-BR" sz="2800" dirty="0"/>
+          </a:p>
+          <a:p>
+            <a:r>
+              <a:rPr lang="pt-BR" sz="2800" dirty="0"/>
+              <a:t>P(A|B) = P(A∩B) / P(B) = (1/6) / (3/4) = 2/9.</a:t>
+            </a:r>
+          </a:p>
+        </p:txBody>
+      </p:sp>
+      <p:sp>
+        <p:nvSpPr>
+          <p:cNvPr id="3" name="CaixaDeTexto 2">
+            <a:extLst>
+              <a:ext uri="{FF2B5EF4-FFF2-40B4-BE49-F238E27FC236}">
+                <a16:creationId xmlns:a16="http://schemas.microsoft.com/office/drawing/2014/main" id="{19131A04-B5D6-4211-8B49-4615DE5797E9}"/>
+              </a:ext>
+            </a:extLst>
+          </p:cNvPr>
+          <p:cNvSpPr txBox="1"/>
+          <p:nvPr/>
+        </p:nvSpPr>
+        <p:spPr>
+          <a:xfrm>
+            <a:off x="361188" y="6463893"/>
+            <a:ext cx="7772400" cy="308152"/>
+          </a:xfrm>
+          <a:prstGeom prst="rect">
+            <a:avLst/>
+          </a:prstGeom>
+          <a:noFill/>
+        </p:spPr>
+        <p:txBody>
+          <a:bodyPr wrap="none" rtlCol="0">
+            <a:spAutoFit/>
+          </a:bodyPr>
+          <a:lstStyle/>
+          <a:p>
+            <a:r>
+              <a:rPr lang="pt-BR" sz="1400" dirty="0"/>
+              <a:t>CEA055 – Estatística e Probabilidade – Prof. Marcos Goulart Lima</a:t>
+            </a:r>
+          </a:p>
+        </p:txBody>
+      </p:sp>
+    </p:spTree>
+    <p:extLst>
+      <p:ext uri="{BB962C8B-B14F-4D97-AF65-F5344CB8AC3E}">
+        <p14:creationId xmlns:p14="http://schemas.microsoft.com/office/powerpoint/2010/main" val="1131317111"/>
+      </p:ext>
+    </p:extLst>
+  </p:cSld>
+  <p:clrMapOvr>
+    <a:masterClrMapping/>
+  </p:clrMapOvr>
+</p:sld>
+</file>
+
+<file path=ppt/slides/slide5.xml><?xml version="1.0" encoding="utf-8"?>
+<p:sld xmlns:a="http://schemas.openxmlformats.org/drawingml/2006/main" xmlns:r="http://schemas.openxmlformats.org/officeDocument/2006/relationships" xmlns:p="http://schemas.openxmlformats.org/presentationml/2006/main">
+  <p:cSld>
+    <p:spTree>
+      <p:nvGrpSpPr>
+        <p:cNvPr id="1" name=""/>
+        <p:cNvGrpSpPr/>
+        <p:nvPr/>
+      </p:nvGrpSpPr>
+      <p:grpSpPr>
+        <a:xfrm>
+          <a:off x="0" y="0"/>
+          <a:ext cx="0" cy="0"/>
+          <a:chOff x="0" y="0"/>
+          <a:chExt cx="0" cy="0"/>
+        </a:xfrm>
+      </p:grpSpPr>
+      <p:sp>
+        <p:nvSpPr>
+          <p:cNvPr id="6" name="CaixaDeTexto 5">
+            <a:extLst>
+              <a:ext uri="{FF2B5EF4-FFF2-40B4-BE49-F238E27FC236}">
+                <a16:creationId xmlns:a16="http://schemas.microsoft.com/office/drawing/2014/main" id="{720B10DA-C761-4DEE-8D86-E170E1C2E981}"/>
+              </a:ext>
+            </a:extLst>
+          </p:cNvPr>
+          <p:cNvSpPr txBox="1"/>
+          <p:nvPr/>
+        </p:nvSpPr>
+        <p:spPr>
+          <a:xfrm>
+            <a:off x="721969" y="739879"/>
+            <a:ext cx="10748061" cy="1697068"/>
+          </a:xfrm>
+          <a:prstGeom prst="rect">
+            <a:avLst/>
+          </a:prstGeom>
+          <a:noFill/>
+        </p:spPr>
+        <p:txBody>
+          <a:bodyPr wrap="square" rtlCol="0">
+            <a:spAutoFit/>
+          </a:bodyPr>
+          <a:lstStyle/>
+          <a:p>
+            <a:pPr>
+              <a:lnSpc>
+                <a:spcPct val="150000"/>
+              </a:lnSpc>
+            </a:pPr>
+            <a:r>
+              <a:rPr lang="pt-BR" sz="2400" b="1" dirty="0"/>
+              <a:t>Exemplo: </a:t>
+            </a:r>
+            <a:r>
+              <a:rPr lang="pt-BR" sz="2400" dirty="0"/>
+              <a:t>Urna sem reposição. Uma urna contém 2 bolas brancas (B) e 3 vermelhas (V). Sorteiam-se 2 bolas ao acaso, sem reposição. Quais são os resultados possíveis e suas probabilidades?</a:t>
+            </a:r>
+          </a:p>
+        </p:txBody>
+      </p:sp>
+      <p:sp>
+        <p:nvSpPr>
+          <p:cNvPr id="3" name="CaixaDeTexto 2">
+            <a:extLst>
+              <a:ext uri="{FF2B5EF4-FFF2-40B4-BE49-F238E27FC236}">
+                <a16:creationId xmlns:a16="http://schemas.microsoft.com/office/drawing/2014/main" id="{19131A04-B5D6-4211-8B49-4615DE5797E9}"/>
+              </a:ext>
+            </a:extLst>
+          </p:cNvPr>
+          <p:cNvSpPr txBox="1"/>
+          <p:nvPr/>
+        </p:nvSpPr>
+        <p:spPr>
+          <a:xfrm>
+            <a:off x="361188" y="6463893"/>
+            <a:ext cx="7772400" cy="308152"/>
+          </a:xfrm>
+          <a:prstGeom prst="rect">
+            <a:avLst/>
+          </a:prstGeom>
+          <a:noFill/>
+        </p:spPr>
+        <p:txBody>
+          <a:bodyPr wrap="none" rtlCol="0">
+            <a:spAutoFit/>
+          </a:bodyPr>
+          <a:lstStyle/>
+          <a:p>
+            <a:r>
+              <a:rPr lang="pt-BR" sz="1400" dirty="0"/>
+              <a:t>CEA055 – Estatística e Probabilidade – Prof. Marcos Goulart Lima</a:t>
+            </a:r>
+          </a:p>
+        </p:txBody>
+      </p:sp>
+      <p:pic>
+        <p:nvPicPr>
+          <p:cNvPr id="7" name="Imagem 6">
+            <a:extLst>
+              <a:ext uri="{FF2B5EF4-FFF2-40B4-BE49-F238E27FC236}">
+                <a16:creationId xmlns:a16="http://schemas.microsoft.com/office/drawing/2014/main" id="{DD111532-239E-48EB-A3D5-D8708BD430D5}"/>
+              </a:ext>
+            </a:extLst>
+          </p:cNvPr>
+          <p:cNvPicPr>
+            <a:picLocks noChangeAspect="1"/>
+          </p:cNvPicPr>
+          <p:nvPr/>
+        </p:nvPicPr>
+        <p:blipFill>
+          <a:blip r:embed="rId2"/>
+          <a:stretch>
+            <a:fillRect/>
+          </a:stretch>
+        </p:blipFill>
+        <p:spPr>
+          <a:xfrm>
+            <a:off x="721969" y="2690601"/>
+            <a:ext cx="5794328" cy="2926428"/>
+          </a:xfrm>
+          <a:prstGeom prst="rect">
+            <a:avLst/>
+          </a:prstGeom>
+        </p:spPr>
+      </p:pic>
+      <p:sp>
+        <p:nvSpPr>
+          <p:cNvPr id="4" name="CaixaDeTexto 3">
+            <a:extLst>
+              <a:ext uri="{FF2B5EF4-FFF2-40B4-BE49-F238E27FC236}">
+                <a16:creationId xmlns:a16="http://schemas.microsoft.com/office/drawing/2014/main" id="{720B10DA-C761-4DEE-8D86-E170E1C2E981}"/>
+              </a:ext>
+            </a:extLst>
+          </p:cNvPr>
+          <p:cNvSpPr txBox="1"/>
+          <p:nvPr/>
+        </p:nvSpPr>
+        <p:spPr>
+          <a:xfrm>
+            <a:off x="6911642" y="2436599"/>
+            <a:ext cx="4558388" cy="3416320"/>
+          </a:xfrm>
+          <a:prstGeom prst="rect">
+            <a:avLst/>
+          </a:prstGeom>
+          <a:noFill/>
+        </p:spPr>
+        <p:txBody>
+          <a:bodyPr wrap="square" rtlCol="0">
+            <a:spAutoFit/>
+          </a:bodyPr>
+          <a:lstStyle/>
+          <a:p>
+            <a:pPr algn="ctr"/>
+            <a:r>
+              <a:rPr lang="pt-BR" sz="2400" dirty="0"/>
+              <a:t>Resultados possíveis</a:t>
+            </a:r>
+          </a:p>
+          <a:p>
+            <a:pPr algn="ctr"/>
+            <a:endParaRPr lang="pt-BR" sz="2400" dirty="0"/>
+          </a:p>
+          <a:p>
+            <a:r>
+              <a:rPr lang="pt-BR" sz="2400" dirty="0"/>
+              <a:t>BV</a:t>
+            </a:r>
+          </a:p>
+          <a:p>
+            <a:endParaRPr lang="pt-BR" sz="2400" dirty="0"/>
+          </a:p>
+          <a:p>
+            <a:r>
+              <a:rPr lang="pt-BR" sz="2400" dirty="0"/>
+              <a:t>BB</a:t>
+            </a:r>
+          </a:p>
+          <a:p>
+            <a:endParaRPr lang="pt-BR" sz="2400" dirty="0"/>
+          </a:p>
+          <a:p>
+            <a:r>
+              <a:rPr lang="pt-BR" sz="2400" dirty="0"/>
+              <a:t>VV</a:t>
+            </a:r>
+          </a:p>
+          <a:p>
+            <a:endParaRPr lang="pt-BR" sz="2400" dirty="0"/>
+          </a:p>
+          <a:p>
+            <a:r>
+              <a:rPr lang="pt-BR" sz="2400" dirty="0"/>
+              <a:t>VB</a:t>
+            </a:r>
+          </a:p>
+        </p:txBody>
+      </p:sp>
+    </p:spTree>
+    <p:extLst>
+      <p:ext uri="{BB962C8B-B14F-4D97-AF65-F5344CB8AC3E}">
+        <p14:creationId xmlns:p14="http://schemas.microsoft.com/office/powerpoint/2010/main" val="3028240649"/>
+      </p:ext>
+    </p:extLst>
+  </p:cSld>
+  <p:clrMapOvr>
+    <a:masterClrMapping/>
+  </p:clrMapOvr>
+</p:sld>
+</file>
+
+<file path=ppt/slides/slide6.xml><?xml version="1.0" encoding="utf-8"?>
+<p:sld xmlns:a="http://schemas.openxmlformats.org/drawingml/2006/main" xmlns:r="http://schemas.openxmlformats.org/officeDocument/2006/relationships" xmlns:p="http://schemas.openxmlformats.org/presentationml/2006/main">
+  <p:cSld>
+    <p:spTree>
+      <p:nvGrpSpPr>
+        <p:cNvPr id="1" name=""/>
+        <p:cNvGrpSpPr/>
+        <p:nvPr/>
+      </p:nvGrpSpPr>
+      <p:grpSpPr>
+        <a:xfrm>
+          <a:off x="0" y="0"/>
+          <a:ext cx="0" cy="0"/>
+          <a:chOff x="0" y="0"/>
+          <a:chExt cx="0" cy="0"/>
+        </a:xfrm>
+      </p:grpSpPr>
+      <p:sp>
+        <p:nvSpPr>
+          <p:cNvPr id="6" name="CaixaDeTexto 5">
+            <a:extLst>
+              <a:ext uri="{FF2B5EF4-FFF2-40B4-BE49-F238E27FC236}">
+                <a16:creationId xmlns:a16="http://schemas.microsoft.com/office/drawing/2014/main" id="{720B10DA-C761-4DEE-8D86-E170E1C2E981}"/>
+              </a:ext>
+            </a:extLst>
+          </p:cNvPr>
+          <p:cNvSpPr txBox="1"/>
+          <p:nvPr/>
+        </p:nvSpPr>
+        <p:spPr>
+          <a:xfrm>
+            <a:off x="658143" y="853091"/>
+            <a:ext cx="10597137" cy="5196166"/>
+          </a:xfrm>
+          <a:prstGeom prst="rect">
+            <a:avLst/>
+          </a:prstGeom>
+          <a:noFill/>
+        </p:spPr>
+        <p:txBody>
+          <a:bodyPr wrap="square" rtlCol="0">
+            <a:spAutoFit/>
+          </a:bodyPr>
+          <a:lstStyle/>
+          <a:p>
+            <a:pPr rtl="0">
+              <a:lnSpc>
+                <a:spcPct val="150000"/>
+              </a:lnSpc>
+            </a:pPr>
+            <a:r>
+              <a:rPr lang="pt-BR" sz="2800" b="1" dirty="0"/>
+              <a:t>Por que a probabilidade muda entre as extrações?</a:t>
+            </a:r>
+            <a:endParaRPr lang="pt-BR" sz="2800" dirty="0"/>
+          </a:p>
+          <a:p>
+            <a:pPr rtl="0">
+              <a:lnSpc>
+                <a:spcPct val="150000"/>
+              </a:lnSpc>
+              <a:buFont typeface="+mj-lt"/>
+              <a:buAutoNum type="arabicPeriod"/>
+            </a:pPr>
+            <a:r>
+              <a:rPr lang="pt-BR" sz="2800" dirty="0"/>
+              <a:t> Se a primeira bola sorteada foi branca, quantas bolas brancas e quantas vermelhas sobram na urna para a segunda extração? E se a primeira foi vermelha?</a:t>
+            </a:r>
+          </a:p>
+          <a:p>
+            <a:pPr rtl="0">
+              <a:lnSpc>
+                <a:spcPct val="150000"/>
+              </a:lnSpc>
+              <a:buFont typeface="+mj-lt"/>
+              <a:buAutoNum type="arabicPeriod"/>
+            </a:pPr>
+            <a:r>
+              <a:rPr lang="pt-BR" sz="2800" dirty="0"/>
+              <a:t> Com isso, qual é P(branca na 2ª | branca na 1ª)? E P(branca na 2ª | vermelha na 1ª)?</a:t>
+            </a:r>
+          </a:p>
+          <a:p>
+            <a:pPr rtl="0">
+              <a:lnSpc>
+                <a:spcPct val="150000"/>
+              </a:lnSpc>
+              <a:buFont typeface="+mj-lt"/>
+              <a:buAutoNum type="arabicPeriod"/>
+            </a:pPr>
+            <a:r>
+              <a:rPr lang="pt-BR" sz="2800" dirty="0"/>
+              <a:t> O resultado da segunda extração depende do resultado da primeira? Por quê?</a:t>
+            </a:r>
+          </a:p>
+        </p:txBody>
+      </p:sp>
+      <p:sp>
+        <p:nvSpPr>
+          <p:cNvPr id="3" name="CaixaDeTexto 2">
+            <a:extLst>
+              <a:ext uri="{FF2B5EF4-FFF2-40B4-BE49-F238E27FC236}">
+                <a16:creationId xmlns:a16="http://schemas.microsoft.com/office/drawing/2014/main" id="{19131A04-B5D6-4211-8B49-4615DE5797E9}"/>
+              </a:ext>
+            </a:extLst>
+          </p:cNvPr>
+          <p:cNvSpPr txBox="1"/>
+          <p:nvPr/>
+        </p:nvSpPr>
+        <p:spPr>
+          <a:xfrm>
+            <a:off x="361188" y="6463893"/>
+            <a:ext cx="7772400" cy="308152"/>
+          </a:xfrm>
+          <a:prstGeom prst="rect">
+            <a:avLst/>
+          </a:prstGeom>
+          <a:noFill/>
+        </p:spPr>
+        <p:txBody>
+          <a:bodyPr wrap="none" rtlCol="0">
+            <a:spAutoFit/>
+          </a:bodyPr>
+          <a:lstStyle/>
+          <a:p>
+            <a:r>
+              <a:rPr lang="pt-BR" sz="1400" dirty="0"/>
+              <a:t>CEA055 – Estatística e Probabilidade – Prof. Marcos Goulart Lima</a:t>
+            </a:r>
+          </a:p>
+        </p:txBody>
+      </p:sp>
+    </p:spTree>
+    <p:extLst>
+      <p:ext uri="{BB962C8B-B14F-4D97-AF65-F5344CB8AC3E}">
+        <p14:creationId xmlns:p14="http://schemas.microsoft.com/office/powerpoint/2010/main" val="3781395873"/>
+      </p:ext>
+    </p:extLst>
+  </p:cSld>
+  <p:clrMapOvr>
+    <a:masterClrMapping/>
+  </p:clrMapOvr>
+</p:sld>
+</file>
+
+<file path=ppt/slides/slide7.xml><?xml version="1.0" encoding="utf-8"?>
+<p:sld xmlns:a="http://schemas.openxmlformats.org/drawingml/2006/main" xmlns:r="http://schemas.openxmlformats.org/officeDocument/2006/relationships" xmlns:p="http://schemas.openxmlformats.org/presentationml/2006/main">
+  <p:cSld>
+    <p:spTree>
+      <p:nvGrpSpPr>
+        <p:cNvPr id="1" name=""/>
+        <p:cNvGrpSpPr/>
+        <p:nvPr/>
+      </p:nvGrpSpPr>
+      <p:grpSpPr>
+        <a:xfrm>
+          <a:off x="0" y="0"/>
+          <a:ext cx="0" cy="0"/>
+          <a:chOff x="0" y="0"/>
+          <a:chExt cx="0" cy="0"/>
+        </a:xfrm>
+      </p:grpSpPr>
+      <mc:AlternateContent xmlns:mc="http://schemas.openxmlformats.org/markup-compatibility/2006" xmlns:a14="http://schemas.microsoft.com/office/drawing/2010/main">
+        <mc:Choice Requires="a14">
+          <p:sp>
+            <p:nvSpPr>
+              <p:cNvPr id="6" name="CaixaDeTexto 5">
+                <a:extLst>
+                  <a:ext uri="{FF2B5EF4-FFF2-40B4-BE49-F238E27FC236}">
+                    <a16:creationId xmlns:a16="http://schemas.microsoft.com/office/drawing/2014/main" id="{720B10DA-C761-4DEE-8D86-E170E1C2E981}"/>
+                  </a:ext>
+                </a:extLst>
+              </p:cNvPr>
+              <p:cNvSpPr txBox="1"/>
+              <p:nvPr/>
+            </p:nvSpPr>
+            <p:spPr>
+              <a:xfrm>
+                <a:off x="658143" y="853091"/>
+                <a:ext cx="10597137" cy="5020092"/>
+              </a:xfrm>
+              <a:prstGeom prst="rect">
+                <a:avLst/>
+              </a:prstGeom>
+              <a:noFill/>
+            </p:spPr>
+            <p:txBody>
+              <a:bodyPr wrap="square" rtlCol="0">
+                <a:spAutoFit/>
+              </a:bodyPr>
+              <a:lstStyle/>
+              <a:p>
+                <a:pPr>
+                  <a:lnSpc>
+                    <a:spcPct val="150000"/>
+                  </a:lnSpc>
+                </a:pPr>
+                <a:r>
+                  <a:rPr lang="pt-BR" sz="2400" b="1" dirty="0"/>
+                  <a:t>Exemplo. </a:t>
+                </a:r>
+                <a:r>
+                  <a:rPr lang="pt-BR" sz="2400" dirty="0"/>
+                  <a:t>Duas bolas vão ser retiradas de uma urna que contém 2 bolas brancas, 3 pretas e 4 verdes. Qual a probabilidade de que ambas</a:t>
+                </a:r>
+              </a:p>
+              <a:p>
+                <a:pPr>
+                  <a:lnSpc>
+                    <a:spcPct val="150000"/>
+                  </a:lnSpc>
+                </a:pPr>
+                <a:r>
+                  <a:rPr lang="pt-BR" sz="2400" dirty="0"/>
+                  <a:t>a) sejam verdes?</a:t>
+                </a:r>
+              </a:p>
+              <a:p>
+                <a:pPr>
+                  <a:lnSpc>
+                    <a:spcPct val="150000"/>
+                  </a:lnSpc>
+                </a:pPr>
+                <a:r>
+                  <a:rPr lang="pt-BR" sz="2400" dirty="0"/>
+                  <a:t>b) sejam da mesma cor?</a:t>
+                </a:r>
+              </a:p>
+              <a:p>
+                <a:pPr>
+                  <a:lnSpc>
+                    <a:spcPct val="150000"/>
+                  </a:lnSpc>
+                </a:pPr>
+                <a:endParaRPr lang="pt-BR" sz="2400" dirty="0"/>
+              </a:p>
+              <a:p>
+                <a:pPr>
+                  <a:lnSpc>
+                    <a:spcPct val="150000"/>
+                  </a:lnSpc>
+                </a:pPr>
+                <a:r>
+                  <a:rPr lang="pt-BR" sz="2400" b="1" dirty="0"/>
+                  <a:t>Resposta:</a:t>
+                </a:r>
+              </a:p>
+              <a:p>
+                <a:pPr>
+                  <a:lnSpc>
+                    <a:spcPct val="150000"/>
+                  </a:lnSpc>
+                </a:pPr>
+                <a:r>
+                  <a:rPr lang="pt-BR" sz="2400" dirty="0"/>
+                  <a:t>a) P(ambas verdes) </a:t>
+                </a:r>
+                <a14:m>
+                  <m:oMath xmlns:m="http://schemas.openxmlformats.org/officeDocument/2006/math">
+                    <m:r>
+                      <a:rPr lang="pt-BR" sz="2400" i="1" dirty="0" smtClean="0">
+                        <a:latin typeface="Cambria Math" panose="02040503050406030204" pitchFamily="18" charset="0"/>
+                      </a:rPr>
+                      <m:t>=</m:t>
+                    </m:r>
+                    <m:r>
+                      <a:rPr lang="pt-BR" sz="2400" i="1" dirty="0" smtClean="0">
+                        <a:latin typeface="Cambria Math" panose="02040503050406030204" pitchFamily="18" charset="0"/>
+                      </a:rPr>
+                      <m:t>𝑃</m:t>
+                    </m:r>
+                    <m:d>
+                      <m:dPr>
+                        <m:ctrlPr>
+                          <a:rPr lang="pt-BR" sz="2400" i="1" dirty="0" smtClean="0">
+                            <a:latin typeface="Cambria Math" panose="02040503050406030204" pitchFamily="18" charset="0"/>
+                          </a:rPr>
+                        </m:ctrlPr>
+                      </m:dPr>
+                      <m:e>
+                        <m:r>
+                          <a:rPr lang="pt-BR" sz="2400" i="1" dirty="0" smtClean="0">
+                            <a:latin typeface="Cambria Math" panose="02040503050406030204" pitchFamily="18" charset="0"/>
+                          </a:rPr>
+                          <m:t>𝑉𝑉</m:t>
+                        </m:r>
+                      </m:e>
+                    </m:d>
+                    <m:r>
+                      <a:rPr lang="pt-BR" sz="2400" i="1" dirty="0" smtClean="0">
+                        <a:latin typeface="Cambria Math" panose="02040503050406030204" pitchFamily="18" charset="0"/>
+                      </a:rPr>
+                      <m:t>=</m:t>
+                    </m:r>
+                    <m:r>
+                      <a:rPr lang="pt-BR" sz="2400" i="1" dirty="0" smtClean="0">
+                        <a:latin typeface="Cambria Math" panose="02040503050406030204" pitchFamily="18" charset="0"/>
+                      </a:rPr>
+                      <m:t>𝑃</m:t>
+                    </m:r>
+                    <m:d>
+                      <m:dPr>
+                        <m:ctrlPr>
+                          <a:rPr lang="pt-BR" sz="2400" i="1" dirty="0" smtClean="0">
+                            <a:latin typeface="Cambria Math" panose="02040503050406030204" pitchFamily="18" charset="0"/>
+                          </a:rPr>
+                        </m:ctrlPr>
+                      </m:dPr>
+                      <m:e>
+                        <m:r>
+                          <a:rPr lang="pt-BR" sz="2400" i="1" dirty="0" smtClean="0">
+                            <a:latin typeface="Cambria Math" panose="02040503050406030204" pitchFamily="18" charset="0"/>
+                          </a:rPr>
+                          <m:t>𝑉</m:t>
+                        </m:r>
+                      </m:e>
+                    </m:d>
+                    <m:r>
+                      <a:rPr lang="pt-BR" sz="2400" i="1" dirty="0" smtClean="0">
+                        <a:latin typeface="Cambria Math" panose="02040503050406030204" pitchFamily="18" charset="0"/>
+                      </a:rPr>
+                      <m:t>·</m:t>
+                    </m:r>
+                    <m:r>
+                      <a:rPr lang="pt-BR" sz="2400" i="1" dirty="0" smtClean="0">
+                        <a:latin typeface="Cambria Math" panose="02040503050406030204" pitchFamily="18" charset="0"/>
+                      </a:rPr>
+                      <m:t>𝑃</m:t>
+                    </m:r>
+                    <m:d>
+                      <m:dPr>
+                        <m:ctrlPr>
+                          <a:rPr lang="pt-BR" sz="2400" i="1" dirty="0" smtClean="0">
+                            <a:latin typeface="Cambria Math" panose="02040503050406030204" pitchFamily="18" charset="0"/>
+                          </a:rPr>
+                        </m:ctrlPr>
+                      </m:dPr>
+                      <m:e>
+                        <m:r>
+                          <a:rPr lang="pt-BR" sz="2400" i="1" dirty="0" smtClean="0">
+                            <a:latin typeface="Cambria Math" panose="02040503050406030204" pitchFamily="18" charset="0"/>
+                          </a:rPr>
+                          <m:t>𝑉</m:t>
+                        </m:r>
+                      </m:e>
+                      <m:e>
+                        <m:r>
+                          <a:rPr lang="pt-BR" sz="2400" i="1" dirty="0" smtClean="0">
+                            <a:latin typeface="Cambria Math" panose="02040503050406030204" pitchFamily="18" charset="0"/>
+                          </a:rPr>
+                          <m:t>𝑉</m:t>
+                        </m:r>
+                      </m:e>
+                    </m:d>
+                    <m:r>
+                      <a:rPr lang="pt-BR" sz="2400" i="1" dirty="0" smtClean="0">
+                        <a:latin typeface="Cambria Math" panose="02040503050406030204" pitchFamily="18" charset="0"/>
+                      </a:rPr>
+                      <m:t> = </m:t>
+                    </m:r>
+                    <m:r>
+                      <a:rPr lang="pt-BR" sz="2400" i="1" dirty="0" smtClean="0">
+                        <a:latin typeface="Cambria Math" panose="02040503050406030204" pitchFamily="18" charset="0"/>
+                      </a:rPr>
+                      <m:t>4</m:t>
+                    </m:r>
+                    <m:r>
+                      <a:rPr lang="pt-BR" sz="2400" i="1" dirty="0" smtClean="0">
+                        <a:latin typeface="Cambria Math" panose="02040503050406030204" pitchFamily="18" charset="0"/>
+                      </a:rPr>
+                      <m:t>/</m:t>
+                    </m:r>
+                    <m:r>
+                      <a:rPr lang="pt-BR" sz="2400" i="1" dirty="0" smtClean="0">
+                        <a:latin typeface="Cambria Math" panose="02040503050406030204" pitchFamily="18" charset="0"/>
+                      </a:rPr>
+                      <m:t>9</m:t>
+                    </m:r>
+                    <m:r>
+                      <a:rPr lang="pt-BR" sz="2400" i="1" dirty="0" smtClean="0">
+                        <a:latin typeface="Cambria Math" panose="02040503050406030204" pitchFamily="18" charset="0"/>
+                      </a:rPr>
+                      <m:t>·</m:t>
+                    </m:r>
+                    <m:r>
+                      <a:rPr lang="pt-BR" sz="2400" i="1" dirty="0" smtClean="0">
+                        <a:latin typeface="Cambria Math" panose="02040503050406030204" pitchFamily="18" charset="0"/>
+                      </a:rPr>
+                      <m:t>3</m:t>
+                    </m:r>
+                    <m:r>
+                      <a:rPr lang="pt-BR" sz="2400" i="1" dirty="0" smtClean="0">
+                        <a:latin typeface="Cambria Math" panose="02040503050406030204" pitchFamily="18" charset="0"/>
+                      </a:rPr>
+                      <m:t>/</m:t>
+                    </m:r>
+                    <m:r>
+                      <a:rPr lang="pt-BR" sz="2400" i="1" dirty="0" smtClean="0">
+                        <a:latin typeface="Cambria Math" panose="02040503050406030204" pitchFamily="18" charset="0"/>
+                      </a:rPr>
+                      <m:t>8</m:t>
+                    </m:r>
+                    <m:r>
+                      <a:rPr lang="pt-BR" sz="2400" i="1" dirty="0" smtClean="0">
+                        <a:latin typeface="Cambria Math" panose="02040503050406030204" pitchFamily="18" charset="0"/>
+                      </a:rPr>
+                      <m:t> = </m:t>
+                    </m:r>
+                    <m:r>
+                      <a:rPr lang="pt-BR" sz="2400" i="1" dirty="0" smtClean="0">
+                        <a:latin typeface="Cambria Math" panose="02040503050406030204" pitchFamily="18" charset="0"/>
+                      </a:rPr>
+                      <m:t>1</m:t>
+                    </m:r>
+                    <m:r>
+                      <a:rPr lang="pt-BR" sz="2400" i="1" dirty="0" smtClean="0">
+                        <a:latin typeface="Cambria Math" panose="02040503050406030204" pitchFamily="18" charset="0"/>
+                      </a:rPr>
+                      <m:t>/</m:t>
+                    </m:r>
+                    <m:r>
+                      <a:rPr lang="pt-BR" sz="2400" i="1" dirty="0" smtClean="0">
+                        <a:latin typeface="Cambria Math" panose="02040503050406030204" pitchFamily="18" charset="0"/>
+                      </a:rPr>
+                      <m:t>6</m:t>
+                    </m:r>
+                    <m:r>
+                      <a:rPr lang="pt-BR" sz="2400" i="1" dirty="0" smtClean="0">
+                        <a:latin typeface="Cambria Math" panose="02040503050406030204" pitchFamily="18" charset="0"/>
+                      </a:rPr>
+                      <m:t>.</m:t>
+                    </m:r>
+                  </m:oMath>
+                </a14:m>
+                <a:endParaRPr lang="pt-BR" sz="2400" dirty="0"/>
+              </a:p>
+              <a:p>
+                <a:pPr>
+                  <a:lnSpc>
+                    <a:spcPct val="150000"/>
+                  </a:lnSpc>
+                </a:pPr>
+                <a:r>
+                  <a:rPr lang="pt-BR" sz="2400" dirty="0"/>
+                  <a:t>b) P(mesma cor) = </a:t>
+                </a:r>
+                <a14:m>
+                  <m:oMath xmlns:m="http://schemas.openxmlformats.org/officeDocument/2006/math">
+                    <m:r>
+                      <a:rPr lang="pt-BR" sz="2400" i="1" dirty="0" smtClean="0">
+                        <a:latin typeface="Cambria Math" panose="02040503050406030204" pitchFamily="18" charset="0"/>
+                      </a:rPr>
+                      <m:t>𝑃</m:t>
+                    </m:r>
+                    <m:r>
+                      <a:rPr lang="pt-BR" sz="2400" i="1" dirty="0" smtClean="0">
+                        <a:latin typeface="Cambria Math" panose="02040503050406030204" pitchFamily="18" charset="0"/>
+                      </a:rPr>
+                      <m:t>(</m:t>
+                    </m:r>
+                    <m:r>
+                      <a:rPr lang="pt-BR" sz="2400" i="1" dirty="0" smtClean="0">
+                        <a:latin typeface="Cambria Math" panose="02040503050406030204" pitchFamily="18" charset="0"/>
+                      </a:rPr>
+                      <m:t>𝐵𝐵</m:t>
+                    </m:r>
+                    <m:r>
+                      <a:rPr lang="pt-BR" sz="2400" i="1" dirty="0" smtClean="0">
+                        <a:latin typeface="Cambria Math" panose="02040503050406030204" pitchFamily="18" charset="0"/>
+                      </a:rPr>
+                      <m:t>)+</m:t>
+                    </m:r>
+                    <m:r>
+                      <a:rPr lang="pt-BR" sz="2400" i="1" dirty="0" smtClean="0">
+                        <a:latin typeface="Cambria Math" panose="02040503050406030204" pitchFamily="18" charset="0"/>
+                      </a:rPr>
+                      <m:t>𝑃</m:t>
+                    </m:r>
+                    <m:r>
+                      <a:rPr lang="pt-BR" sz="2400" i="1" dirty="0" smtClean="0">
+                        <a:latin typeface="Cambria Math" panose="02040503050406030204" pitchFamily="18" charset="0"/>
+                      </a:rPr>
+                      <m:t>(</m:t>
+                    </m:r>
+                    <m:r>
+                      <a:rPr lang="pt-BR" sz="2400" i="1" dirty="0" smtClean="0">
+                        <a:latin typeface="Cambria Math" panose="02040503050406030204" pitchFamily="18" charset="0"/>
+                      </a:rPr>
+                      <m:t>𝑃𝑃</m:t>
+                    </m:r>
+                    <m:r>
+                      <a:rPr lang="pt-BR" sz="2400" i="1" dirty="0" smtClean="0">
+                        <a:latin typeface="Cambria Math" panose="02040503050406030204" pitchFamily="18" charset="0"/>
+                      </a:rPr>
+                      <m:t>)+</m:t>
+                    </m:r>
+                    <m:r>
+                      <a:rPr lang="pt-BR" sz="2400" i="1" dirty="0" smtClean="0">
+                        <a:latin typeface="Cambria Math" panose="02040503050406030204" pitchFamily="18" charset="0"/>
+                      </a:rPr>
+                      <m:t>𝑃</m:t>
+                    </m:r>
+                    <m:r>
+                      <a:rPr lang="pt-BR" sz="2400" i="1" dirty="0" smtClean="0">
+                        <a:latin typeface="Cambria Math" panose="02040503050406030204" pitchFamily="18" charset="0"/>
+                      </a:rPr>
+                      <m:t>(</m:t>
+                    </m:r>
+                    <m:r>
+                      <a:rPr lang="pt-BR" sz="2400" i="1" dirty="0" smtClean="0">
+                        <a:latin typeface="Cambria Math" panose="02040503050406030204" pitchFamily="18" charset="0"/>
+                      </a:rPr>
+                      <m:t>𝑉𝑉</m:t>
+                    </m:r>
+                    <m:r>
+                      <a:rPr lang="pt-BR" sz="2400" i="1" dirty="0" smtClean="0">
+                        <a:latin typeface="Cambria Math" panose="02040503050406030204" pitchFamily="18" charset="0"/>
+                      </a:rPr>
+                      <m:t>)=(</m:t>
+                    </m:r>
+                    <m:r>
+                      <a:rPr lang="pt-BR" sz="2400" i="1" dirty="0" smtClean="0">
+                        <a:latin typeface="Cambria Math" panose="02040503050406030204" pitchFamily="18" charset="0"/>
+                      </a:rPr>
+                      <m:t>2</m:t>
+                    </m:r>
+                    <m:r>
+                      <a:rPr lang="pt-BR" sz="2400" i="1" dirty="0" smtClean="0">
+                        <a:latin typeface="Cambria Math" panose="02040503050406030204" pitchFamily="18" charset="0"/>
+                      </a:rPr>
+                      <m:t>/</m:t>
+                    </m:r>
+                    <m:r>
+                      <a:rPr lang="pt-BR" sz="2400" i="1" dirty="0" smtClean="0">
+                        <a:latin typeface="Cambria Math" panose="02040503050406030204" pitchFamily="18" charset="0"/>
+                      </a:rPr>
+                      <m:t>9</m:t>
+                    </m:r>
+                    <m:r>
+                      <a:rPr lang="pt-BR" sz="2400" i="1" dirty="0" smtClean="0">
+                        <a:latin typeface="Cambria Math" panose="02040503050406030204" pitchFamily="18" charset="0"/>
+                      </a:rPr>
+                      <m:t>·</m:t>
+                    </m:r>
+                    <m:r>
+                      <a:rPr lang="pt-BR" sz="2400" i="1" dirty="0" smtClean="0">
+                        <a:latin typeface="Cambria Math" panose="02040503050406030204" pitchFamily="18" charset="0"/>
+                      </a:rPr>
+                      <m:t>1</m:t>
+                    </m:r>
+                    <m:r>
+                      <a:rPr lang="pt-BR" sz="2400" i="1" dirty="0" smtClean="0">
+                        <a:latin typeface="Cambria Math" panose="02040503050406030204" pitchFamily="18" charset="0"/>
+                      </a:rPr>
+                      <m:t>/</m:t>
+                    </m:r>
+                    <m:r>
+                      <a:rPr lang="pt-BR" sz="2400" i="1" dirty="0" smtClean="0">
+                        <a:latin typeface="Cambria Math" panose="02040503050406030204" pitchFamily="18" charset="0"/>
+                      </a:rPr>
+                      <m:t>8</m:t>
+                    </m:r>
+                    <m:r>
+                      <a:rPr lang="pt-BR" sz="2400" i="1" dirty="0" smtClean="0">
+                        <a:latin typeface="Cambria Math" panose="02040503050406030204" pitchFamily="18" charset="0"/>
+                      </a:rPr>
+                      <m:t>)+(</m:t>
+                    </m:r>
+                    <m:r>
+                      <a:rPr lang="pt-BR" sz="2400" i="1" dirty="0" smtClean="0">
+                        <a:latin typeface="Cambria Math" panose="02040503050406030204" pitchFamily="18" charset="0"/>
+                      </a:rPr>
+                      <m:t>3</m:t>
+                    </m:r>
+                    <m:r>
+                      <a:rPr lang="pt-BR" sz="2400" i="1" dirty="0" smtClean="0">
+                        <a:latin typeface="Cambria Math" panose="02040503050406030204" pitchFamily="18" charset="0"/>
+                      </a:rPr>
+                      <m:t>/</m:t>
+                    </m:r>
+                    <m:r>
+                      <a:rPr lang="pt-BR" sz="2400" i="1" dirty="0" smtClean="0">
+                        <a:latin typeface="Cambria Math" panose="02040503050406030204" pitchFamily="18" charset="0"/>
+                      </a:rPr>
+                      <m:t>9</m:t>
+                    </m:r>
+                    <m:r>
+                      <a:rPr lang="pt-BR" sz="2400" i="1" dirty="0" smtClean="0">
+                        <a:latin typeface="Cambria Math" panose="02040503050406030204" pitchFamily="18" charset="0"/>
+                      </a:rPr>
+                      <m:t>·</m:t>
+                    </m:r>
+                    <m:r>
+                      <a:rPr lang="pt-BR" sz="2400" i="1" dirty="0" smtClean="0">
+                        <a:latin typeface="Cambria Math" panose="02040503050406030204" pitchFamily="18" charset="0"/>
+                      </a:rPr>
+                      <m:t>2</m:t>
+                    </m:r>
+                    <m:r>
+                      <a:rPr lang="pt-BR" sz="2400" i="1" dirty="0" smtClean="0">
+                        <a:latin typeface="Cambria Math" panose="02040503050406030204" pitchFamily="18" charset="0"/>
+                      </a:rPr>
+                      <m:t>/</m:t>
+                    </m:r>
+                    <m:r>
+                      <a:rPr lang="pt-BR" sz="2400" i="1" dirty="0" smtClean="0">
+                        <a:latin typeface="Cambria Math" panose="02040503050406030204" pitchFamily="18" charset="0"/>
+                      </a:rPr>
+                      <m:t>8</m:t>
+                    </m:r>
+                    <m:r>
+                      <a:rPr lang="pt-BR" sz="2400" i="1" dirty="0" smtClean="0">
+                        <a:latin typeface="Cambria Math" panose="02040503050406030204" pitchFamily="18" charset="0"/>
+                      </a:rPr>
+                      <m:t>)+ </m:t>
+                    </m:r>
+                    <m:r>
+                      <a:rPr lang="pt-BR" sz="2400" i="1" dirty="0" smtClean="0">
+                        <a:latin typeface="Cambria Math" panose="02040503050406030204" pitchFamily="18" charset="0"/>
+                      </a:rPr>
+                      <m:t>1</m:t>
+                    </m:r>
+                    <m:r>
+                      <a:rPr lang="pt-BR" sz="2400" i="1" dirty="0" smtClean="0">
+                        <a:latin typeface="Cambria Math" panose="02040503050406030204" pitchFamily="18" charset="0"/>
+                      </a:rPr>
+                      <m:t>/</m:t>
+                    </m:r>
+                    <m:r>
+                      <a:rPr lang="pt-BR" sz="2400" i="1" dirty="0" smtClean="0">
+                        <a:latin typeface="Cambria Math" panose="02040503050406030204" pitchFamily="18" charset="0"/>
+                      </a:rPr>
+                      <m:t>6</m:t>
+                    </m:r>
+                    <m:r>
+                      <a:rPr lang="pt-BR" sz="2400" i="1" dirty="0" smtClean="0">
+                        <a:latin typeface="Cambria Math" panose="02040503050406030204" pitchFamily="18" charset="0"/>
+                      </a:rPr>
+                      <m:t>=</m:t>
+                    </m:r>
+                    <m:r>
+                      <a:rPr lang="pt-BR" sz="2400" i="1" dirty="0" smtClean="0">
+                        <a:latin typeface="Cambria Math" panose="02040503050406030204" pitchFamily="18" charset="0"/>
+                      </a:rPr>
+                      <m:t>5</m:t>
+                    </m:r>
+                    <m:r>
+                      <a:rPr lang="pt-BR" sz="2400" i="1" dirty="0" smtClean="0">
+                        <a:latin typeface="Cambria Math" panose="02040503050406030204" pitchFamily="18" charset="0"/>
+                      </a:rPr>
+                      <m:t>/</m:t>
+                    </m:r>
+                    <m:r>
+                      <a:rPr lang="pt-BR" sz="2400" i="1" dirty="0" smtClean="0">
+                        <a:latin typeface="Cambria Math" panose="02040503050406030204" pitchFamily="18" charset="0"/>
+                      </a:rPr>
+                      <m:t>18</m:t>
+                    </m:r>
+                  </m:oMath>
+                </a14:m>
+                <a:r>
+                  <a:rPr lang="pt-BR" sz="2400" dirty="0"/>
+                  <a:t>.</a:t>
+                </a:r>
+              </a:p>
+            </p:txBody>
+          </p:sp>
+        </mc:Choice>
+        <mc:Fallback xmlns="">
+          <p:sp>
+            <p:nvSpPr>
+              <p:cNvPr id="6" name="CaixaDeTexto 5">
+                <a:extLst>
+                  <a:ext uri="{FF2B5EF4-FFF2-40B4-BE49-F238E27FC236}">
+                    <a16:creationId xmlns:a16="http://schemas.microsoft.com/office/drawing/2014/main" id="{720B10DA-C761-4DEE-8D86-E170E1C2E981}"/>
+                  </a:ext>
+                </a:extLst>
+              </p:cNvPr>
+              <p:cNvSpPr txBox="1">
+                <a:spLocks noRot="1" noChangeAspect="1" noMove="1" noResize="1" noEditPoints="1" noAdjustHandles="1" noChangeArrowheads="1" noChangeShapeType="1" noTextEdit="1"/>
+              </p:cNvSpPr>
+              <p:nvPr/>
+            </p:nvSpPr>
+            <p:spPr>
+              <a:xfrm>
+                <a:off x="658143" y="853091"/>
+                <a:ext cx="10597137" cy="5020092"/>
+              </a:xfrm>
+              <a:prstGeom prst="rect">
+                <a:avLst/>
+              </a:prstGeom>
+              <a:blipFill>
+                <a:blip r:embed="rId2"/>
+                <a:stretch>
+                  <a:fillRect l="-921" b="-1944"/>
+                </a:stretch>
+              </a:blipFill>
+            </p:spPr>
+            <p:txBody>
+              <a:bodyPr/>
+              <a:lstStyle/>
+              <a:p>
+                <a:r>
+                  <a:rPr lang="pt-BR">
+                    <a:noFill/>
+                  </a:rPr>
+                  <a:t> </a:t>
+                </a:r>
+              </a:p>
+            </p:txBody>
+          </p:sp>
+        </mc:Fallback>
+      </mc:AlternateContent>
+      <p:sp>
+        <p:nvSpPr>
+          <p:cNvPr id="3" name="CaixaDeTexto 2">
+            <a:extLst>
+              <a:ext uri="{FF2B5EF4-FFF2-40B4-BE49-F238E27FC236}">
+                <a16:creationId xmlns:a16="http://schemas.microsoft.com/office/drawing/2014/main" id="{19131A04-B5D6-4211-8B49-4615DE5797E9}"/>
+              </a:ext>
+            </a:extLst>
+          </p:cNvPr>
+          <p:cNvSpPr txBox="1"/>
+          <p:nvPr/>
+        </p:nvSpPr>
+        <p:spPr>
+          <a:xfrm>
+            <a:off x="361188" y="6463893"/>
+            <a:ext cx="7772400" cy="308152"/>
+          </a:xfrm>
+          <a:prstGeom prst="rect">
+            <a:avLst/>
+          </a:prstGeom>
+          <a:noFill/>
+        </p:spPr>
+        <p:txBody>
+          <a:bodyPr wrap="none" rtlCol="0">
+            <a:spAutoFit/>
+          </a:bodyPr>
+          <a:lstStyle/>
+          <a:p>
+            <a:r>
+              <a:rPr lang="pt-BR" sz="1400" dirty="0"/>
+              <a:t>CEA055 – Estatística e Probabilidade – Prof. Marcos Goulart Lima</a:t>
+            </a:r>
+          </a:p>
+        </p:txBody>
+      </p:sp>
+    </p:spTree>
+    <p:extLst>
+      <p:ext uri="{BB962C8B-B14F-4D97-AF65-F5344CB8AC3E}">
+        <p14:creationId xmlns:p14="http://schemas.microsoft.com/office/powerpoint/2010/main" val="3258435062"/>
+      </p:ext>
+    </p:extLst>
+  </p:cSld>
+  <p:clrMapOvr>
+    <a:masterClrMapping/>
+  </p:clrMapOvr>
+</p:sld>
+</file>
+
+<file path=ppt/slides/slide8.xml><?xml version="1.0" encoding="utf-8"?>
 <p:sld xmlns:a="http://schemas.openxmlformats.org/drawingml/2006/main" xmlns:r="http://schemas.openxmlformats.org/officeDocument/2006/relationships" xmlns:p="http://schemas.openxmlformats.org/presentationml/2006/main">
   <p:cSld>
     <p:spTree>
@@ -4590,7 +8916,7 @@
 </p:sld>
 </file>
 
-<file path=ppt/slides/slide11.xml><?xml version="1.0" encoding="utf-8"?>
+<file path=ppt/slides/slide9.xml><?xml version="1.0" encoding="utf-8"?>
 <p:sld xmlns:a="http://schemas.openxmlformats.org/drawingml/2006/main" xmlns:r="http://schemas.openxmlformats.org/officeDocument/2006/relationships" xmlns:p="http://schemas.openxmlformats.org/presentationml/2006/main">
   <p:cSld>
     <p:spTree>
@@ -4607,8 +8933,8 @@
           <a:chExt cx="0" cy="0"/>
         </a:xfrm>
       </p:grpSpPr>
-      <mc:AlternateContent xmlns:mc="http://schemas.openxmlformats.org/markup-compatibility/2006">
-        <mc:Choice xmlns:a14="http://schemas.microsoft.com/office/drawing/2010/main" Requires="a14">
+      <mc:AlternateContent xmlns:mc="http://schemas.openxmlformats.org/markup-compatibility/2006" xmlns:a14="http://schemas.microsoft.com/office/drawing/2010/main">
+        <mc:Choice Requires="a14">
           <p:sp>
             <p:nvSpPr>
               <p:cNvPr id="6" name="CaixaDeTexto 5">
@@ -4782,7 +9108,25 @@
                       <a:rPr lang="pt-BR" sz="2200" i="1" dirty="0" smtClean="0">
                         <a:latin typeface="Cambria Math" panose="02040503050406030204" pitchFamily="18" charset="0"/>
                       </a:rPr>
-                      <m:t>)=1/8</m:t>
+                      <m:t>)=</m:t>
+                    </m:r>
+                    <m:r>
+                      <a:rPr lang="pt-BR" sz="2200" i="1" dirty="0" smtClean="0">
+                        <a:latin typeface="Cambria Math" panose="02040503050406030204" pitchFamily="18" charset="0"/>
+                      </a:rPr>
+                      <m:t>1</m:t>
+                    </m:r>
+                    <m:r>
+                      <a:rPr lang="pt-BR" sz="2200" i="1" dirty="0" smtClean="0">
+                        <a:latin typeface="Cambria Math" panose="02040503050406030204" pitchFamily="18" charset="0"/>
+                      </a:rPr>
+                      <m:t>/</m:t>
+                    </m:r>
+                    <m:r>
+                      <a:rPr lang="pt-BR" sz="2200" i="1" dirty="0" smtClean="0">
+                        <a:latin typeface="Cambria Math" panose="02040503050406030204" pitchFamily="18" charset="0"/>
+                      </a:rPr>
+                      <m:t>8</m:t>
                     </m:r>
                   </m:oMath>
                 </a14:m>
@@ -4823,7 +9167,31 @@
                       <a:rPr lang="pt-BR" sz="2200" i="1" dirty="0" smtClean="0">
                         <a:latin typeface="Cambria Math" panose="02040503050406030204" pitchFamily="18" charset="0"/>
                       </a:rPr>
-                      <m:t>) = 1/2.</m:t>
+                      <m:t>) = </m:t>
+                    </m:r>
+                    <m:r>
+                      <a:rPr lang="pt-BR" sz="2200" i="1" dirty="0" smtClean="0">
+                        <a:latin typeface="Cambria Math" panose="02040503050406030204" pitchFamily="18" charset="0"/>
+                      </a:rPr>
+                      <m:t>1</m:t>
+                    </m:r>
+                    <m:r>
+                      <a:rPr lang="pt-BR" sz="2200" i="1" dirty="0" smtClean="0">
+                        <a:latin typeface="Cambria Math" panose="02040503050406030204" pitchFamily="18" charset="0"/>
+                      </a:rPr>
+                      <m:t>/</m:t>
+                    </m:r>
+                    <m:r>
+                      <a:rPr lang="pt-BR" sz="2200" i="1" dirty="0" smtClean="0">
+                        <a:latin typeface="Cambria Math" panose="02040503050406030204" pitchFamily="18" charset="0"/>
+                      </a:rPr>
+                      <m:t>2</m:t>
+                    </m:r>
+                    <m:r>
+                      <a:rPr lang="pt-BR" sz="2200" i="1" dirty="0" smtClean="0">
+                        <a:latin typeface="Cambria Math" panose="02040503050406030204" pitchFamily="18" charset="0"/>
+                      </a:rPr>
+                      <m:t>.</m:t>
                     </m:r>
                   </m:oMath>
                 </a14:m>
@@ -4861,7 +9229,31 @@
                       <a:rPr lang="pt-BR" sz="2200" i="1" dirty="0" smtClean="0">
                         <a:latin typeface="Cambria Math" panose="02040503050406030204" pitchFamily="18" charset="0"/>
                       </a:rPr>
-                      <m:t>) = 1/4.</m:t>
+                      <m:t>) = </m:t>
+                    </m:r>
+                    <m:r>
+                      <a:rPr lang="pt-BR" sz="2200" i="1" dirty="0" smtClean="0">
+                        <a:latin typeface="Cambria Math" panose="02040503050406030204" pitchFamily="18" charset="0"/>
+                      </a:rPr>
+                      <m:t>1</m:t>
+                    </m:r>
+                    <m:r>
+                      <a:rPr lang="pt-BR" sz="2200" i="1" dirty="0" smtClean="0">
+                        <a:latin typeface="Cambria Math" panose="02040503050406030204" pitchFamily="18" charset="0"/>
+                      </a:rPr>
+                      <m:t>/</m:t>
+                    </m:r>
+                    <m:r>
+                      <a:rPr lang="pt-BR" sz="2200" i="1" dirty="0" smtClean="0">
+                        <a:latin typeface="Cambria Math" panose="02040503050406030204" pitchFamily="18" charset="0"/>
+                      </a:rPr>
+                      <m:t>4</m:t>
+                    </m:r>
+                    <m:r>
+                      <a:rPr lang="pt-BR" sz="2200" i="1" dirty="0" smtClean="0">
+                        <a:latin typeface="Cambria Math" panose="02040503050406030204" pitchFamily="18" charset="0"/>
+                      </a:rPr>
+                      <m:t>.</m:t>
                     </m:r>
                   </m:oMath>
                 </a14:m>
@@ -4974,830 +9366,31 @@
                       <a:rPr lang="pt-BR" sz="2200" i="1" dirty="0" smtClean="0">
                         <a:latin typeface="Cambria Math" panose="02040503050406030204" pitchFamily="18" charset="0"/>
                       </a:rPr>
-                      <m:t>)=1/8</m:t>
+                      <m:t>)=</m:t>
+                    </m:r>
+                    <m:r>
+                      <a:rPr lang="pt-BR" sz="2200" i="1" dirty="0" smtClean="0">
+                        <a:latin typeface="Cambria Math" panose="02040503050406030204" pitchFamily="18" charset="0"/>
+                      </a:rPr>
+                      <m:t>1</m:t>
+                    </m:r>
+                    <m:r>
+                      <a:rPr lang="pt-BR" sz="2200" i="1" dirty="0" smtClean="0">
+                        <a:latin typeface="Cambria Math" panose="02040503050406030204" pitchFamily="18" charset="0"/>
+                      </a:rPr>
+                      <m:t>/</m:t>
+                    </m:r>
+                    <m:r>
+                      <a:rPr lang="pt-BR" sz="2200" i="1" dirty="0" smtClean="0">
+                        <a:latin typeface="Cambria Math" panose="02040503050406030204" pitchFamily="18" charset="0"/>
+                      </a:rPr>
+                      <m:t>8</m:t>
                     </m:r>
                   </m:oMath>
                 </a14:m>
                 <a:r>
                   <a:rPr lang="pt-BR" sz="2200" dirty="0"/>
                   <a:t>, A e B são independentes.</a:t>
-                </a:r>
-              </a:p>
-            </p:txBody>
-          </p:sp>
-        </mc:Choice>
-        <mc:Fallback>
-          <p:sp>
-            <p:nvSpPr>
-              <p:cNvPr id="6" name="CaixaDeTexto 5">
-                <a:extLst>
-                  <a:ext uri="{FF2B5EF4-FFF2-40B4-BE49-F238E27FC236}">
-                    <a16:creationId xmlns:a16="http://schemas.microsoft.com/office/drawing/2014/main" id="{720B10DA-C761-4DEE-8D86-E170E1C2E981}"/>
-                  </a:ext>
-                </a:extLst>
-              </p:cNvPr>
-              <p:cNvSpPr txBox="1">
-                <a:spLocks noRot="1" noChangeAspect="1" noMove="1" noResize="1" noEditPoints="1" noAdjustHandles="1" noChangeArrowheads="1" noChangeShapeType="1" noTextEdit="1"/>
-              </p:cNvSpPr>
-              <p:nvPr/>
-            </p:nvSpPr>
-            <p:spPr>
-              <a:xfrm>
-                <a:off x="629138" y="644086"/>
-                <a:ext cx="10748061" cy="5626027"/>
-              </a:xfrm>
-              <a:prstGeom prst="rect">
-                <a:avLst/>
-              </a:prstGeom>
-              <a:blipFill>
-                <a:blip r:embed="rId2"/>
-                <a:stretch>
-                  <a:fillRect l="-737" b="-1192"/>
-                </a:stretch>
-              </a:blipFill>
-            </p:spPr>
-            <p:txBody>
-              <a:bodyPr/>
-              <a:lstStyle/>
-              <a:p>
-                <a:r>
-                  <a:rPr lang="pt-BR">
-                    <a:noFill/>
-                  </a:rPr>
-                  <a:t> </a:t>
-                </a:r>
-              </a:p>
-            </p:txBody>
-          </p:sp>
-        </mc:Fallback>
-      </mc:AlternateContent>
-      <p:sp>
-        <p:nvSpPr>
-          <p:cNvPr id="3" name="CaixaDeTexto 2">
-            <a:extLst>
-              <a:ext uri="{FF2B5EF4-FFF2-40B4-BE49-F238E27FC236}">
-                <a16:creationId xmlns:a16="http://schemas.microsoft.com/office/drawing/2014/main" id="{19131A04-B5D6-4211-8B49-4615DE5797E9}"/>
-              </a:ext>
-            </a:extLst>
-          </p:cNvPr>
-          <p:cNvSpPr txBox="1"/>
-          <p:nvPr/>
-        </p:nvSpPr>
-        <p:spPr>
-          <a:xfrm>
-            <a:off x="361188" y="6463893"/>
-            <a:ext cx="7772400" cy="308152"/>
-          </a:xfrm>
-          <a:prstGeom prst="rect">
-            <a:avLst/>
-          </a:prstGeom>
-          <a:noFill/>
-        </p:spPr>
-        <p:txBody>
-          <a:bodyPr wrap="none" rtlCol="0">
-            <a:spAutoFit/>
-          </a:bodyPr>
-          <a:lstStyle/>
-          <a:p>
-            <a:r>
-              <a:rPr lang="pt-BR" sz="1400" dirty="0"/>
-              <a:t>CEA055 – Estatística e Probabilidade – Prof. Marcos Goulart Lima</a:t>
-            </a:r>
-          </a:p>
-        </p:txBody>
-      </p:sp>
-    </p:spTree>
-    <p:extLst>
-      <p:ext uri="{BB962C8B-B14F-4D97-AF65-F5344CB8AC3E}">
-        <p14:creationId xmlns:p14="http://schemas.microsoft.com/office/powerpoint/2010/main" val="2633401551"/>
-      </p:ext>
-    </p:extLst>
-  </p:cSld>
-  <p:clrMapOvr>
-    <a:masterClrMapping/>
-  </p:clrMapOvr>
-</p:sld>
-</file>
-
-<file path=ppt/slides/slide12.xml><?xml version="1.0" encoding="utf-8"?>
-<p:sld xmlns:a="http://schemas.openxmlformats.org/drawingml/2006/main" xmlns:r="http://schemas.openxmlformats.org/officeDocument/2006/relationships" xmlns:p="http://schemas.openxmlformats.org/presentationml/2006/main">
-  <p:cSld>
-    <p:spTree>
-      <p:nvGrpSpPr>
-        <p:cNvPr id="1" name=""/>
-        <p:cNvGrpSpPr/>
-        <p:nvPr/>
-      </p:nvGrpSpPr>
-      <p:grpSpPr>
-        <a:xfrm>
-          <a:off x="0" y="0"/>
-          <a:ext cx="0" cy="0"/>
-          <a:chOff x="0" y="0"/>
-          <a:chExt cx="0" cy="0"/>
-        </a:xfrm>
-      </p:grpSpPr>
-      <p:sp>
-        <p:nvSpPr>
-          <p:cNvPr id="6" name="CaixaDeTexto 5">
-            <a:extLst>
-              <a:ext uri="{FF2B5EF4-FFF2-40B4-BE49-F238E27FC236}">
-                <a16:creationId xmlns:a16="http://schemas.microsoft.com/office/drawing/2014/main" id="{720B10DA-C761-4DEE-8D86-E170E1C2E981}"/>
-              </a:ext>
-            </a:extLst>
-          </p:cNvPr>
-          <p:cNvSpPr txBox="1"/>
-          <p:nvPr/>
-        </p:nvSpPr>
-        <p:spPr>
-          <a:xfrm>
-            <a:off x="629138" y="644086"/>
-            <a:ext cx="10748061" cy="5626027"/>
-          </a:xfrm>
-          <a:prstGeom prst="rect">
-            <a:avLst/>
-          </a:prstGeom>
-          <a:noFill/>
-        </p:spPr>
-        <p:txBody>
-          <a:bodyPr wrap="square" rtlCol="0">
-            <a:spAutoFit/>
-          </a:bodyPr>
-          <a:lstStyle/>
-          <a:p>
-            <a:pPr>
-              <a:lnSpc>
-                <a:spcPct val="150000"/>
-              </a:lnSpc>
-            </a:pPr>
-            <a:r>
-              <a:rPr lang="pt-BR" sz="2200" b="1" dirty="0"/>
-              <a:t>Exemplo. </a:t>
-            </a:r>
-            <a:r>
-              <a:rPr lang="pt-BR" sz="2200" dirty="0"/>
-              <a:t>Na mesma urna (2 brancas, 3 vermelhas, sem reposição), defina agora:</a:t>
-            </a:r>
-          </a:p>
-          <a:p>
-            <a:pPr marL="342900" indent="-342900">
-              <a:lnSpc>
-                <a:spcPct val="150000"/>
-              </a:lnSpc>
-              <a:buFont typeface="Arial" panose="020B0604020202020204" pitchFamily="34" charset="0"/>
-              <a:buChar char="•"/>
-            </a:pPr>
-            <a:r>
-              <a:rPr lang="pt-BR" sz="2200" dirty="0"/>
-              <a:t>A: a 1ª bola é branca; </a:t>
-            </a:r>
-          </a:p>
-          <a:p>
-            <a:pPr marL="342900" indent="-342900">
-              <a:lnSpc>
-                <a:spcPct val="150000"/>
-              </a:lnSpc>
-              <a:buFont typeface="Arial" panose="020B0604020202020204" pitchFamily="34" charset="0"/>
-              <a:buChar char="•"/>
-            </a:pPr>
-            <a:r>
-              <a:rPr lang="pt-BR" sz="2200" dirty="0"/>
-              <a:t>B: a 2ª bola é branca.</a:t>
-            </a:r>
-          </a:p>
-          <a:p>
-            <a:pPr>
-              <a:lnSpc>
-                <a:spcPct val="150000"/>
-              </a:lnSpc>
-            </a:pPr>
-            <a:r>
-              <a:rPr lang="pt-BR" sz="2200" dirty="0"/>
-              <a:t> A e B são independentes?</a:t>
-            </a:r>
-          </a:p>
-          <a:p>
-            <a:pPr>
-              <a:lnSpc>
-                <a:spcPct val="150000"/>
-              </a:lnSpc>
-            </a:pPr>
-            <a:r>
-              <a:rPr lang="pt-BR" sz="2200" dirty="0"/>
-              <a:t>Resposta:     P(A) = 2/5 (lido direto da árvore).</a:t>
-            </a:r>
-          </a:p>
-          <a:p>
-            <a:pPr lvl="3">
-              <a:lnSpc>
-                <a:spcPct val="150000"/>
-              </a:lnSpc>
-            </a:pPr>
-            <a:r>
-              <a:rPr lang="pt-BR" sz="2200" dirty="0"/>
-              <a:t>P(B) = P(BB) + P(VB) = 2/20 + 6/20 = 8/20 = 2/5 (somando os dois caminhos da árvore em que a 2ª bola sai branca). </a:t>
-            </a:r>
-          </a:p>
-          <a:p>
-            <a:pPr lvl="3">
-              <a:lnSpc>
-                <a:spcPct val="150000"/>
-              </a:lnSpc>
-            </a:pPr>
-            <a:r>
-              <a:rPr lang="pt-BR" sz="2200" dirty="0"/>
-              <a:t>P(A∩B) = P(BB) = 2/20 = 1/10.</a:t>
-            </a:r>
-          </a:p>
-          <a:p>
-            <a:pPr>
-              <a:lnSpc>
-                <a:spcPct val="150000"/>
-              </a:lnSpc>
-            </a:pPr>
-            <a:r>
-              <a:rPr lang="pt-BR" sz="2200" dirty="0"/>
-              <a:t>Se A e B fossem independentes, esperaríamos P(A∩B) = P(A)·P(B) = 2/5 · 2/5 = 4/25 = 0,16. Mas P(A∩B) = 0,1 ≠ 0,16.A e B não são independentes — faz sentido, já que a 2ª extração depende da 1ª (é exatamente o que a árvore mostra).</a:t>
-            </a:r>
-          </a:p>
-        </p:txBody>
-      </p:sp>
-      <p:sp>
-        <p:nvSpPr>
-          <p:cNvPr id="3" name="CaixaDeTexto 2">
-            <a:extLst>
-              <a:ext uri="{FF2B5EF4-FFF2-40B4-BE49-F238E27FC236}">
-                <a16:creationId xmlns:a16="http://schemas.microsoft.com/office/drawing/2014/main" id="{19131A04-B5D6-4211-8B49-4615DE5797E9}"/>
-              </a:ext>
-            </a:extLst>
-          </p:cNvPr>
-          <p:cNvSpPr txBox="1"/>
-          <p:nvPr/>
-        </p:nvSpPr>
-        <p:spPr>
-          <a:xfrm>
-            <a:off x="361188" y="6463893"/>
-            <a:ext cx="7772400" cy="308152"/>
-          </a:xfrm>
-          <a:prstGeom prst="rect">
-            <a:avLst/>
-          </a:prstGeom>
-          <a:noFill/>
-        </p:spPr>
-        <p:txBody>
-          <a:bodyPr wrap="none" rtlCol="0">
-            <a:spAutoFit/>
-          </a:bodyPr>
-          <a:lstStyle/>
-          <a:p>
-            <a:r>
-              <a:rPr lang="pt-BR" sz="1400" dirty="0"/>
-              <a:t>CEA055 – Estatística e Probabilidade – Prof. Marcos Goulart Lima</a:t>
-            </a:r>
-          </a:p>
-        </p:txBody>
-      </p:sp>
-    </p:spTree>
-    <p:extLst>
-      <p:ext uri="{BB962C8B-B14F-4D97-AF65-F5344CB8AC3E}">
-        <p14:creationId xmlns:p14="http://schemas.microsoft.com/office/powerpoint/2010/main" val="2533743284"/>
-      </p:ext>
-    </p:extLst>
-  </p:cSld>
-  <p:clrMapOvr>
-    <a:masterClrMapping/>
-  </p:clrMapOvr>
-</p:sld>
-</file>
-
-<file path=ppt/slides/slide14.xml><?xml version="1.0" encoding="utf-8"?>
-<p:sld xmlns:a="http://schemas.openxmlformats.org/drawingml/2006/main" xmlns:r="http://schemas.openxmlformats.org/officeDocument/2006/relationships" xmlns:p="http://schemas.openxmlformats.org/presentationml/2006/main">
-  <p:cSld>
-    <p:spTree>
-      <p:nvGrpSpPr>
-        <p:cNvPr id="1" name=""/>
-        <p:cNvGrpSpPr/>
-        <p:nvPr/>
-      </p:nvGrpSpPr>
-      <p:grpSpPr>
-        <a:xfrm>
-          <a:off x="0" y="0"/>
-          <a:ext cx="0" cy="0"/>
-          <a:chOff x="0" y="0"/>
-          <a:chExt cx="0" cy="0"/>
-        </a:xfrm>
-      </p:grpSpPr>
-      <mc:AlternateContent xmlns:mc="http://schemas.openxmlformats.org/markup-compatibility/2006" xmlns:a14="http://schemas.microsoft.com/office/drawing/2010/main">
-        <mc:Choice Requires="a14">
-          <p:sp>
-            <p:nvSpPr>
-              <p:cNvPr id="6" name="CaixaDeTexto 5">
-                <a:extLst>
-                  <a:ext uri="{FF2B5EF4-FFF2-40B4-BE49-F238E27FC236}">
-                    <a16:creationId xmlns:a16="http://schemas.microsoft.com/office/drawing/2014/main" id="{720B10DA-C761-4DEE-8D86-E170E1C2E981}"/>
-                  </a:ext>
-                </a:extLst>
-              </p:cNvPr>
-              <p:cNvSpPr txBox="1"/>
-              <p:nvPr/>
-            </p:nvSpPr>
-            <p:spPr>
-              <a:xfrm>
-                <a:off x="629138" y="644086"/>
-                <a:ext cx="10748061" cy="5626027"/>
-              </a:xfrm>
-              <a:prstGeom prst="rect">
-                <a:avLst/>
-              </a:prstGeom>
-              <a:noFill/>
-            </p:spPr>
-            <p:txBody>
-              <a:bodyPr wrap="square" rtlCol="0">
-                <a:spAutoFit/>
-              </a:bodyPr>
-              <a:lstStyle/>
-              <a:p>
-                <a:pPr>
-                  <a:lnSpc>
-                    <a:spcPct val="150000"/>
-                  </a:lnSpc>
-                </a:pPr>
-                <a:r>
-                  <a:rPr lang="pt-BR" sz="2200" b="1" dirty="0"/>
-                  <a:t>Independência de três eventos</a:t>
-                </a:r>
-              </a:p>
-              <a:p>
-                <a:pPr>
-                  <a:lnSpc>
-                    <a:spcPct val="150000"/>
-                  </a:lnSpc>
-                </a:pPr>
-                <a:endParaRPr lang="pt-BR" sz="2200" dirty="0"/>
-              </a:p>
-              <a:p>
-                <a:pPr>
-                  <a:lnSpc>
-                    <a:spcPct val="150000"/>
-                  </a:lnSpc>
-                </a:pPr>
-                <a:r>
-                  <a:rPr lang="pt-BR" sz="2200" dirty="0"/>
-                  <a:t>Para que os eventos A, B e C sejam independentes, 4 condições precisam valer ao mesmo tempo:</a:t>
-                </a:r>
-              </a:p>
-              <a:p>
-                <a:pPr>
-                  <a:lnSpc>
-                    <a:spcPct val="150000"/>
-                  </a:lnSpc>
-                </a:pPr>
-                <a:endParaRPr lang="pt-BR" sz="2200" dirty="0"/>
-              </a:p>
-              <a:p>
-                <a:pPr marL="342900" indent="-342900">
-                  <a:lnSpc>
-                    <a:spcPct val="150000"/>
-                  </a:lnSpc>
-                  <a:buFont typeface="Arial" panose="020B0604020202020204" pitchFamily="34" charset="0"/>
-                  <a:buChar char="•"/>
-                </a:pPr>
-                <a14:m>
-                  <m:oMath xmlns:m="http://schemas.openxmlformats.org/officeDocument/2006/math">
-                    <m:r>
-                      <a:rPr lang="pt-BR" sz="2200" i="1" dirty="0" smtClean="0">
-                        <a:latin typeface="Cambria Math" panose="02040503050406030204" pitchFamily="18" charset="0"/>
-                      </a:rPr>
-                      <m:t>𝑃</m:t>
-                    </m:r>
-                    <m:r>
-                      <a:rPr lang="pt-BR" sz="2200" i="1" dirty="0" smtClean="0">
-                        <a:latin typeface="Cambria Math" panose="02040503050406030204" pitchFamily="18" charset="0"/>
-                      </a:rPr>
-                      <m:t>(</m:t>
-                    </m:r>
-                    <m:r>
-                      <a:rPr lang="pt-BR" sz="2200" i="1" dirty="0" smtClean="0">
-                        <a:latin typeface="Cambria Math" panose="02040503050406030204" pitchFamily="18" charset="0"/>
-                      </a:rPr>
-                      <m:t>𝐴</m:t>
-                    </m:r>
-                    <m:r>
-                      <a:rPr lang="pt-BR" sz="2200" i="1" dirty="0" smtClean="0">
-                        <a:latin typeface="Cambria Math" panose="02040503050406030204" pitchFamily="18" charset="0"/>
-                      </a:rPr>
-                      <m:t>∩</m:t>
-                    </m:r>
-                    <m:r>
-                      <a:rPr lang="pt-BR" sz="2200" i="1" dirty="0" smtClean="0">
-                        <a:latin typeface="Cambria Math" panose="02040503050406030204" pitchFamily="18" charset="0"/>
-                      </a:rPr>
-                      <m:t>𝐵</m:t>
-                    </m:r>
-                    <m:r>
-                      <a:rPr lang="pt-BR" sz="2200" i="1" dirty="0" smtClean="0">
-                        <a:latin typeface="Cambria Math" panose="02040503050406030204" pitchFamily="18" charset="0"/>
-                      </a:rPr>
-                      <m:t>) = </m:t>
-                    </m:r>
-                    <m:r>
-                      <a:rPr lang="pt-BR" sz="2200" i="1" dirty="0" smtClean="0">
-                        <a:latin typeface="Cambria Math" panose="02040503050406030204" pitchFamily="18" charset="0"/>
-                      </a:rPr>
-                      <m:t>𝑃</m:t>
-                    </m:r>
-                    <m:r>
-                      <a:rPr lang="pt-BR" sz="2200" i="1" dirty="0" smtClean="0">
-                        <a:latin typeface="Cambria Math" panose="02040503050406030204" pitchFamily="18" charset="0"/>
-                      </a:rPr>
-                      <m:t>(</m:t>
-                    </m:r>
-                    <m:r>
-                      <a:rPr lang="pt-BR" sz="2200" i="1" dirty="0" smtClean="0">
-                        <a:latin typeface="Cambria Math" panose="02040503050406030204" pitchFamily="18" charset="0"/>
-                      </a:rPr>
-                      <m:t>𝐴</m:t>
-                    </m:r>
-                    <m:r>
-                      <a:rPr lang="pt-BR" sz="2200" i="1" dirty="0" smtClean="0">
-                        <a:latin typeface="Cambria Math" panose="02040503050406030204" pitchFamily="18" charset="0"/>
-                      </a:rPr>
-                      <m:t>)·</m:t>
-                    </m:r>
-                    <m:r>
-                      <a:rPr lang="pt-BR" sz="2200" i="1" dirty="0" smtClean="0">
-                        <a:latin typeface="Cambria Math" panose="02040503050406030204" pitchFamily="18" charset="0"/>
-                      </a:rPr>
-                      <m:t>𝑃</m:t>
-                    </m:r>
-                    <m:r>
-                      <a:rPr lang="pt-BR" sz="2200" i="1" dirty="0" smtClean="0">
-                        <a:latin typeface="Cambria Math" panose="02040503050406030204" pitchFamily="18" charset="0"/>
-                      </a:rPr>
-                      <m:t>(</m:t>
-                    </m:r>
-                    <m:r>
-                      <a:rPr lang="pt-BR" sz="2200" i="1" dirty="0" smtClean="0">
-                        <a:latin typeface="Cambria Math" panose="02040503050406030204" pitchFamily="18" charset="0"/>
-                      </a:rPr>
-                      <m:t>𝐵</m:t>
-                    </m:r>
-                    <m:r>
-                      <a:rPr lang="pt-BR" sz="2200" i="1" dirty="0" smtClean="0">
-                        <a:latin typeface="Cambria Math" panose="02040503050406030204" pitchFamily="18" charset="0"/>
-                      </a:rPr>
-                      <m:t>)</m:t>
-                    </m:r>
-                  </m:oMath>
-                </a14:m>
-                <a:endParaRPr lang="pt-BR" sz="2200" dirty="0"/>
-              </a:p>
-              <a:p>
-                <a:pPr marL="342900" indent="-342900">
-                  <a:lnSpc>
-                    <a:spcPct val="150000"/>
-                  </a:lnSpc>
-                  <a:buFont typeface="Arial" panose="020B0604020202020204" pitchFamily="34" charset="0"/>
-                  <a:buChar char="•"/>
-                </a:pPr>
-                <a14:m>
-                  <m:oMath xmlns:m="http://schemas.openxmlformats.org/officeDocument/2006/math">
-                    <m:r>
-                      <a:rPr lang="pt-BR" sz="2200" i="1" dirty="0" smtClean="0">
-                        <a:latin typeface="Cambria Math" panose="02040503050406030204" pitchFamily="18" charset="0"/>
-                      </a:rPr>
-                      <m:t>𝑃</m:t>
-                    </m:r>
-                    <m:r>
-                      <a:rPr lang="pt-BR" sz="2200" i="1" dirty="0" smtClean="0">
-                        <a:latin typeface="Cambria Math" panose="02040503050406030204" pitchFamily="18" charset="0"/>
-                      </a:rPr>
-                      <m:t>(</m:t>
-                    </m:r>
-                    <m:r>
-                      <a:rPr lang="pt-BR" sz="2200" i="1" dirty="0" smtClean="0">
-                        <a:latin typeface="Cambria Math" panose="02040503050406030204" pitchFamily="18" charset="0"/>
-                      </a:rPr>
-                      <m:t>𝐴</m:t>
-                    </m:r>
-                    <m:r>
-                      <a:rPr lang="pt-BR" sz="2200" i="1" dirty="0" smtClean="0">
-                        <a:latin typeface="Cambria Math" panose="02040503050406030204" pitchFamily="18" charset="0"/>
-                      </a:rPr>
-                      <m:t>∩</m:t>
-                    </m:r>
-                    <m:r>
-                      <a:rPr lang="pt-BR" sz="2200" i="1" dirty="0" smtClean="0">
-                        <a:latin typeface="Cambria Math" panose="02040503050406030204" pitchFamily="18" charset="0"/>
-                      </a:rPr>
-                      <m:t>𝐶</m:t>
-                    </m:r>
-                    <m:r>
-                      <a:rPr lang="pt-BR" sz="2200" i="1" dirty="0" smtClean="0">
-                        <a:latin typeface="Cambria Math" panose="02040503050406030204" pitchFamily="18" charset="0"/>
-                      </a:rPr>
-                      <m:t>) = </m:t>
-                    </m:r>
-                    <m:r>
-                      <a:rPr lang="pt-BR" sz="2200" i="1" dirty="0" smtClean="0">
-                        <a:latin typeface="Cambria Math" panose="02040503050406030204" pitchFamily="18" charset="0"/>
-                      </a:rPr>
-                      <m:t>𝑃</m:t>
-                    </m:r>
-                    <m:r>
-                      <a:rPr lang="pt-BR" sz="2200" i="1" dirty="0" smtClean="0">
-                        <a:latin typeface="Cambria Math" panose="02040503050406030204" pitchFamily="18" charset="0"/>
-                      </a:rPr>
-                      <m:t>(</m:t>
-                    </m:r>
-                    <m:r>
-                      <a:rPr lang="pt-BR" sz="2200" i="1" dirty="0" smtClean="0">
-                        <a:latin typeface="Cambria Math" panose="02040503050406030204" pitchFamily="18" charset="0"/>
-                      </a:rPr>
-                      <m:t>𝐴</m:t>
-                    </m:r>
-                    <m:r>
-                      <a:rPr lang="pt-BR" sz="2200" i="1" dirty="0" smtClean="0">
-                        <a:latin typeface="Cambria Math" panose="02040503050406030204" pitchFamily="18" charset="0"/>
-                      </a:rPr>
-                      <m:t>)·</m:t>
-                    </m:r>
-                    <m:r>
-                      <a:rPr lang="pt-BR" sz="2200" i="1" dirty="0" smtClean="0">
-                        <a:latin typeface="Cambria Math" panose="02040503050406030204" pitchFamily="18" charset="0"/>
-                      </a:rPr>
-                      <m:t>𝑃</m:t>
-                    </m:r>
-                    <m:r>
-                      <a:rPr lang="pt-BR" sz="2200" i="1" dirty="0" smtClean="0">
-                        <a:latin typeface="Cambria Math" panose="02040503050406030204" pitchFamily="18" charset="0"/>
-                      </a:rPr>
-                      <m:t>(</m:t>
-                    </m:r>
-                    <m:r>
-                      <a:rPr lang="pt-BR" sz="2200" i="1" dirty="0" smtClean="0">
-                        <a:latin typeface="Cambria Math" panose="02040503050406030204" pitchFamily="18" charset="0"/>
-                      </a:rPr>
-                      <m:t>𝐶</m:t>
-                    </m:r>
-                    <m:r>
-                      <a:rPr lang="pt-BR" sz="2200" i="1" dirty="0" smtClean="0">
-                        <a:latin typeface="Cambria Math" panose="02040503050406030204" pitchFamily="18" charset="0"/>
-                      </a:rPr>
-                      <m:t>)</m:t>
-                    </m:r>
-                  </m:oMath>
-                </a14:m>
-                <a:endParaRPr lang="pt-BR" sz="2200" dirty="0"/>
-              </a:p>
-              <a:p>
-                <a:pPr marL="342900" indent="-342900">
-                  <a:lnSpc>
-                    <a:spcPct val="150000"/>
-                  </a:lnSpc>
-                  <a:buFont typeface="Arial" panose="020B0604020202020204" pitchFamily="34" charset="0"/>
-                  <a:buChar char="•"/>
-                </a:pPr>
-                <a14:m>
-                  <m:oMath xmlns:m="http://schemas.openxmlformats.org/officeDocument/2006/math">
-                    <m:r>
-                      <a:rPr lang="pt-BR" sz="2200" i="1" dirty="0" smtClean="0">
-                        <a:latin typeface="Cambria Math" panose="02040503050406030204" pitchFamily="18" charset="0"/>
-                      </a:rPr>
-                      <m:t>𝑃</m:t>
-                    </m:r>
-                    <m:r>
-                      <a:rPr lang="pt-BR" sz="2200" i="1" dirty="0" smtClean="0">
-                        <a:latin typeface="Cambria Math" panose="02040503050406030204" pitchFamily="18" charset="0"/>
-                      </a:rPr>
-                      <m:t>(</m:t>
-                    </m:r>
-                    <m:r>
-                      <a:rPr lang="pt-BR" sz="2200" i="1" dirty="0" smtClean="0">
-                        <a:latin typeface="Cambria Math" panose="02040503050406030204" pitchFamily="18" charset="0"/>
-                      </a:rPr>
-                      <m:t>𝐵</m:t>
-                    </m:r>
-                    <m:r>
-                      <a:rPr lang="pt-BR" sz="2200" i="1" dirty="0" smtClean="0">
-                        <a:latin typeface="Cambria Math" panose="02040503050406030204" pitchFamily="18" charset="0"/>
-                      </a:rPr>
-                      <m:t>∩</m:t>
-                    </m:r>
-                    <m:r>
-                      <a:rPr lang="pt-BR" sz="2200" i="1" dirty="0" smtClean="0">
-                        <a:latin typeface="Cambria Math" panose="02040503050406030204" pitchFamily="18" charset="0"/>
-                      </a:rPr>
-                      <m:t>𝐶</m:t>
-                    </m:r>
-                    <m:r>
-                      <a:rPr lang="pt-BR" sz="2200" i="1" dirty="0" smtClean="0">
-                        <a:latin typeface="Cambria Math" panose="02040503050406030204" pitchFamily="18" charset="0"/>
-                      </a:rPr>
-                      <m:t>) = </m:t>
-                    </m:r>
-                    <m:r>
-                      <a:rPr lang="pt-BR" sz="2200" i="1" dirty="0" smtClean="0">
-                        <a:latin typeface="Cambria Math" panose="02040503050406030204" pitchFamily="18" charset="0"/>
-                      </a:rPr>
-                      <m:t>𝑃</m:t>
-                    </m:r>
-                    <m:r>
-                      <a:rPr lang="pt-BR" sz="2200" i="1" dirty="0" smtClean="0">
-                        <a:latin typeface="Cambria Math" panose="02040503050406030204" pitchFamily="18" charset="0"/>
-                      </a:rPr>
-                      <m:t>(</m:t>
-                    </m:r>
-                    <m:r>
-                      <a:rPr lang="pt-BR" sz="2200" i="1" dirty="0" smtClean="0">
-                        <a:latin typeface="Cambria Math" panose="02040503050406030204" pitchFamily="18" charset="0"/>
-                      </a:rPr>
-                      <m:t>𝐵</m:t>
-                    </m:r>
-                    <m:r>
-                      <a:rPr lang="pt-BR" sz="2200" i="1" dirty="0" smtClean="0">
-                        <a:latin typeface="Cambria Math" panose="02040503050406030204" pitchFamily="18" charset="0"/>
-                      </a:rPr>
-                      <m:t>)·</m:t>
-                    </m:r>
-                    <m:r>
-                      <a:rPr lang="pt-BR" sz="2200" i="1" dirty="0" smtClean="0">
-                        <a:latin typeface="Cambria Math" panose="02040503050406030204" pitchFamily="18" charset="0"/>
-                      </a:rPr>
-                      <m:t>𝑃</m:t>
-                    </m:r>
-                    <m:r>
-                      <a:rPr lang="pt-BR" sz="2200" i="1" dirty="0" smtClean="0">
-                        <a:latin typeface="Cambria Math" panose="02040503050406030204" pitchFamily="18" charset="0"/>
-                      </a:rPr>
-                      <m:t>(</m:t>
-                    </m:r>
-                    <m:r>
-                      <a:rPr lang="pt-BR" sz="2200" i="1" dirty="0" smtClean="0">
-                        <a:latin typeface="Cambria Math" panose="02040503050406030204" pitchFamily="18" charset="0"/>
-                      </a:rPr>
-                      <m:t>𝐶</m:t>
-                    </m:r>
-                    <m:r>
-                      <a:rPr lang="pt-BR" sz="2200" i="1" dirty="0" smtClean="0">
-                        <a:latin typeface="Cambria Math" panose="02040503050406030204" pitchFamily="18" charset="0"/>
-                      </a:rPr>
-                      <m:t>)</m:t>
-                    </m:r>
-                  </m:oMath>
-                </a14:m>
-                <a:endParaRPr lang="pt-BR" sz="2200" dirty="0"/>
-              </a:p>
-              <a:p>
-                <a:pPr marL="342900" indent="-342900">
-                  <a:lnSpc>
-                    <a:spcPct val="150000"/>
-                  </a:lnSpc>
-                  <a:buFont typeface="Arial" panose="020B0604020202020204" pitchFamily="34" charset="0"/>
-                  <a:buChar char="•"/>
-                </a:pPr>
-                <a14:m>
-                  <m:oMath xmlns:m="http://schemas.openxmlformats.org/officeDocument/2006/math">
-                    <m:r>
-                      <a:rPr lang="pt-BR" sz="2200" i="1" dirty="0" smtClean="0">
-                        <a:latin typeface="Cambria Math" panose="02040503050406030204" pitchFamily="18" charset="0"/>
-                      </a:rPr>
-                      <m:t>𝑃</m:t>
-                    </m:r>
-                    <m:r>
-                      <a:rPr lang="pt-BR" sz="2200" i="1" dirty="0" smtClean="0">
-                        <a:latin typeface="Cambria Math" panose="02040503050406030204" pitchFamily="18" charset="0"/>
-                      </a:rPr>
-                      <m:t>(</m:t>
-                    </m:r>
-                    <m:r>
-                      <a:rPr lang="pt-BR" sz="2200" i="1" dirty="0" smtClean="0">
-                        <a:latin typeface="Cambria Math" panose="02040503050406030204" pitchFamily="18" charset="0"/>
-                      </a:rPr>
-                      <m:t>𝐴</m:t>
-                    </m:r>
-                    <m:r>
-                      <a:rPr lang="pt-BR" sz="2200" i="1" dirty="0" smtClean="0">
-                        <a:latin typeface="Cambria Math" panose="02040503050406030204" pitchFamily="18" charset="0"/>
-                      </a:rPr>
-                      <m:t>∩</m:t>
-                    </m:r>
-                    <m:r>
-                      <a:rPr lang="pt-BR" sz="2200" i="1" dirty="0" smtClean="0">
-                        <a:latin typeface="Cambria Math" panose="02040503050406030204" pitchFamily="18" charset="0"/>
-                      </a:rPr>
-                      <m:t>𝐵</m:t>
-                    </m:r>
-                    <m:r>
-                      <a:rPr lang="pt-BR" sz="2200" i="1" dirty="0" smtClean="0">
-                        <a:latin typeface="Cambria Math" panose="02040503050406030204" pitchFamily="18" charset="0"/>
-                      </a:rPr>
-                      <m:t>∩</m:t>
-                    </m:r>
-                    <m:r>
-                      <a:rPr lang="pt-BR" sz="2200" i="1" dirty="0" smtClean="0">
-                        <a:latin typeface="Cambria Math" panose="02040503050406030204" pitchFamily="18" charset="0"/>
-                      </a:rPr>
-                      <m:t>𝐶</m:t>
-                    </m:r>
-                    <m:r>
-                      <a:rPr lang="pt-BR" sz="2200" i="1" dirty="0" smtClean="0">
-                        <a:latin typeface="Cambria Math" panose="02040503050406030204" pitchFamily="18" charset="0"/>
-                      </a:rPr>
-                      <m:t>) = </m:t>
-                    </m:r>
-                    <m:r>
-                      <a:rPr lang="pt-BR" sz="2200" i="1" dirty="0" smtClean="0">
-                        <a:latin typeface="Cambria Math" panose="02040503050406030204" pitchFamily="18" charset="0"/>
-                      </a:rPr>
-                      <m:t>𝑃</m:t>
-                    </m:r>
-                    <m:r>
-                      <a:rPr lang="pt-BR" sz="2200" i="1" dirty="0" smtClean="0">
-                        <a:latin typeface="Cambria Math" panose="02040503050406030204" pitchFamily="18" charset="0"/>
-                      </a:rPr>
-                      <m:t>(</m:t>
-                    </m:r>
-                    <m:r>
-                      <a:rPr lang="pt-BR" sz="2200" i="1" dirty="0" smtClean="0">
-                        <a:latin typeface="Cambria Math" panose="02040503050406030204" pitchFamily="18" charset="0"/>
-                      </a:rPr>
-                      <m:t>𝐴</m:t>
-                    </m:r>
-                    <m:r>
-                      <a:rPr lang="pt-BR" sz="2200" i="1" dirty="0" smtClean="0">
-                        <a:latin typeface="Cambria Math" panose="02040503050406030204" pitchFamily="18" charset="0"/>
-                      </a:rPr>
-                      <m:t>)·</m:t>
-                    </m:r>
-                    <m:r>
-                      <a:rPr lang="pt-BR" sz="2200" i="1" dirty="0" smtClean="0">
-                        <a:latin typeface="Cambria Math" panose="02040503050406030204" pitchFamily="18" charset="0"/>
-                      </a:rPr>
-                      <m:t>𝑃</m:t>
-                    </m:r>
-                    <m:r>
-                      <a:rPr lang="pt-BR" sz="2200" i="1" dirty="0" smtClean="0">
-                        <a:latin typeface="Cambria Math" panose="02040503050406030204" pitchFamily="18" charset="0"/>
-                      </a:rPr>
-                      <m:t>(</m:t>
-                    </m:r>
-                    <m:r>
-                      <a:rPr lang="pt-BR" sz="2200" i="1" dirty="0" smtClean="0">
-                        <a:latin typeface="Cambria Math" panose="02040503050406030204" pitchFamily="18" charset="0"/>
-                      </a:rPr>
-                      <m:t>𝐵</m:t>
-                    </m:r>
-                    <m:r>
-                      <a:rPr lang="pt-BR" sz="2200" i="1" dirty="0" smtClean="0">
-                        <a:latin typeface="Cambria Math" panose="02040503050406030204" pitchFamily="18" charset="0"/>
-                      </a:rPr>
-                      <m:t>)·</m:t>
-                    </m:r>
-                    <m:r>
-                      <a:rPr lang="pt-BR" sz="2200" i="1" dirty="0" smtClean="0">
-                        <a:latin typeface="Cambria Math" panose="02040503050406030204" pitchFamily="18" charset="0"/>
-                      </a:rPr>
-                      <m:t>𝑃</m:t>
-                    </m:r>
-                    <m:r>
-                      <a:rPr lang="pt-BR" sz="2200" i="1" dirty="0" smtClean="0">
-                        <a:latin typeface="Cambria Math" panose="02040503050406030204" pitchFamily="18" charset="0"/>
-                      </a:rPr>
-                      <m:t>(</m:t>
-                    </m:r>
-                    <m:r>
-                      <a:rPr lang="pt-BR" sz="2200" i="1" dirty="0" smtClean="0">
-                        <a:latin typeface="Cambria Math" panose="02040503050406030204" pitchFamily="18" charset="0"/>
-                      </a:rPr>
-                      <m:t>𝐶</m:t>
-                    </m:r>
-                    <m:r>
-                      <a:rPr lang="pt-BR" sz="2200" i="1" dirty="0" smtClean="0">
-                        <a:latin typeface="Cambria Math" panose="02040503050406030204" pitchFamily="18" charset="0"/>
-                      </a:rPr>
-                      <m:t>)</m:t>
-                    </m:r>
-                  </m:oMath>
-                </a14:m>
-                <a:endParaRPr lang="pt-BR" sz="2200" dirty="0"/>
-              </a:p>
-              <a:p>
-                <a:pPr>
-                  <a:lnSpc>
-                    <a:spcPct val="150000"/>
-                  </a:lnSpc>
-                </a:pPr>
-                <a:endParaRPr lang="pt-BR" sz="2200" dirty="0"/>
-              </a:p>
-              <a:p>
-                <a:pPr>
-                  <a:lnSpc>
-                    <a:spcPct val="150000"/>
-                  </a:lnSpc>
-                </a:pPr>
-                <a:r>
-                  <a:rPr lang="pt-BR" sz="2200" dirty="0"/>
-                  <a:t>Se apenas uma dessas condições falhar, os eventos não são independentes.</a:t>
                 </a:r>
               </a:p>
             </p:txBody>
@@ -5886,3292 +9479,7 @@
     </p:spTree>
     <p:extLst>
       <p:ext uri="{BB962C8B-B14F-4D97-AF65-F5344CB8AC3E}">
-        <p14:creationId xmlns:p14="http://schemas.microsoft.com/office/powerpoint/2010/main" val="3046554799"/>
-      </p:ext>
-    </p:extLst>
-  </p:cSld>
-  <p:clrMapOvr>
-    <a:masterClrMapping/>
-  </p:clrMapOvr>
-</p:sld>
-</file>
-
-<file path=ppt/slides/slide15.xml><?xml version="1.0" encoding="utf-8"?>
-<p:sld xmlns:a="http://schemas.openxmlformats.org/drawingml/2006/main" xmlns:r="http://schemas.openxmlformats.org/officeDocument/2006/relationships" xmlns:p="http://schemas.openxmlformats.org/presentationml/2006/main">
-  <p:cSld>
-    <p:spTree>
-      <p:nvGrpSpPr>
-        <p:cNvPr id="1" name=""/>
-        <p:cNvGrpSpPr/>
-        <p:nvPr/>
-      </p:nvGrpSpPr>
-      <p:grpSpPr>
-        <a:xfrm>
-          <a:off x="0" y="0"/>
-          <a:ext cx="0" cy="0"/>
-          <a:chOff x="0" y="0"/>
-          <a:chExt cx="0" cy="0"/>
-        </a:xfrm>
-      </p:grpSpPr>
-      <p:sp>
-        <p:nvSpPr>
-          <p:cNvPr id="6" name="CaixaDeTexto 5">
-            <a:extLst>
-              <a:ext uri="{FF2B5EF4-FFF2-40B4-BE49-F238E27FC236}">
-                <a16:creationId xmlns:a16="http://schemas.microsoft.com/office/drawing/2014/main" id="{720B10DA-C761-4DEE-8D86-E170E1C2E981}"/>
-              </a:ext>
-            </a:extLst>
-          </p:cNvPr>
-          <p:cNvSpPr txBox="1"/>
-          <p:nvPr/>
-        </p:nvSpPr>
-        <p:spPr>
-          <a:xfrm>
-            <a:off x="629138" y="644086"/>
-            <a:ext cx="10748061" cy="5021055"/>
-          </a:xfrm>
-          <a:prstGeom prst="rect">
-            <a:avLst/>
-          </a:prstGeom>
-          <a:noFill/>
-        </p:spPr>
-        <p:txBody>
-          <a:bodyPr wrap="square" rtlCol="0">
-            <a:spAutoFit/>
-          </a:bodyPr>
-          <a:lstStyle/>
-          <a:p>
-            <a:pPr>
-              <a:lnSpc>
-                <a:spcPct val="150000"/>
-              </a:lnSpc>
-            </a:pPr>
-            <a:r>
-              <a:rPr lang="pt-BR" sz="2400" b="1" dirty="0"/>
-              <a:t>Exclusivos não são independentes</a:t>
-            </a:r>
-          </a:p>
-          <a:p>
-            <a:pPr>
-              <a:lnSpc>
-                <a:spcPct val="150000"/>
-              </a:lnSpc>
-            </a:pPr>
-            <a:endParaRPr lang="pt-BR" sz="2400" dirty="0"/>
-          </a:p>
-          <a:p>
-            <a:pPr>
-              <a:lnSpc>
-                <a:spcPct val="150000"/>
-              </a:lnSpc>
-            </a:pPr>
-            <a:r>
-              <a:rPr lang="pt-BR" sz="2400" dirty="0"/>
-              <a:t>Se A e B são mutuamente exclusivos, então A e B são dependentes. </a:t>
-            </a:r>
-          </a:p>
-          <a:p>
-            <a:pPr>
-              <a:lnSpc>
-                <a:spcPct val="150000"/>
-              </a:lnSpc>
-            </a:pPr>
-            <a:r>
-              <a:rPr lang="pt-BR" sz="2400" dirty="0"/>
-              <a:t>Se A ocorre, B não ocorre — a ocorrência de um condiciona a não ocorrência do outro.</a:t>
-            </a:r>
-          </a:p>
-          <a:p>
-            <a:pPr>
-              <a:lnSpc>
-                <a:spcPct val="150000"/>
-              </a:lnSpc>
-            </a:pPr>
-            <a:endParaRPr lang="pt-BR" sz="2400" dirty="0"/>
-          </a:p>
-          <a:p>
-            <a:pPr>
-              <a:lnSpc>
-                <a:spcPct val="150000"/>
-              </a:lnSpc>
-            </a:pPr>
-            <a:r>
-              <a:rPr lang="pt-BR" sz="2400" b="1" dirty="0"/>
-              <a:t>Matematicamente:</a:t>
-            </a:r>
-            <a:r>
-              <a:rPr lang="pt-BR" sz="2400" dirty="0"/>
-              <a:t> se A e B são mutuamente exclusivos, A∩B = ∅, logo P(A∩B) = 0. Mas se P(A) &gt; 0 e P(B) &gt; 0, então P(A)·P(B) &gt; 0. Como P(A∩B) ≠ P(A)·P(B), a definição de independência falha — </a:t>
-            </a:r>
-            <a:r>
-              <a:rPr lang="pt-BR" sz="2400" b="1" dirty="0"/>
-              <a:t>A e B são dependentes</a:t>
-            </a:r>
-            <a:r>
-              <a:rPr lang="pt-BR" sz="2400" dirty="0"/>
-              <a:t>.</a:t>
-            </a:r>
-          </a:p>
-        </p:txBody>
-      </p:sp>
-      <p:sp>
-        <p:nvSpPr>
-          <p:cNvPr id="3" name="CaixaDeTexto 2">
-            <a:extLst>
-              <a:ext uri="{FF2B5EF4-FFF2-40B4-BE49-F238E27FC236}">
-                <a16:creationId xmlns:a16="http://schemas.microsoft.com/office/drawing/2014/main" id="{19131A04-B5D6-4211-8B49-4615DE5797E9}"/>
-              </a:ext>
-            </a:extLst>
-          </p:cNvPr>
-          <p:cNvSpPr txBox="1"/>
-          <p:nvPr/>
-        </p:nvSpPr>
-        <p:spPr>
-          <a:xfrm>
-            <a:off x="361188" y="6463893"/>
-            <a:ext cx="7772400" cy="308152"/>
-          </a:xfrm>
-          <a:prstGeom prst="rect">
-            <a:avLst/>
-          </a:prstGeom>
-          <a:noFill/>
-        </p:spPr>
-        <p:txBody>
-          <a:bodyPr wrap="none" rtlCol="0">
-            <a:spAutoFit/>
-          </a:bodyPr>
-          <a:lstStyle/>
-          <a:p>
-            <a:r>
-              <a:rPr lang="pt-BR" sz="1400" dirty="0"/>
-              <a:t>CEA055 – Estatística e Probabilidade – Prof. Marcos Goulart Lima</a:t>
-            </a:r>
-          </a:p>
-        </p:txBody>
-      </p:sp>
-    </p:spTree>
-    <p:extLst>
-      <p:ext uri="{BB962C8B-B14F-4D97-AF65-F5344CB8AC3E}">
-        <p14:creationId xmlns:p14="http://schemas.microsoft.com/office/powerpoint/2010/main" val="735068485"/>
-      </p:ext>
-    </p:extLst>
-  </p:cSld>
-  <p:clrMapOvr>
-    <a:masterClrMapping/>
-  </p:clrMapOvr>
-</p:sld>
-</file>
-
-<file path=ppt/slides/slide16.xml><?xml version="1.0" encoding="utf-8"?>
-<p:sld xmlns:a="http://schemas.openxmlformats.org/drawingml/2006/main" xmlns:r="http://schemas.openxmlformats.org/officeDocument/2006/relationships" xmlns:p="http://schemas.openxmlformats.org/presentationml/2006/main">
-  <p:cSld>
-    <p:spTree>
-      <p:nvGrpSpPr>
-        <p:cNvPr id="1" name=""/>
-        <p:cNvGrpSpPr/>
-        <p:nvPr/>
-      </p:nvGrpSpPr>
-      <p:grpSpPr>
-        <a:xfrm>
-          <a:off x="0" y="0"/>
-          <a:ext cx="0" cy="0"/>
-          <a:chOff x="0" y="0"/>
-          <a:chExt cx="0" cy="0"/>
-        </a:xfrm>
-      </p:grpSpPr>
-      <mc:AlternateContent xmlns:mc="http://schemas.openxmlformats.org/markup-compatibility/2006">
-        <mc:Choice xmlns:a14="http://schemas.microsoft.com/office/drawing/2010/main" Requires="a14">
-          <p:sp>
-            <p:nvSpPr>
-              <p:cNvPr id="6" name="CaixaDeTexto 5">
-                <a:extLst>
-                  <a:ext uri="{FF2B5EF4-FFF2-40B4-BE49-F238E27FC236}">
-                    <a16:creationId xmlns:a16="http://schemas.microsoft.com/office/drawing/2014/main" id="{720B10DA-C761-4DEE-8D86-E170E1C2E981}"/>
-                  </a:ext>
-                </a:extLst>
-              </p:cNvPr>
-              <p:cNvSpPr txBox="1"/>
-              <p:nvPr/>
-            </p:nvSpPr>
-            <p:spPr>
-              <a:xfrm>
-                <a:off x="629138" y="644086"/>
-                <a:ext cx="10748061" cy="4464620"/>
-              </a:xfrm>
-              <a:prstGeom prst="rect">
-                <a:avLst/>
-              </a:prstGeom>
-              <a:noFill/>
-            </p:spPr>
-            <p:txBody>
-              <a:bodyPr wrap="square" rtlCol="0">
-                <a:spAutoFit/>
-              </a:bodyPr>
-              <a:lstStyle/>
-              <a:p>
-                <a:pPr>
-                  <a:lnSpc>
-                    <a:spcPct val="150000"/>
-                  </a:lnSpc>
-                </a:pPr>
-                <a:r>
-                  <a:rPr lang="pt-BR" sz="2400" b="1" dirty="0"/>
-                  <a:t>Exemplo. </a:t>
-                </a:r>
-                <a:r>
-                  <a:rPr lang="pt-BR" sz="2400" dirty="0"/>
-                  <a:t>Sejam </a:t>
-                </a:r>
-                <a14:m>
-                  <m:oMath xmlns:m="http://schemas.openxmlformats.org/officeDocument/2006/math">
-                    <m:r>
-                      <a:rPr lang="pt-BR" sz="2400" i="1" dirty="0" smtClean="0">
-                        <a:latin typeface="Cambria Math" panose="02040503050406030204" pitchFamily="18" charset="0"/>
-                      </a:rPr>
-                      <m:t>𝑃</m:t>
-                    </m:r>
-                    <m:r>
-                      <a:rPr lang="pt-BR" sz="2400" i="1" dirty="0" smtClean="0">
-                        <a:latin typeface="Cambria Math" panose="02040503050406030204" pitchFamily="18" charset="0"/>
-                      </a:rPr>
-                      <m:t>(</m:t>
-                    </m:r>
-                    <m:r>
-                      <a:rPr lang="pt-BR" sz="2400" i="1" dirty="0" smtClean="0">
-                        <a:latin typeface="Cambria Math" panose="02040503050406030204" pitchFamily="18" charset="0"/>
-                      </a:rPr>
-                      <m:t>𝐴</m:t>
-                    </m:r>
-                    <m:r>
-                      <a:rPr lang="pt-BR" sz="2400" i="1" dirty="0" smtClean="0">
-                        <a:latin typeface="Cambria Math" panose="02040503050406030204" pitchFamily="18" charset="0"/>
-                      </a:rPr>
-                      <m:t>)=0,2</m:t>
-                    </m:r>
-                  </m:oMath>
-                </a14:m>
-                <a:r>
-                  <a:rPr lang="pt-BR" sz="2400" dirty="0"/>
-                  <a:t> e </a:t>
-                </a:r>
-                <a14:m>
-                  <m:oMath xmlns:m="http://schemas.openxmlformats.org/officeDocument/2006/math">
-                    <m:r>
-                      <a:rPr lang="pt-BR" sz="2400" i="1" dirty="0" smtClean="0">
-                        <a:latin typeface="Cambria Math" panose="02040503050406030204" pitchFamily="18" charset="0"/>
-                      </a:rPr>
-                      <m:t>𝑃</m:t>
-                    </m:r>
-                    <m:r>
-                      <a:rPr lang="pt-BR" sz="2400" i="1" dirty="0" smtClean="0">
-                        <a:latin typeface="Cambria Math" panose="02040503050406030204" pitchFamily="18" charset="0"/>
-                      </a:rPr>
-                      <m:t>(</m:t>
-                    </m:r>
-                    <m:r>
-                      <a:rPr lang="pt-BR" sz="2400" i="1" dirty="0" smtClean="0">
-                        <a:latin typeface="Cambria Math" panose="02040503050406030204" pitchFamily="18" charset="0"/>
-                      </a:rPr>
-                      <m:t>𝐴</m:t>
-                    </m:r>
-                    <m:r>
-                      <a:rPr lang="pt-BR" sz="2400" i="1" dirty="0" smtClean="0">
-                        <a:latin typeface="Cambria Math" panose="02040503050406030204" pitchFamily="18" charset="0"/>
-                      </a:rPr>
-                      <m:t>∪</m:t>
-                    </m:r>
-                    <m:r>
-                      <a:rPr lang="pt-BR" sz="2400" i="1" dirty="0" smtClean="0">
-                        <a:latin typeface="Cambria Math" panose="02040503050406030204" pitchFamily="18" charset="0"/>
-                      </a:rPr>
-                      <m:t>𝐵</m:t>
-                    </m:r>
-                    <m:r>
-                      <a:rPr lang="pt-BR" sz="2400" i="1" dirty="0" smtClean="0">
-                        <a:latin typeface="Cambria Math" panose="02040503050406030204" pitchFamily="18" charset="0"/>
-                      </a:rPr>
-                      <m:t>)=0,6</m:t>
-                    </m:r>
-                  </m:oMath>
-                </a14:m>
-                <a:r>
-                  <a:rPr lang="pt-BR" sz="2400" dirty="0"/>
-                  <a:t>. Calcule P(B), supondo A e B:</a:t>
-                </a:r>
-              </a:p>
-              <a:p>
-                <a:pPr>
-                  <a:lnSpc>
-                    <a:spcPct val="150000"/>
-                  </a:lnSpc>
-                </a:pPr>
-                <a:r>
-                  <a:rPr lang="pt-BR" sz="2400" dirty="0"/>
-                  <a:t>a) mutuamente exclusivos;</a:t>
-                </a:r>
-              </a:p>
-              <a:p>
-                <a:pPr>
-                  <a:lnSpc>
-                    <a:spcPct val="150000"/>
-                  </a:lnSpc>
-                </a:pPr>
-                <a:r>
-                  <a:rPr lang="pt-BR" sz="2400" dirty="0"/>
-                  <a:t>b) independentes.</a:t>
-                </a:r>
-              </a:p>
-              <a:p>
-                <a:pPr>
-                  <a:lnSpc>
-                    <a:spcPct val="150000"/>
-                  </a:lnSpc>
-                </a:pPr>
-                <a:endParaRPr lang="pt-BR" sz="2400" dirty="0"/>
-              </a:p>
-              <a:p>
-                <a:pPr>
-                  <a:lnSpc>
-                    <a:spcPct val="150000"/>
-                  </a:lnSpc>
-                </a:pPr>
-                <a:r>
-                  <a:rPr lang="pt-BR" sz="2400" dirty="0"/>
-                  <a:t>Resposta:</a:t>
-                </a:r>
-              </a:p>
-              <a:p>
-                <a:pPr>
-                  <a:lnSpc>
-                    <a:spcPct val="150000"/>
-                  </a:lnSpc>
-                </a:pPr>
-                <a:r>
-                  <a:rPr lang="pt-BR" sz="2400" dirty="0"/>
-                  <a:t>a) Se mutuamente exclusivos: P(A∪B) = P(A) + P(B) ⟹ 0,6 = 0,2 + P(B) ⟹ P(B) = 0,4.</a:t>
-                </a:r>
-              </a:p>
-              <a:p>
-                <a:pPr>
-                  <a:lnSpc>
-                    <a:spcPct val="150000"/>
-                  </a:lnSpc>
-                </a:pPr>
-                <a:r>
-                  <a:rPr lang="pt-BR" sz="2400" dirty="0"/>
-                  <a:t>b) Se independentes: P(A∪B) = P(A) + P(B) − P(A)·P(B) ⟹ 0,6 = 0,2 + P(B) − 0,2·P(B) </a:t>
-                </a:r>
-              </a:p>
-              <a:p>
-                <a:pPr>
-                  <a:lnSpc>
-                    <a:spcPct val="150000"/>
-                  </a:lnSpc>
-                </a:pPr>
-                <a:r>
-                  <a:rPr lang="pt-BR" sz="2400" dirty="0"/>
-                  <a:t>⟹ P(B) = 0,5.</a:t>
-                </a:r>
-              </a:p>
-            </p:txBody>
-          </p:sp>
-        </mc:Choice>
-        <mc:Fallback>
-          <p:sp>
-            <p:nvSpPr>
-              <p:cNvPr id="6" name="CaixaDeTexto 5">
-                <a:extLst>
-                  <a:ext uri="{FF2B5EF4-FFF2-40B4-BE49-F238E27FC236}">
-                    <a16:creationId xmlns:a16="http://schemas.microsoft.com/office/drawing/2014/main" id="{720B10DA-C761-4DEE-8D86-E170E1C2E981}"/>
-                  </a:ext>
-                </a:extLst>
-              </p:cNvPr>
-              <p:cNvSpPr txBox="1">
-                <a:spLocks noRot="1" noChangeAspect="1" noMove="1" noResize="1" noEditPoints="1" noAdjustHandles="1" noChangeArrowheads="1" noChangeShapeType="1" noTextEdit="1"/>
-              </p:cNvSpPr>
-              <p:nvPr/>
-            </p:nvSpPr>
-            <p:spPr>
-              <a:xfrm>
-                <a:off x="629138" y="644086"/>
-                <a:ext cx="10748061" cy="4464620"/>
-              </a:xfrm>
-              <a:prstGeom prst="rect">
-                <a:avLst/>
-              </a:prstGeom>
-              <a:blipFill>
-                <a:blip r:embed="rId2"/>
-                <a:stretch>
-                  <a:fillRect l="-851" b="-2322"/>
-                </a:stretch>
-              </a:blipFill>
-            </p:spPr>
-            <p:txBody>
-              <a:bodyPr/>
-              <a:lstStyle/>
-              <a:p>
-                <a:r>
-                  <a:rPr lang="pt-BR">
-                    <a:noFill/>
-                  </a:rPr>
-                  <a:t> </a:t>
-                </a:r>
-              </a:p>
-            </p:txBody>
-          </p:sp>
-        </mc:Fallback>
-      </mc:AlternateContent>
-      <p:sp>
-        <p:nvSpPr>
-          <p:cNvPr id="3" name="CaixaDeTexto 2">
-            <a:extLst>
-              <a:ext uri="{FF2B5EF4-FFF2-40B4-BE49-F238E27FC236}">
-                <a16:creationId xmlns:a16="http://schemas.microsoft.com/office/drawing/2014/main" id="{19131A04-B5D6-4211-8B49-4615DE5797E9}"/>
-              </a:ext>
-            </a:extLst>
-          </p:cNvPr>
-          <p:cNvSpPr txBox="1"/>
-          <p:nvPr/>
-        </p:nvSpPr>
-        <p:spPr>
-          <a:xfrm>
-            <a:off x="361188" y="6463893"/>
-            <a:ext cx="7772400" cy="308152"/>
-          </a:xfrm>
-          <a:prstGeom prst="rect">
-            <a:avLst/>
-          </a:prstGeom>
-          <a:noFill/>
-        </p:spPr>
-        <p:txBody>
-          <a:bodyPr wrap="none" rtlCol="0">
-            <a:spAutoFit/>
-          </a:bodyPr>
-          <a:lstStyle/>
-          <a:p>
-            <a:r>
-              <a:rPr lang="pt-BR" sz="1400" dirty="0"/>
-              <a:t>CEA055 – Estatística e Probabilidade – Prof. Marcos Goulart Lima</a:t>
-            </a:r>
-          </a:p>
-        </p:txBody>
-      </p:sp>
-    </p:spTree>
-    <p:extLst>
-      <p:ext uri="{BB962C8B-B14F-4D97-AF65-F5344CB8AC3E}">
-        <p14:creationId xmlns:p14="http://schemas.microsoft.com/office/powerpoint/2010/main" val="2730708802"/>
-      </p:ext>
-    </p:extLst>
-  </p:cSld>
-  <p:clrMapOvr>
-    <a:masterClrMapping/>
-  </p:clrMapOvr>
-</p:sld>
-</file>
-
-<file path=ppt/slides/slide17.xml><?xml version="1.0" encoding="utf-8"?>
-<p:sld xmlns:a="http://schemas.openxmlformats.org/drawingml/2006/main" xmlns:r="http://schemas.openxmlformats.org/officeDocument/2006/relationships" xmlns:p="http://schemas.openxmlformats.org/presentationml/2006/main">
-  <p:cSld>
-    <p:spTree>
-      <p:nvGrpSpPr>
-        <p:cNvPr id="1" name=""/>
-        <p:cNvGrpSpPr/>
-        <p:nvPr/>
-      </p:nvGrpSpPr>
-      <p:grpSpPr>
-        <a:xfrm>
-          <a:off x="0" y="0"/>
-          <a:ext cx="0" cy="0"/>
-          <a:chOff x="0" y="0"/>
-          <a:chExt cx="0" cy="0"/>
-        </a:xfrm>
-      </p:grpSpPr>
-      <mc:AlternateContent xmlns:mc="http://schemas.openxmlformats.org/markup-compatibility/2006">
-        <mc:Choice xmlns:a14="http://schemas.microsoft.com/office/drawing/2010/main" Requires="a14">
-          <p:sp>
-            <p:nvSpPr>
-              <p:cNvPr id="6" name="CaixaDeTexto 5">
-                <a:extLst>
-                  <a:ext uri="{FF2B5EF4-FFF2-40B4-BE49-F238E27FC236}">
-                    <a16:creationId xmlns:a16="http://schemas.microsoft.com/office/drawing/2014/main" id="{720B10DA-C761-4DEE-8D86-E170E1C2E981}"/>
-                  </a:ext>
-                </a:extLst>
-              </p:cNvPr>
-              <p:cNvSpPr txBox="1"/>
-              <p:nvPr/>
-            </p:nvSpPr>
-            <p:spPr>
-              <a:xfrm>
-                <a:off x="629138" y="644086"/>
-                <a:ext cx="10748061" cy="4996432"/>
-              </a:xfrm>
-              <a:prstGeom prst="rect">
-                <a:avLst/>
-              </a:prstGeom>
-              <a:noFill/>
-            </p:spPr>
-            <p:txBody>
-              <a:bodyPr wrap="square" rtlCol="0">
-                <a:spAutoFit/>
-              </a:bodyPr>
-              <a:lstStyle/>
-              <a:p>
-                <a:pPr>
-                  <a:lnSpc>
-                    <a:spcPct val="150000"/>
-                  </a:lnSpc>
-                </a:pPr>
-                <a:r>
-                  <a:rPr lang="pt-BR" sz="2200" b="1" dirty="0"/>
-                  <a:t>Exemplo. </a:t>
-                </a:r>
-                <a:r>
-                  <a:rPr lang="pt-BR" sz="2200" dirty="0"/>
-                  <a:t>Suponha que P(homem vivo em 30 anos) = 2/5; P(mulher viva em 30 anos) = 2/3. Os eventos são independentes. Calcule a probabilidade de que, daqui a 30 anos:</a:t>
-                </a:r>
-              </a:p>
-              <a:p>
-                <a:pPr>
-                  <a:lnSpc>
-                    <a:spcPct val="150000"/>
-                  </a:lnSpc>
-                </a:pPr>
-                <a:r>
-                  <a:rPr lang="pt-BR" sz="2200" dirty="0"/>
-                  <a:t>a) ambos estejam vivos</a:t>
-                </a:r>
-              </a:p>
-              <a:p>
-                <a:pPr>
-                  <a:lnSpc>
-                    <a:spcPct val="150000"/>
-                  </a:lnSpc>
-                </a:pPr>
-                <a:r>
-                  <a:rPr lang="pt-BR" sz="2200" dirty="0"/>
-                  <a:t>b) só o homem esteja vivo</a:t>
-                </a:r>
-              </a:p>
-              <a:p>
-                <a:pPr>
-                  <a:lnSpc>
-                    <a:spcPct val="150000"/>
-                  </a:lnSpc>
-                </a:pPr>
-                <a:r>
-                  <a:rPr lang="pt-BR" sz="2200" dirty="0"/>
-                  <a:t>c) só a mulher esteja viva</a:t>
-                </a:r>
-              </a:p>
-              <a:p>
-                <a:pPr>
-                  <a:lnSpc>
-                    <a:spcPct val="150000"/>
-                  </a:lnSpc>
-                </a:pPr>
-                <a:r>
-                  <a:rPr lang="pt-BR" sz="2200" dirty="0"/>
-                  <a:t>d) nenhum esteja vivo</a:t>
-                </a:r>
-              </a:p>
-              <a:p>
-                <a:pPr>
-                  <a:lnSpc>
-                    <a:spcPct val="150000"/>
-                  </a:lnSpc>
-                </a:pPr>
-                <a:r>
-                  <a:rPr lang="pt-BR" sz="2200" dirty="0"/>
-                  <a:t>e) pelo menos um esteja vivo</a:t>
-                </a:r>
-              </a:p>
-              <a:p>
-                <a:pPr>
-                  <a:lnSpc>
-                    <a:spcPct val="150000"/>
-                  </a:lnSpc>
-                </a:pPr>
-                <a:r>
-                  <a:rPr lang="pt-BR" sz="2200" dirty="0"/>
-                  <a:t>Resposta:</a:t>
-                </a:r>
-              </a:p>
-              <a:p>
-                <a:pPr>
-                  <a:lnSpc>
-                    <a:spcPct val="150000"/>
-                  </a:lnSpc>
-                </a:pPr>
-                <a:r>
-                  <a:rPr lang="pt-BR" sz="2200" dirty="0"/>
-                  <a:t>a) </a:t>
-                </a:r>
-                <a14:m>
-                  <m:oMath xmlns:m="http://schemas.openxmlformats.org/officeDocument/2006/math">
-                    <m:f>
-                      <m:fPr>
-                        <m:ctrlPr>
-                          <a:rPr lang="pt-BR" sz="2200" i="1" dirty="0" smtClean="0">
-                            <a:latin typeface="Cambria Math" panose="02040503050406030204" pitchFamily="18" charset="0"/>
-                          </a:rPr>
-                        </m:ctrlPr>
-                      </m:fPr>
-                      <m:num>
-                        <m:r>
-                          <a:rPr lang="pt-BR" sz="2200" i="1" dirty="0" smtClean="0">
-                            <a:latin typeface="Cambria Math" panose="02040503050406030204" pitchFamily="18" charset="0"/>
-                          </a:rPr>
-                          <m:t>2</m:t>
-                        </m:r>
-                      </m:num>
-                      <m:den>
-                        <m:r>
-                          <a:rPr lang="pt-BR" sz="2200" i="1" dirty="0" smtClean="0">
-                            <a:latin typeface="Cambria Math" panose="02040503050406030204" pitchFamily="18" charset="0"/>
-                          </a:rPr>
-                          <m:t>5</m:t>
-                        </m:r>
-                      </m:den>
-                    </m:f>
-                    <m:r>
-                      <a:rPr lang="pt-BR" sz="2200" i="1" dirty="0" smtClean="0">
-                        <a:latin typeface="Cambria Math" panose="02040503050406030204" pitchFamily="18" charset="0"/>
-                      </a:rPr>
-                      <m:t>·</m:t>
-                    </m:r>
-                    <m:f>
-                      <m:fPr>
-                        <m:ctrlPr>
-                          <a:rPr lang="pt-BR" sz="2200" i="1" dirty="0" smtClean="0">
-                            <a:latin typeface="Cambria Math" panose="02040503050406030204" pitchFamily="18" charset="0"/>
-                          </a:rPr>
-                        </m:ctrlPr>
-                      </m:fPr>
-                      <m:num>
-                        <m:r>
-                          <a:rPr lang="pt-BR" sz="2200" i="1" dirty="0" smtClean="0">
-                            <a:latin typeface="Cambria Math" panose="02040503050406030204" pitchFamily="18" charset="0"/>
-                          </a:rPr>
-                          <m:t>2</m:t>
-                        </m:r>
-                      </m:num>
-                      <m:den>
-                        <m:r>
-                          <a:rPr lang="pt-BR" sz="2200" i="1" dirty="0" smtClean="0">
-                            <a:latin typeface="Cambria Math" panose="02040503050406030204" pitchFamily="18" charset="0"/>
-                          </a:rPr>
-                          <m:t>3</m:t>
-                        </m:r>
-                      </m:den>
-                    </m:f>
-                    <m:r>
-                      <a:rPr lang="pt-BR" sz="2200" i="1" dirty="0" smtClean="0">
-                        <a:latin typeface="Cambria Math" panose="02040503050406030204" pitchFamily="18" charset="0"/>
-                      </a:rPr>
-                      <m:t>=</m:t>
-                    </m:r>
-                    <m:f>
-                      <m:fPr>
-                        <m:ctrlPr>
-                          <a:rPr lang="pt-BR" sz="2200" i="1" dirty="0" smtClean="0">
-                            <a:latin typeface="Cambria Math" panose="02040503050406030204" pitchFamily="18" charset="0"/>
-                          </a:rPr>
-                        </m:ctrlPr>
-                      </m:fPr>
-                      <m:num>
-                        <m:r>
-                          <a:rPr lang="pt-BR" sz="2200" i="1" dirty="0" smtClean="0">
-                            <a:latin typeface="Cambria Math" panose="02040503050406030204" pitchFamily="18" charset="0"/>
-                          </a:rPr>
-                          <m:t>4</m:t>
-                        </m:r>
-                      </m:num>
-                      <m:den>
-                        <m:r>
-                          <a:rPr lang="pt-BR" sz="2200" i="1" dirty="0" smtClean="0">
-                            <a:latin typeface="Cambria Math" panose="02040503050406030204" pitchFamily="18" charset="0"/>
-                          </a:rPr>
-                          <m:t>15</m:t>
-                        </m:r>
-                      </m:den>
-                    </m:f>
-                    <m:r>
-                      <a:rPr lang="pt-BR" sz="2200" i="1" dirty="0" smtClean="0">
-                        <a:latin typeface="Cambria Math" panose="02040503050406030204" pitchFamily="18" charset="0"/>
-                      </a:rPr>
-                      <m:t>, </m:t>
-                    </m:r>
-                    <m:r>
-                      <a:rPr lang="pt-BR" sz="2200" b="0" i="1" dirty="0" smtClean="0">
-                        <a:latin typeface="Cambria Math" panose="02040503050406030204" pitchFamily="18" charset="0"/>
-                      </a:rPr>
-                      <m:t> </m:t>
-                    </m:r>
-                    <m:r>
-                      <a:rPr lang="pt-BR" sz="2200" i="1" dirty="0" smtClean="0">
-                        <a:latin typeface="Cambria Math" panose="02040503050406030204" pitchFamily="18" charset="0"/>
-                      </a:rPr>
-                      <m:t>𝑏</m:t>
-                    </m:r>
-                    <m:r>
-                      <a:rPr lang="pt-BR" sz="2200" i="1" dirty="0" smtClean="0">
-                        <a:latin typeface="Cambria Math" panose="02040503050406030204" pitchFamily="18" charset="0"/>
-                      </a:rPr>
-                      <m:t>)</m:t>
-                    </m:r>
-                    <m:f>
-                      <m:fPr>
-                        <m:ctrlPr>
-                          <a:rPr lang="pt-BR" sz="2200" i="1" dirty="0" smtClean="0">
-                            <a:latin typeface="Cambria Math" panose="02040503050406030204" pitchFamily="18" charset="0"/>
-                          </a:rPr>
-                        </m:ctrlPr>
-                      </m:fPr>
-                      <m:num>
-                        <m:r>
-                          <a:rPr lang="pt-BR" sz="2200" i="1" dirty="0" smtClean="0">
-                            <a:latin typeface="Cambria Math" panose="02040503050406030204" pitchFamily="18" charset="0"/>
-                          </a:rPr>
-                          <m:t>2</m:t>
-                        </m:r>
-                      </m:num>
-                      <m:den>
-                        <m:r>
-                          <a:rPr lang="pt-BR" sz="2200" i="1" dirty="0" smtClean="0">
-                            <a:latin typeface="Cambria Math" panose="02040503050406030204" pitchFamily="18" charset="0"/>
-                          </a:rPr>
-                          <m:t>5</m:t>
-                        </m:r>
-                      </m:den>
-                    </m:f>
-                    <m:r>
-                      <a:rPr lang="pt-BR" sz="2200" i="1" dirty="0" smtClean="0">
-                        <a:latin typeface="Cambria Math" panose="02040503050406030204" pitchFamily="18" charset="0"/>
-                      </a:rPr>
-                      <m:t> ·</m:t>
-                    </m:r>
-                    <m:f>
-                      <m:fPr>
-                        <m:ctrlPr>
-                          <a:rPr lang="pt-BR" sz="2200" i="1" dirty="0" smtClean="0">
-                            <a:latin typeface="Cambria Math" panose="02040503050406030204" pitchFamily="18" charset="0"/>
-                          </a:rPr>
-                        </m:ctrlPr>
-                      </m:fPr>
-                      <m:num>
-                        <m:r>
-                          <a:rPr lang="pt-BR" sz="2200" i="1" dirty="0" smtClean="0">
-                            <a:latin typeface="Cambria Math" panose="02040503050406030204" pitchFamily="18" charset="0"/>
-                          </a:rPr>
-                          <m:t>1</m:t>
-                        </m:r>
-                      </m:num>
-                      <m:den>
-                        <m:r>
-                          <a:rPr lang="pt-BR" sz="2200" i="1" dirty="0" smtClean="0">
-                            <a:latin typeface="Cambria Math" panose="02040503050406030204" pitchFamily="18" charset="0"/>
-                          </a:rPr>
-                          <m:t>3</m:t>
-                        </m:r>
-                      </m:den>
-                    </m:f>
-                    <m:r>
-                      <a:rPr lang="pt-BR" sz="2200" i="1" dirty="0" smtClean="0">
-                        <a:latin typeface="Cambria Math" panose="02040503050406030204" pitchFamily="18" charset="0"/>
-                      </a:rPr>
-                      <m:t> =</m:t>
-                    </m:r>
-                    <m:f>
-                      <m:fPr>
-                        <m:ctrlPr>
-                          <a:rPr lang="pt-BR" sz="2200" i="1" dirty="0" smtClean="0">
-                            <a:latin typeface="Cambria Math" panose="02040503050406030204" pitchFamily="18" charset="0"/>
-                          </a:rPr>
-                        </m:ctrlPr>
-                      </m:fPr>
-                      <m:num>
-                        <m:r>
-                          <a:rPr lang="pt-BR" sz="2200" i="1" dirty="0" smtClean="0">
-                            <a:latin typeface="Cambria Math" panose="02040503050406030204" pitchFamily="18" charset="0"/>
-                          </a:rPr>
-                          <m:t>2</m:t>
-                        </m:r>
-                      </m:num>
-                      <m:den>
-                        <m:r>
-                          <a:rPr lang="pt-BR" sz="2200" i="1" dirty="0" smtClean="0">
-                            <a:latin typeface="Cambria Math" panose="02040503050406030204" pitchFamily="18" charset="0"/>
-                          </a:rPr>
-                          <m:t>15</m:t>
-                        </m:r>
-                      </m:den>
-                    </m:f>
-                    <m:r>
-                      <a:rPr lang="pt-BR" sz="2200" i="1" dirty="0" smtClean="0">
-                        <a:latin typeface="Cambria Math" panose="02040503050406030204" pitchFamily="18" charset="0"/>
-                      </a:rPr>
-                      <m:t>, </m:t>
-                    </m:r>
-                    <m:r>
-                      <a:rPr lang="pt-BR" sz="2200" b="0" i="1" dirty="0" smtClean="0">
-                        <a:latin typeface="Cambria Math" panose="02040503050406030204" pitchFamily="18" charset="0"/>
-                      </a:rPr>
-                      <m:t> </m:t>
-                    </m:r>
-                    <m:r>
-                      <a:rPr lang="pt-BR" sz="2200" i="1" dirty="0" smtClean="0">
-                        <a:latin typeface="Cambria Math" panose="02040503050406030204" pitchFamily="18" charset="0"/>
-                      </a:rPr>
-                      <m:t>𝑐</m:t>
-                    </m:r>
-                    <m:r>
-                      <a:rPr lang="pt-BR" sz="2200" i="1" dirty="0" smtClean="0">
-                        <a:latin typeface="Cambria Math" panose="02040503050406030204" pitchFamily="18" charset="0"/>
-                      </a:rPr>
-                      <m:t>)</m:t>
-                    </m:r>
-                    <m:f>
-                      <m:fPr>
-                        <m:ctrlPr>
-                          <a:rPr lang="pt-BR" sz="2200" i="1" dirty="0" smtClean="0">
-                            <a:latin typeface="Cambria Math" panose="02040503050406030204" pitchFamily="18" charset="0"/>
-                          </a:rPr>
-                        </m:ctrlPr>
-                      </m:fPr>
-                      <m:num>
-                        <m:r>
-                          <a:rPr lang="pt-BR" sz="2200" i="1" dirty="0" smtClean="0">
-                            <a:latin typeface="Cambria Math" panose="02040503050406030204" pitchFamily="18" charset="0"/>
-                          </a:rPr>
-                          <m:t>3</m:t>
-                        </m:r>
-                      </m:num>
-                      <m:den>
-                        <m:r>
-                          <a:rPr lang="pt-BR" sz="2200" i="1" dirty="0" smtClean="0">
-                            <a:latin typeface="Cambria Math" panose="02040503050406030204" pitchFamily="18" charset="0"/>
-                          </a:rPr>
-                          <m:t>5</m:t>
-                        </m:r>
-                      </m:den>
-                    </m:f>
-                    <m:r>
-                      <a:rPr lang="pt-BR" sz="2200" i="1" dirty="0" smtClean="0">
-                        <a:latin typeface="Cambria Math" panose="02040503050406030204" pitchFamily="18" charset="0"/>
-                      </a:rPr>
-                      <m:t> ·</m:t>
-                    </m:r>
-                    <m:f>
-                      <m:fPr>
-                        <m:ctrlPr>
-                          <a:rPr lang="pt-BR" sz="2200" i="1" dirty="0" smtClean="0">
-                            <a:latin typeface="Cambria Math" panose="02040503050406030204" pitchFamily="18" charset="0"/>
-                          </a:rPr>
-                        </m:ctrlPr>
-                      </m:fPr>
-                      <m:num>
-                        <m:r>
-                          <a:rPr lang="pt-BR" sz="2200" i="1" dirty="0" smtClean="0">
-                            <a:latin typeface="Cambria Math" panose="02040503050406030204" pitchFamily="18" charset="0"/>
-                          </a:rPr>
-                          <m:t>2</m:t>
-                        </m:r>
-                      </m:num>
-                      <m:den>
-                        <m:r>
-                          <a:rPr lang="pt-BR" sz="2200" i="1" dirty="0" smtClean="0">
-                            <a:latin typeface="Cambria Math" panose="02040503050406030204" pitchFamily="18" charset="0"/>
-                          </a:rPr>
-                          <m:t>3</m:t>
-                        </m:r>
-                      </m:den>
-                    </m:f>
-                    <m:r>
-                      <a:rPr lang="pt-BR" sz="2200" i="1" dirty="0" smtClean="0">
-                        <a:latin typeface="Cambria Math" panose="02040503050406030204" pitchFamily="18" charset="0"/>
-                      </a:rPr>
-                      <m:t> =</m:t>
-                    </m:r>
-                    <m:f>
-                      <m:fPr>
-                        <m:ctrlPr>
-                          <a:rPr lang="pt-BR" sz="2200" i="1" dirty="0" smtClean="0">
-                            <a:latin typeface="Cambria Math" panose="02040503050406030204" pitchFamily="18" charset="0"/>
-                          </a:rPr>
-                        </m:ctrlPr>
-                      </m:fPr>
-                      <m:num>
-                        <m:r>
-                          <a:rPr lang="pt-BR" sz="2200" i="1" dirty="0" smtClean="0">
-                            <a:latin typeface="Cambria Math" panose="02040503050406030204" pitchFamily="18" charset="0"/>
-                          </a:rPr>
-                          <m:t>2</m:t>
-                        </m:r>
-                      </m:num>
-                      <m:den>
-                        <m:r>
-                          <a:rPr lang="pt-BR" sz="2200" i="1" dirty="0" smtClean="0">
-                            <a:latin typeface="Cambria Math" panose="02040503050406030204" pitchFamily="18" charset="0"/>
-                          </a:rPr>
-                          <m:t>5</m:t>
-                        </m:r>
-                      </m:den>
-                    </m:f>
-                    <m:r>
-                      <a:rPr lang="pt-BR" sz="2200" i="1" dirty="0" smtClean="0">
-                        <a:latin typeface="Cambria Math" panose="02040503050406030204" pitchFamily="18" charset="0"/>
-                      </a:rPr>
-                      <m:t>, </m:t>
-                    </m:r>
-                    <m:r>
-                      <a:rPr lang="pt-BR" sz="2200" b="0" i="1" dirty="0" smtClean="0">
-                        <a:latin typeface="Cambria Math" panose="02040503050406030204" pitchFamily="18" charset="0"/>
-                      </a:rPr>
-                      <m:t> </m:t>
-                    </m:r>
-                    <m:r>
-                      <a:rPr lang="pt-BR" sz="2200" i="1" dirty="0" smtClean="0">
-                        <a:latin typeface="Cambria Math" panose="02040503050406030204" pitchFamily="18" charset="0"/>
-                      </a:rPr>
-                      <m:t>𝑑</m:t>
-                    </m:r>
-                    <m:r>
-                      <a:rPr lang="pt-BR" sz="2200" i="1" dirty="0" smtClean="0">
-                        <a:latin typeface="Cambria Math" panose="02040503050406030204" pitchFamily="18" charset="0"/>
-                      </a:rPr>
-                      <m:t>)</m:t>
-                    </m:r>
-                    <m:f>
-                      <m:fPr>
-                        <m:ctrlPr>
-                          <a:rPr lang="pt-BR" sz="2200" i="1" dirty="0" smtClean="0">
-                            <a:latin typeface="Cambria Math" panose="02040503050406030204" pitchFamily="18" charset="0"/>
-                          </a:rPr>
-                        </m:ctrlPr>
-                      </m:fPr>
-                      <m:num>
-                        <m:r>
-                          <a:rPr lang="pt-BR" sz="2200" i="1" dirty="0" smtClean="0">
-                            <a:latin typeface="Cambria Math" panose="02040503050406030204" pitchFamily="18" charset="0"/>
-                          </a:rPr>
-                          <m:t>3</m:t>
-                        </m:r>
-                      </m:num>
-                      <m:den>
-                        <m:r>
-                          <a:rPr lang="pt-BR" sz="2200" i="1" dirty="0" smtClean="0">
-                            <a:latin typeface="Cambria Math" panose="02040503050406030204" pitchFamily="18" charset="0"/>
-                          </a:rPr>
-                          <m:t>5</m:t>
-                        </m:r>
-                      </m:den>
-                    </m:f>
-                    <m:r>
-                      <a:rPr lang="pt-BR" sz="2200" i="1" dirty="0" smtClean="0">
-                        <a:latin typeface="Cambria Math" panose="02040503050406030204" pitchFamily="18" charset="0"/>
-                      </a:rPr>
-                      <m:t> ·</m:t>
-                    </m:r>
-                    <m:f>
-                      <m:fPr>
-                        <m:ctrlPr>
-                          <a:rPr lang="pt-BR" sz="2200" i="1" dirty="0" smtClean="0">
-                            <a:latin typeface="Cambria Math" panose="02040503050406030204" pitchFamily="18" charset="0"/>
-                          </a:rPr>
-                        </m:ctrlPr>
-                      </m:fPr>
-                      <m:num>
-                        <m:r>
-                          <a:rPr lang="pt-BR" sz="2200" i="1" dirty="0" smtClean="0">
-                            <a:latin typeface="Cambria Math" panose="02040503050406030204" pitchFamily="18" charset="0"/>
-                          </a:rPr>
-                          <m:t>1</m:t>
-                        </m:r>
-                      </m:num>
-                      <m:den>
-                        <m:r>
-                          <a:rPr lang="pt-BR" sz="2200" i="1" dirty="0" smtClean="0">
-                            <a:latin typeface="Cambria Math" panose="02040503050406030204" pitchFamily="18" charset="0"/>
-                          </a:rPr>
-                          <m:t>3</m:t>
-                        </m:r>
-                      </m:den>
-                    </m:f>
-                    <m:r>
-                      <a:rPr lang="pt-BR" sz="2200" i="1" dirty="0" smtClean="0">
-                        <a:latin typeface="Cambria Math" panose="02040503050406030204" pitchFamily="18" charset="0"/>
-                      </a:rPr>
-                      <m:t> =</m:t>
-                    </m:r>
-                    <m:f>
-                      <m:fPr>
-                        <m:ctrlPr>
-                          <a:rPr lang="pt-BR" sz="2200" i="1" dirty="0" smtClean="0">
-                            <a:latin typeface="Cambria Math" panose="02040503050406030204" pitchFamily="18" charset="0"/>
-                          </a:rPr>
-                        </m:ctrlPr>
-                      </m:fPr>
-                      <m:num>
-                        <m:r>
-                          <a:rPr lang="pt-BR" sz="2200" i="1" dirty="0" smtClean="0">
-                            <a:latin typeface="Cambria Math" panose="02040503050406030204" pitchFamily="18" charset="0"/>
-                          </a:rPr>
-                          <m:t>1</m:t>
-                        </m:r>
-                      </m:num>
-                      <m:den>
-                        <m:r>
-                          <a:rPr lang="pt-BR" sz="2200" i="1" dirty="0" smtClean="0">
-                            <a:latin typeface="Cambria Math" panose="02040503050406030204" pitchFamily="18" charset="0"/>
-                          </a:rPr>
-                          <m:t>5</m:t>
-                        </m:r>
-                      </m:den>
-                    </m:f>
-                    <m:r>
-                      <a:rPr lang="pt-BR" sz="2200" i="1" dirty="0" smtClean="0">
-                        <a:latin typeface="Cambria Math" panose="02040503050406030204" pitchFamily="18" charset="0"/>
-                      </a:rPr>
-                      <m:t>, </m:t>
-                    </m:r>
-                    <m:r>
-                      <a:rPr lang="pt-BR" sz="2200" i="1" dirty="0" smtClean="0">
-                        <a:latin typeface="Cambria Math" panose="02040503050406030204" pitchFamily="18" charset="0"/>
-                      </a:rPr>
-                      <m:t>𝑒</m:t>
-                    </m:r>
-                    <m:r>
-                      <a:rPr lang="pt-BR" sz="2200" i="1" dirty="0" smtClean="0">
-                        <a:latin typeface="Cambria Math" panose="02040503050406030204" pitchFamily="18" charset="0"/>
-                      </a:rPr>
-                      <m:t>) 1 −</m:t>
-                    </m:r>
-                    <m:f>
-                      <m:fPr>
-                        <m:ctrlPr>
-                          <a:rPr lang="pt-BR" sz="2200" i="1" dirty="0" smtClean="0">
-                            <a:latin typeface="Cambria Math" panose="02040503050406030204" pitchFamily="18" charset="0"/>
-                          </a:rPr>
-                        </m:ctrlPr>
-                      </m:fPr>
-                      <m:num>
-                        <m:r>
-                          <a:rPr lang="pt-BR" sz="2200" i="1" dirty="0" smtClean="0">
-                            <a:latin typeface="Cambria Math" panose="02040503050406030204" pitchFamily="18" charset="0"/>
-                          </a:rPr>
-                          <m:t>1</m:t>
-                        </m:r>
-                      </m:num>
-                      <m:den>
-                        <m:r>
-                          <a:rPr lang="pt-BR" sz="2200" i="1" dirty="0" smtClean="0">
-                            <a:latin typeface="Cambria Math" panose="02040503050406030204" pitchFamily="18" charset="0"/>
-                          </a:rPr>
-                          <m:t>5</m:t>
-                        </m:r>
-                      </m:den>
-                    </m:f>
-                    <m:r>
-                      <a:rPr lang="pt-BR" sz="2200" i="1" dirty="0" smtClean="0">
-                        <a:latin typeface="Cambria Math" panose="02040503050406030204" pitchFamily="18" charset="0"/>
-                      </a:rPr>
-                      <m:t>=</m:t>
-                    </m:r>
-                    <m:f>
-                      <m:fPr>
-                        <m:ctrlPr>
-                          <a:rPr lang="pt-BR" sz="2200" i="1" dirty="0" smtClean="0">
-                            <a:latin typeface="Cambria Math" panose="02040503050406030204" pitchFamily="18" charset="0"/>
-                          </a:rPr>
-                        </m:ctrlPr>
-                      </m:fPr>
-                      <m:num>
-                        <m:r>
-                          <a:rPr lang="pt-BR" sz="2200" i="1" dirty="0" smtClean="0">
-                            <a:latin typeface="Cambria Math" panose="02040503050406030204" pitchFamily="18" charset="0"/>
-                          </a:rPr>
-                          <m:t>4</m:t>
-                        </m:r>
-                      </m:num>
-                      <m:den>
-                        <m:r>
-                          <a:rPr lang="pt-BR" sz="2200" i="1" dirty="0" smtClean="0">
-                            <a:latin typeface="Cambria Math" panose="02040503050406030204" pitchFamily="18" charset="0"/>
-                          </a:rPr>
-                          <m:t>5</m:t>
-                        </m:r>
-                      </m:den>
-                    </m:f>
-                  </m:oMath>
-                </a14:m>
-                <a:endParaRPr lang="pt-BR" sz="2200" dirty="0"/>
-              </a:p>
-            </p:txBody>
-          </p:sp>
-        </mc:Choice>
-        <mc:Fallback>
-          <p:sp>
-            <p:nvSpPr>
-              <p:cNvPr id="6" name="CaixaDeTexto 5">
-                <a:extLst>
-                  <a:ext uri="{FF2B5EF4-FFF2-40B4-BE49-F238E27FC236}">
-                    <a16:creationId xmlns:a16="http://schemas.microsoft.com/office/drawing/2014/main" id="{720B10DA-C761-4DEE-8D86-E170E1C2E981}"/>
-                  </a:ext>
-                </a:extLst>
-              </p:cNvPr>
-              <p:cNvSpPr txBox="1">
-                <a:spLocks noRot="1" noChangeAspect="1" noMove="1" noResize="1" noEditPoints="1" noAdjustHandles="1" noChangeArrowheads="1" noChangeShapeType="1" noTextEdit="1"/>
-              </p:cNvSpPr>
-              <p:nvPr/>
-            </p:nvSpPr>
-            <p:spPr>
-              <a:xfrm>
-                <a:off x="629138" y="644086"/>
-                <a:ext cx="10748061" cy="4996432"/>
-              </a:xfrm>
-              <a:prstGeom prst="rect">
-                <a:avLst/>
-              </a:prstGeom>
-              <a:blipFill>
-                <a:blip r:embed="rId2"/>
-                <a:stretch>
-                  <a:fillRect l="-737"/>
-                </a:stretch>
-              </a:blipFill>
-            </p:spPr>
-            <p:txBody>
-              <a:bodyPr/>
-              <a:lstStyle/>
-              <a:p>
-                <a:r>
-                  <a:rPr lang="pt-BR">
-                    <a:noFill/>
-                  </a:rPr>
-                  <a:t> </a:t>
-                </a:r>
-              </a:p>
-            </p:txBody>
-          </p:sp>
-        </mc:Fallback>
-      </mc:AlternateContent>
-      <p:sp>
-        <p:nvSpPr>
-          <p:cNvPr id="3" name="CaixaDeTexto 2">
-            <a:extLst>
-              <a:ext uri="{FF2B5EF4-FFF2-40B4-BE49-F238E27FC236}">
-                <a16:creationId xmlns:a16="http://schemas.microsoft.com/office/drawing/2014/main" id="{19131A04-B5D6-4211-8B49-4615DE5797E9}"/>
-              </a:ext>
-            </a:extLst>
-          </p:cNvPr>
-          <p:cNvSpPr txBox="1"/>
-          <p:nvPr/>
-        </p:nvSpPr>
-        <p:spPr>
-          <a:xfrm>
-            <a:off x="361188" y="6463893"/>
-            <a:ext cx="7772400" cy="308152"/>
-          </a:xfrm>
-          <a:prstGeom prst="rect">
-            <a:avLst/>
-          </a:prstGeom>
-          <a:noFill/>
-        </p:spPr>
-        <p:txBody>
-          <a:bodyPr wrap="none" rtlCol="0">
-            <a:spAutoFit/>
-          </a:bodyPr>
-          <a:lstStyle/>
-          <a:p>
-            <a:r>
-              <a:rPr lang="pt-BR" sz="1400" dirty="0"/>
-              <a:t>CEA055 – Estatística e Probabilidade – Prof. Marcos Goulart Lima</a:t>
-            </a:r>
-          </a:p>
-        </p:txBody>
-      </p:sp>
-    </p:spTree>
-    <p:extLst>
-      <p:ext uri="{BB962C8B-B14F-4D97-AF65-F5344CB8AC3E}">
-        <p14:creationId xmlns:p14="http://schemas.microsoft.com/office/powerpoint/2010/main" val="4266711625"/>
-      </p:ext>
-    </p:extLst>
-  </p:cSld>
-  <p:clrMapOvr>
-    <a:masterClrMapping/>
-  </p:clrMapOvr>
-</p:sld>
-</file>
-
-<file path=ppt/slides/slide19.xml><?xml version="1.0" encoding="utf-8"?>
-<p:sld xmlns:a="http://schemas.openxmlformats.org/drawingml/2006/main" xmlns:r="http://schemas.openxmlformats.org/officeDocument/2006/relationships" xmlns:p="http://schemas.openxmlformats.org/presentationml/2006/main">
-  <p:cSld>
-    <p:spTree>
-      <p:nvGrpSpPr>
-        <p:cNvPr id="1" name=""/>
-        <p:cNvGrpSpPr/>
-        <p:nvPr/>
-      </p:nvGrpSpPr>
-      <p:grpSpPr>
-        <a:xfrm>
-          <a:off x="0" y="0"/>
-          <a:ext cx="0" cy="0"/>
-          <a:chOff x="0" y="0"/>
-          <a:chExt cx="0" cy="0"/>
-        </a:xfrm>
-      </p:grpSpPr>
-      <p:sp>
-        <p:nvSpPr>
-          <p:cNvPr id="6" name="CaixaDeTexto 5">
-            <a:extLst>
-              <a:ext uri="{FF2B5EF4-FFF2-40B4-BE49-F238E27FC236}">
-                <a16:creationId xmlns:a16="http://schemas.microsoft.com/office/drawing/2014/main" id="{720B10DA-C761-4DEE-8D86-E170E1C2E981}"/>
-              </a:ext>
-            </a:extLst>
-          </p:cNvPr>
-          <p:cNvSpPr txBox="1"/>
-          <p:nvPr/>
-        </p:nvSpPr>
-        <p:spPr>
-          <a:xfrm>
-            <a:off x="812018" y="771308"/>
-            <a:ext cx="10067277" cy="3257174"/>
-          </a:xfrm>
-          <a:prstGeom prst="rect">
-            <a:avLst/>
-          </a:prstGeom>
-          <a:noFill/>
-        </p:spPr>
-        <p:txBody>
-          <a:bodyPr wrap="square" rtlCol="0">
-            <a:spAutoFit/>
-          </a:bodyPr>
-          <a:lstStyle/>
-          <a:p>
-            <a:pPr>
-              <a:lnSpc>
-                <a:spcPct val="150000"/>
-              </a:lnSpc>
-            </a:pPr>
-            <a:r>
-              <a:rPr sz="2800" b="1" dirty="0" err="1"/>
-              <a:t>Leitura</a:t>
-            </a:r>
-            <a:r>
-              <a:rPr sz="2800" b="1" dirty="0"/>
-              <a:t> </a:t>
-            </a:r>
-            <a:r>
-              <a:rPr sz="2800" b="1" dirty="0" err="1"/>
-              <a:t>recomendada</a:t>
-            </a:r>
-            <a:r>
-              <a:rPr sz="2800" b="1" dirty="0"/>
-              <a:t>:</a:t>
-            </a:r>
-            <a:endParaRPr lang="pt-BR" sz="2800" dirty="0"/>
-          </a:p>
-          <a:p>
-            <a:pPr>
-              <a:lnSpc>
-                <a:spcPct val="150000"/>
-              </a:lnSpc>
-            </a:pPr>
-            <a:r>
-              <a:rPr sz="2800" b="0" dirty="0" err="1"/>
-              <a:t>Bussab</a:t>
-            </a:r>
-            <a:r>
-              <a:rPr sz="2800" b="0" dirty="0"/>
-              <a:t> &amp; </a:t>
-            </a:r>
-            <a:r>
-              <a:rPr sz="2800" b="0" dirty="0" err="1"/>
-              <a:t>Morettin</a:t>
-            </a:r>
-            <a:r>
-              <a:rPr sz="2800" b="0" dirty="0"/>
-              <a:t> — Cap. 5 (5.3)</a:t>
-            </a:r>
-          </a:p>
-          <a:p>
-            <a:pPr>
-              <a:lnSpc>
-                <a:spcPct val="150000"/>
-              </a:lnSpc>
-            </a:pPr>
-            <a:r>
-              <a:rPr sz="2800" b="0" dirty="0"/>
-              <a:t>Montgomery &amp; </a:t>
-            </a:r>
-            <a:r>
-              <a:rPr sz="2800" b="0" dirty="0" err="1"/>
-              <a:t>Runger</a:t>
-            </a:r>
-            <a:r>
-              <a:rPr sz="2800" b="0" dirty="0"/>
-              <a:t> — Cap. 2 (2.5, 2.7)</a:t>
-            </a:r>
-          </a:p>
-          <a:p>
-            <a:pPr>
-              <a:lnSpc>
-                <a:spcPct val="150000"/>
-              </a:lnSpc>
-            </a:pPr>
-            <a:r>
-              <a:rPr sz="2800" b="0" dirty="0" err="1"/>
-              <a:t>Magalhães</a:t>
-            </a:r>
-            <a:r>
-              <a:rPr sz="2800" b="0" dirty="0"/>
-              <a:t> &amp; Lima — Cap. 2 (2.2)</a:t>
-            </a:r>
-          </a:p>
-          <a:p>
-            <a:pPr>
-              <a:lnSpc>
-                <a:spcPct val="150000"/>
-              </a:lnSpc>
-            </a:pPr>
-            <a:r>
-              <a:rPr sz="2800" b="0" dirty="0" err="1"/>
-              <a:t>Morettin</a:t>
-            </a:r>
-            <a:r>
-              <a:rPr sz="2800" b="0" dirty="0"/>
-              <a:t> — Cap. 2 (2.4, 2.5)</a:t>
-            </a:r>
-          </a:p>
-        </p:txBody>
-      </p:sp>
-      <p:sp>
-        <p:nvSpPr>
-          <p:cNvPr id="3" name="CaixaDeTexto 2">
-            <a:extLst>
-              <a:ext uri="{FF2B5EF4-FFF2-40B4-BE49-F238E27FC236}">
-                <a16:creationId xmlns:a16="http://schemas.microsoft.com/office/drawing/2014/main" id="{19131A04-B5D6-4211-8B49-4615DE5797E9}"/>
-              </a:ext>
-            </a:extLst>
-          </p:cNvPr>
-          <p:cNvSpPr txBox="1"/>
-          <p:nvPr/>
-        </p:nvSpPr>
-        <p:spPr>
-          <a:xfrm>
-            <a:off x="361188" y="6463893"/>
-            <a:ext cx="7772400" cy="308152"/>
-          </a:xfrm>
-          <a:prstGeom prst="rect">
-            <a:avLst/>
-          </a:prstGeom>
-          <a:noFill/>
-        </p:spPr>
-        <p:txBody>
-          <a:bodyPr wrap="none" rtlCol="0">
-            <a:spAutoFit/>
-          </a:bodyPr>
-          <a:lstStyle/>
-          <a:p>
-            <a:r>
-              <a:rPr lang="pt-BR" sz="1400" dirty="0"/>
-              <a:t>CEA055 – Estatística e Probabilidade – Prof. Marcos Goulart Lima</a:t>
-            </a:r>
-          </a:p>
-        </p:txBody>
-      </p:sp>
-    </p:spTree>
-    <p:extLst>
-      <p:ext uri="{BB962C8B-B14F-4D97-AF65-F5344CB8AC3E}">
-        <p14:creationId xmlns:p14="http://schemas.microsoft.com/office/powerpoint/2010/main" val="3831451249"/>
-      </p:ext>
-    </p:extLst>
-  </p:cSld>
-  <p:clrMapOvr>
-    <a:masterClrMapping/>
-  </p:clrMapOvr>
-</p:sld>
-</file>
-
-<file path=ppt/slides/slide2.xml><?xml version="1.0" encoding="utf-8"?>
-<p:sld xmlns:a="http://schemas.openxmlformats.org/drawingml/2006/main" xmlns:r="http://schemas.openxmlformats.org/officeDocument/2006/relationships" xmlns:p="http://schemas.openxmlformats.org/presentationml/2006/main">
-  <p:cSld>
-    <p:spTree>
-      <p:nvGrpSpPr>
-        <p:cNvPr id="1" name=""/>
-        <p:cNvGrpSpPr/>
-        <p:nvPr/>
-      </p:nvGrpSpPr>
-      <p:grpSpPr>
-        <a:xfrm>
-          <a:off x="0" y="0"/>
-          <a:ext cx="0" cy="0"/>
-          <a:chOff x="0" y="0"/>
-          <a:chExt cx="0" cy="0"/>
-        </a:xfrm>
-      </p:grpSpPr>
-      <p:sp>
-        <p:nvSpPr>
-          <p:cNvPr id="6" name="CaixaDeTexto 5">
-            <a:extLst>
-              <a:ext uri="{FF2B5EF4-FFF2-40B4-BE49-F238E27FC236}">
-                <a16:creationId xmlns:a16="http://schemas.microsoft.com/office/drawing/2014/main" id="{720B10DA-C761-4DEE-8D86-E170E1C2E981}"/>
-              </a:ext>
-            </a:extLst>
-          </p:cNvPr>
-          <p:cNvSpPr txBox="1"/>
-          <p:nvPr/>
-        </p:nvSpPr>
-        <p:spPr>
-          <a:xfrm>
-            <a:off x="629138" y="602580"/>
-            <a:ext cx="10748061" cy="5579861"/>
-          </a:xfrm>
-          <a:prstGeom prst="rect">
-            <a:avLst/>
-          </a:prstGeom>
-          <a:noFill/>
-        </p:spPr>
-        <p:txBody>
-          <a:bodyPr wrap="square" rtlCol="0">
-            <a:spAutoFit/>
-          </a:bodyPr>
-          <a:lstStyle/>
-          <a:p>
-            <a:r>
-              <a:rPr lang="pt-BR" sz="2400" b="1" dirty="0"/>
-              <a:t>Exemplo. </a:t>
-            </a:r>
-            <a:r>
-              <a:rPr lang="pt-BR" sz="2400" dirty="0"/>
-              <a:t>Uma universidade tem a seguinte distribuição de alunos, segundo o sexo e a escolha de curso:</a:t>
-            </a:r>
-          </a:p>
-          <a:p>
-            <a:endParaRPr lang="pt-BR" sz="2400" dirty="0"/>
-          </a:p>
-          <a:p>
-            <a:endParaRPr lang="pt-BR" sz="2400" dirty="0"/>
-          </a:p>
-          <a:p>
-            <a:endParaRPr lang="pt-BR" sz="2400" dirty="0"/>
-          </a:p>
-          <a:p>
-            <a:endParaRPr lang="pt-BR" sz="2400" dirty="0"/>
-          </a:p>
-          <a:p>
-            <a:endParaRPr lang="pt-BR" sz="2400" dirty="0"/>
-          </a:p>
-          <a:p>
-            <a:endParaRPr lang="pt-BR" sz="2400" dirty="0"/>
-          </a:p>
-          <a:p>
-            <a:pPr>
-              <a:lnSpc>
-                <a:spcPct val="150000"/>
-              </a:lnSpc>
-            </a:pPr>
-            <a:r>
-              <a:rPr lang="pt-BR" sz="2400" dirty="0"/>
-              <a:t>a) </a:t>
-            </a:r>
-            <a:r>
-              <a:rPr lang="pt-BR" sz="2200" dirty="0"/>
-              <a:t>Escolhido ao acaso um aluno do curso de Matemática Aplicada, qual a probabilidade de ele ser homem? E de ser mulher?</a:t>
-            </a:r>
-          </a:p>
-          <a:p>
-            <a:pPr>
-              <a:lnSpc>
-                <a:spcPct val="150000"/>
-              </a:lnSpc>
-            </a:pPr>
-            <a:r>
-              <a:rPr lang="pt-BR" sz="2200" dirty="0"/>
-              <a:t>b) Escolhido ao acaso um homem dentre todos os alunos da universidade, qual a probabilidade de ele ser do curso de Matemática Aplicada? E escolhida ao acaso uma mulher dentre todas, qual a probabilidade de ela ser do curso de </a:t>
-            </a:r>
-            <a:r>
-              <a:rPr lang="pt-BR" sz="2200" dirty="0" err="1"/>
-              <a:t>MatemáticaAplicada</a:t>
-            </a:r>
-            <a:r>
-              <a:rPr lang="pt-BR" sz="2200" dirty="0"/>
-              <a:t>?</a:t>
-            </a:r>
-          </a:p>
-        </p:txBody>
-      </p:sp>
-      <p:sp>
-        <p:nvSpPr>
-          <p:cNvPr id="3" name="CaixaDeTexto 2">
-            <a:extLst>
-              <a:ext uri="{FF2B5EF4-FFF2-40B4-BE49-F238E27FC236}">
-                <a16:creationId xmlns:a16="http://schemas.microsoft.com/office/drawing/2014/main" id="{19131A04-B5D6-4211-8B49-4615DE5797E9}"/>
-              </a:ext>
-            </a:extLst>
-          </p:cNvPr>
-          <p:cNvSpPr txBox="1"/>
-          <p:nvPr/>
-        </p:nvSpPr>
-        <p:spPr>
-          <a:xfrm>
-            <a:off x="361188" y="6463893"/>
-            <a:ext cx="7772400" cy="308152"/>
-          </a:xfrm>
-          <a:prstGeom prst="rect">
-            <a:avLst/>
-          </a:prstGeom>
-          <a:noFill/>
-        </p:spPr>
-        <p:txBody>
-          <a:bodyPr wrap="none" rtlCol="0">
-            <a:spAutoFit/>
-          </a:bodyPr>
-          <a:lstStyle/>
-          <a:p>
-            <a:r>
-              <a:rPr lang="pt-BR" sz="1400" dirty="0"/>
-              <a:t>CEA055 – Estatística e Probabilidade – Prof. Marcos Goulart Lima</a:t>
-            </a:r>
-          </a:p>
-        </p:txBody>
-      </p:sp>
-      <p:pic>
-        <p:nvPicPr>
-          <p:cNvPr id="4" name="Imagem 3">
-            <a:extLst>
-              <a:ext uri="{FF2B5EF4-FFF2-40B4-BE49-F238E27FC236}">
-                <a16:creationId xmlns:a16="http://schemas.microsoft.com/office/drawing/2014/main" id="{45BF1ABE-2001-ED4B-7383-480A8D7B71D1}"/>
-              </a:ext>
-            </a:extLst>
-          </p:cNvPr>
-          <p:cNvPicPr>
-            <a:picLocks noChangeAspect="1"/>
-          </p:cNvPicPr>
-          <p:nvPr/>
-        </p:nvPicPr>
-        <p:blipFill>
-          <a:blip r:embed="rId2"/>
-          <a:stretch>
-            <a:fillRect/>
-          </a:stretch>
-        </p:blipFill>
-        <p:spPr>
-          <a:xfrm>
-            <a:off x="3807856" y="1156394"/>
-            <a:ext cx="6099305" cy="2462344"/>
-          </a:xfrm>
-          <a:prstGeom prst="rect">
-            <a:avLst/>
-          </a:prstGeom>
-        </p:spPr>
-      </p:pic>
-    </p:spTree>
-    <p:extLst>
-      <p:ext uri="{BB962C8B-B14F-4D97-AF65-F5344CB8AC3E}">
-        <p14:creationId xmlns:p14="http://schemas.microsoft.com/office/powerpoint/2010/main" val="4137224127"/>
-      </p:ext>
-    </p:extLst>
-  </p:cSld>
-  <p:clrMapOvr>
-    <a:masterClrMapping/>
-  </p:clrMapOvr>
-</p:sld>
-</file>
-
-<file path=ppt/slides/slide20.xml><?xml version="1.0" encoding="utf-8"?>
-<p:sld xmlns:a="http://schemas.openxmlformats.org/drawingml/2006/main" xmlns:r="http://schemas.openxmlformats.org/officeDocument/2006/relationships" xmlns:p="http://schemas.openxmlformats.org/presentationml/2006/main">
-  <p:cSld>
-    <p:spTree>
-      <p:nvGrpSpPr>
-        <p:cNvPr id="1" name=""/>
-        <p:cNvGrpSpPr/>
-        <p:nvPr/>
-      </p:nvGrpSpPr>
-      <p:grpSpPr>
-        <a:xfrm>
-          <a:off x="0" y="0"/>
-          <a:ext cx="0" cy="0"/>
-          <a:chOff x="0" y="0"/>
-          <a:chExt cx="0" cy="0"/>
-        </a:xfrm>
-      </p:grpSpPr>
-      <p:sp>
-        <p:nvSpPr>
-          <p:cNvPr id="6" name="CaixaDeTexto 5">
-            <a:extLst>
-              <a:ext uri="{FF2B5EF4-FFF2-40B4-BE49-F238E27FC236}">
-                <a16:creationId xmlns:a16="http://schemas.microsoft.com/office/drawing/2014/main" id="{720B10DA-C761-4DEE-8D86-E170E1C2E981}"/>
-              </a:ext>
-            </a:extLst>
-          </p:cNvPr>
-          <p:cNvSpPr txBox="1"/>
-          <p:nvPr/>
-        </p:nvSpPr>
-        <p:spPr>
-          <a:xfrm>
-            <a:off x="812018" y="771308"/>
-            <a:ext cx="10067277" cy="4549835"/>
-          </a:xfrm>
-          <a:prstGeom prst="rect">
-            <a:avLst/>
-          </a:prstGeom>
-          <a:noFill/>
-        </p:spPr>
-        <p:txBody>
-          <a:bodyPr wrap="square" rtlCol="0">
-            <a:spAutoFit/>
-          </a:bodyPr>
-          <a:lstStyle/>
-          <a:p>
-            <a:pPr>
-              <a:lnSpc>
-                <a:spcPct val="150000"/>
-              </a:lnSpc>
-            </a:pPr>
-            <a:r>
-              <a:rPr sz="2800" b="1" dirty="0" err="1"/>
-              <a:t>Exercícios</a:t>
-            </a:r>
-            <a:r>
-              <a:rPr sz="2800" b="1" dirty="0"/>
-              <a:t> </a:t>
-            </a:r>
-            <a:r>
-              <a:rPr sz="2800" b="1" dirty="0" err="1"/>
-              <a:t>recomendados</a:t>
-            </a:r>
-            <a:r>
-              <a:rPr sz="2800" b="1" dirty="0"/>
-              <a:t>:</a:t>
-            </a:r>
-            <a:endParaRPr lang="pt-BR" sz="2800" dirty="0"/>
-          </a:p>
-          <a:p>
-            <a:pPr>
-              <a:lnSpc>
-                <a:spcPct val="150000"/>
-              </a:lnSpc>
-            </a:pPr>
-            <a:r>
-              <a:rPr sz="2800" b="0" dirty="0" err="1"/>
-              <a:t>Bussab</a:t>
-            </a:r>
-            <a:r>
-              <a:rPr sz="2800" b="0" dirty="0"/>
-              <a:t> &amp; </a:t>
-            </a:r>
-            <a:r>
-              <a:rPr sz="2800" b="0" dirty="0" err="1"/>
-              <a:t>Morettin</a:t>
-            </a:r>
-            <a:r>
-              <a:rPr sz="2800" b="0" dirty="0"/>
-              <a:t>, Cap. 5: </a:t>
-            </a:r>
-            <a:r>
-              <a:rPr sz="2800" b="0" dirty="0" err="1"/>
-              <a:t>Problemas</a:t>
-            </a:r>
-            <a:r>
-              <a:rPr sz="2800" b="0" dirty="0"/>
-              <a:t> 15, 16, 17, 18, 19, 20, 21 e 22</a:t>
-            </a:r>
-          </a:p>
-          <a:p>
-            <a:pPr>
-              <a:lnSpc>
-                <a:spcPct val="150000"/>
-              </a:lnSpc>
-            </a:pPr>
-            <a:r>
-              <a:rPr sz="2800" b="0" dirty="0" err="1"/>
-              <a:t>Magalhães</a:t>
-            </a:r>
-            <a:r>
-              <a:rPr sz="2800" b="0" dirty="0"/>
-              <a:t> &amp; Lima, Cap. 2 (§2.3): </a:t>
-            </a:r>
-            <a:r>
-              <a:rPr sz="2800" b="0" dirty="0" err="1"/>
-              <a:t>Exercícios</a:t>
-            </a:r>
-            <a:r>
-              <a:rPr sz="2800" b="0" dirty="0"/>
-              <a:t> 10, 11, 12, 13, 14, 17, 19, 20, 21 e 22</a:t>
-            </a:r>
-          </a:p>
-          <a:p>
-            <a:pPr>
-              <a:lnSpc>
-                <a:spcPct val="150000"/>
-              </a:lnSpc>
-            </a:pPr>
-            <a:r>
-              <a:rPr sz="2800" b="0" dirty="0"/>
-              <a:t>Montgomery &amp; </a:t>
-            </a:r>
-            <a:r>
-              <a:rPr sz="2800" b="0" dirty="0" err="1"/>
-              <a:t>Runger</a:t>
-            </a:r>
-            <a:r>
-              <a:rPr sz="2800" b="0" dirty="0"/>
-              <a:t>, Cap. 2: </a:t>
-            </a:r>
-            <a:r>
-              <a:rPr sz="2800" b="0" dirty="0" err="1"/>
-              <a:t>Exercícios</a:t>
-            </a:r>
-            <a:r>
-              <a:rPr sz="2800" b="0" dirty="0"/>
-              <a:t> 2.5.1, 2.5.4, 2.5.6, 2.5.9, 2.5.11, 2.7.1, 2.7.2, 2.7.4, 2.7.6 e 2.7.10</a:t>
-            </a:r>
-          </a:p>
-          <a:p>
-            <a:pPr>
-              <a:lnSpc>
-                <a:spcPct val="150000"/>
-              </a:lnSpc>
-            </a:pPr>
-            <a:r>
-              <a:rPr sz="2800" b="0" dirty="0" err="1"/>
-              <a:t>Morettin</a:t>
-            </a:r>
-            <a:r>
-              <a:rPr sz="2800" b="0" dirty="0"/>
-              <a:t>, Cap. 2: </a:t>
-            </a:r>
-            <a:r>
-              <a:rPr sz="2800" b="0" dirty="0" err="1"/>
-              <a:t>Exercício</a:t>
-            </a:r>
-            <a:r>
-              <a:rPr sz="2800" b="0" dirty="0"/>
-              <a:t> 18</a:t>
-            </a:r>
-          </a:p>
-        </p:txBody>
-      </p:sp>
-      <p:sp>
-        <p:nvSpPr>
-          <p:cNvPr id="3" name="CaixaDeTexto 2">
-            <a:extLst>
-              <a:ext uri="{FF2B5EF4-FFF2-40B4-BE49-F238E27FC236}">
-                <a16:creationId xmlns:a16="http://schemas.microsoft.com/office/drawing/2014/main" id="{19131A04-B5D6-4211-8B49-4615DE5797E9}"/>
-              </a:ext>
-            </a:extLst>
-          </p:cNvPr>
-          <p:cNvSpPr txBox="1"/>
-          <p:nvPr/>
-        </p:nvSpPr>
-        <p:spPr>
-          <a:xfrm>
-            <a:off x="361188" y="6463893"/>
-            <a:ext cx="7772400" cy="308152"/>
-          </a:xfrm>
-          <a:prstGeom prst="rect">
-            <a:avLst/>
-          </a:prstGeom>
-          <a:noFill/>
-        </p:spPr>
-        <p:txBody>
-          <a:bodyPr wrap="none" rtlCol="0">
-            <a:spAutoFit/>
-          </a:bodyPr>
-          <a:lstStyle/>
-          <a:p>
-            <a:r>
-              <a:rPr lang="pt-BR" sz="1400" dirty="0"/>
-              <a:t>CEA055 – Estatística e Probabilidade – Prof. Marcos Goulart Lima</a:t>
-            </a:r>
-          </a:p>
-        </p:txBody>
-      </p:sp>
-    </p:spTree>
-    <p:extLst>
-      <p:ext uri="{BB962C8B-B14F-4D97-AF65-F5344CB8AC3E}">
-        <p14:creationId xmlns:p14="http://schemas.microsoft.com/office/powerpoint/2010/main" val="3303928548"/>
-      </p:ext>
-    </p:extLst>
-  </p:cSld>
-  <p:clrMapOvr>
-    <a:masterClrMapping/>
-  </p:clrMapOvr>
-</p:sld>
-</file>
-
-<file path=ppt/slides/slide3.xml><?xml version="1.0" encoding="utf-8"?>
-<p:sld xmlns:a="http://schemas.openxmlformats.org/drawingml/2006/main" xmlns:r="http://schemas.openxmlformats.org/officeDocument/2006/relationships" xmlns:p="http://schemas.openxmlformats.org/presentationml/2006/main">
-  <p:cSld>
-    <p:spTree>
-      <p:nvGrpSpPr>
-        <p:cNvPr id="1" name=""/>
-        <p:cNvGrpSpPr/>
-        <p:nvPr/>
-      </p:nvGrpSpPr>
-      <p:grpSpPr>
-        <a:xfrm>
-          <a:off x="0" y="0"/>
-          <a:ext cx="0" cy="0"/>
-          <a:chOff x="0" y="0"/>
-          <a:chExt cx="0" cy="0"/>
-        </a:xfrm>
-      </p:grpSpPr>
-      <mc:AlternateContent xmlns:mc="http://schemas.openxmlformats.org/markup-compatibility/2006" xmlns:a14="http://schemas.microsoft.com/office/drawing/2010/main">
-        <mc:Choice Requires="a14">
-          <p:sp>
-            <p:nvSpPr>
-              <p:cNvPr id="6" name="CaixaDeTexto 5">
-                <a:extLst>
-                  <a:ext uri="{FF2B5EF4-FFF2-40B4-BE49-F238E27FC236}">
-                    <a16:creationId xmlns:a16="http://schemas.microsoft.com/office/drawing/2014/main" id="{720B10DA-C761-4DEE-8D86-E170E1C2E981}"/>
-                  </a:ext>
-                </a:extLst>
-              </p:cNvPr>
-              <p:cNvSpPr txBox="1"/>
-              <p:nvPr/>
-            </p:nvSpPr>
-            <p:spPr>
-              <a:xfrm>
-                <a:off x="721969" y="652794"/>
-                <a:ext cx="10748061" cy="5143716"/>
-              </a:xfrm>
-              <a:prstGeom prst="rect">
-                <a:avLst/>
-              </a:prstGeom>
-              <a:noFill/>
-            </p:spPr>
-            <p:txBody>
-              <a:bodyPr wrap="square" rtlCol="0">
-                <a:spAutoFit/>
-              </a:bodyPr>
-              <a:lstStyle/>
-              <a:p>
-                <a:pPr>
-                  <a:lnSpc>
-                    <a:spcPct val="150000"/>
-                  </a:lnSpc>
-                </a:pPr>
-                <a:r>
-                  <a:rPr lang="pt-BR" sz="2400" b="1" dirty="0"/>
-                  <a:t>Probabilidade Condicional e Independência</a:t>
-                </a:r>
-              </a:p>
-              <a:p>
-                <a:pPr>
-                  <a:lnSpc>
-                    <a:spcPct val="150000"/>
-                  </a:lnSpc>
-                </a:pPr>
-                <a:r>
-                  <a:rPr lang="pt-BR" sz="2400" dirty="0"/>
-                  <a:t>Para dois eventos quaisquer </a:t>
-                </a:r>
-                <a14:m>
-                  <m:oMath xmlns:m="http://schemas.openxmlformats.org/officeDocument/2006/math">
-                    <m:r>
-                      <a:rPr lang="pt-BR" sz="2400" b="0" i="1" smtClean="0">
-                        <a:latin typeface="Cambria Math" panose="02040503050406030204" pitchFamily="18" charset="0"/>
-                      </a:rPr>
-                      <m:t>𝐴</m:t>
-                    </m:r>
-                  </m:oMath>
-                </a14:m>
-                <a:r>
-                  <a:rPr lang="pt-BR" sz="2400" dirty="0"/>
-                  <a:t> e </a:t>
-                </a:r>
-                <a14:m>
-                  <m:oMath xmlns:m="http://schemas.openxmlformats.org/officeDocument/2006/math">
-                    <m:r>
-                      <a:rPr lang="pt-BR" sz="2400" b="0" i="1" smtClean="0">
-                        <a:latin typeface="Cambria Math" panose="02040503050406030204" pitchFamily="18" charset="0"/>
-                      </a:rPr>
-                      <m:t>𝐵</m:t>
-                    </m:r>
-                  </m:oMath>
-                </a14:m>
-                <a:r>
-                  <a:rPr lang="pt-BR" sz="2400" dirty="0"/>
-                  <a:t>, sendo </a:t>
-                </a:r>
-                <a14:m>
-                  <m:oMath xmlns:m="http://schemas.openxmlformats.org/officeDocument/2006/math">
-                    <m:r>
-                      <a:rPr lang="pt-BR" sz="2400" b="0" i="1" smtClean="0">
-                        <a:latin typeface="Cambria Math" panose="02040503050406030204" pitchFamily="18" charset="0"/>
-                      </a:rPr>
-                      <m:t>𝑃</m:t>
-                    </m:r>
-                    <m:d>
-                      <m:dPr>
-                        <m:ctrlPr>
-                          <a:rPr lang="pt-BR" sz="2400" b="0" i="1" smtClean="0">
-                            <a:latin typeface="Cambria Math" panose="02040503050406030204" pitchFamily="18" charset="0"/>
-                          </a:rPr>
-                        </m:ctrlPr>
-                      </m:dPr>
-                      <m:e>
-                        <m:r>
-                          <a:rPr lang="pt-BR" sz="2400" b="0" i="1" smtClean="0">
-                            <a:latin typeface="Cambria Math" panose="02040503050406030204" pitchFamily="18" charset="0"/>
-                          </a:rPr>
-                          <m:t>𝐵</m:t>
-                        </m:r>
-                      </m:e>
-                    </m:d>
-                    <m:r>
-                      <a:rPr lang="pt-BR" sz="2400" b="0" i="1" smtClean="0">
-                        <a:latin typeface="Cambria Math" panose="02040503050406030204" pitchFamily="18" charset="0"/>
-                      </a:rPr>
-                      <m:t>&gt;0</m:t>
-                    </m:r>
-                  </m:oMath>
-                </a14:m>
-                <a:r>
-                  <a:rPr lang="pt-BR" sz="2400" dirty="0"/>
-                  <a:t>, definimos a probabilidade condicional de </a:t>
-                </a:r>
-                <a14:m>
-                  <m:oMath xmlns:m="http://schemas.openxmlformats.org/officeDocument/2006/math">
-                    <m:r>
-                      <a:rPr lang="pt-BR" sz="2400" b="0" i="1" smtClean="0">
-                        <a:latin typeface="Cambria Math" panose="02040503050406030204" pitchFamily="18" charset="0"/>
-                      </a:rPr>
-                      <m:t>𝐴</m:t>
-                    </m:r>
-                  </m:oMath>
-                </a14:m>
-                <a:r>
-                  <a:rPr lang="pt-BR" sz="2400" dirty="0"/>
-                  <a:t> dado </a:t>
-                </a:r>
-                <a14:m>
-                  <m:oMath xmlns:m="http://schemas.openxmlformats.org/officeDocument/2006/math">
-                    <m:r>
-                      <a:rPr lang="pt-BR" sz="2400" b="0" i="1" smtClean="0">
-                        <a:latin typeface="Cambria Math" panose="02040503050406030204" pitchFamily="18" charset="0"/>
-                      </a:rPr>
-                      <m:t>𝐵</m:t>
-                    </m:r>
-                  </m:oMath>
-                </a14:m>
-                <a:r>
-                  <a:rPr lang="pt-BR" sz="2400" dirty="0"/>
-                  <a:t>, </a:t>
-                </a:r>
-                <a14:m>
-                  <m:oMath xmlns:m="http://schemas.openxmlformats.org/officeDocument/2006/math">
-                    <m:r>
-                      <a:rPr lang="pt-BR" sz="2400" b="0" i="1" smtClean="0">
-                        <a:latin typeface="Cambria Math" panose="02040503050406030204" pitchFamily="18" charset="0"/>
-                      </a:rPr>
-                      <m:t>𝑃</m:t>
-                    </m:r>
-                    <m:r>
-                      <a:rPr lang="pt-BR" sz="2400" b="0" i="1" smtClean="0">
-                        <a:latin typeface="Cambria Math" panose="02040503050406030204" pitchFamily="18" charset="0"/>
-                      </a:rPr>
-                      <m:t>(</m:t>
-                    </m:r>
-                    <m:r>
-                      <a:rPr lang="pt-BR" sz="2400" b="0" i="1" smtClean="0">
-                        <a:latin typeface="Cambria Math" panose="02040503050406030204" pitchFamily="18" charset="0"/>
-                      </a:rPr>
-                      <m:t>𝐴</m:t>
-                    </m:r>
-                    <m:r>
-                      <a:rPr lang="pt-BR" sz="2400" b="0" i="1" smtClean="0">
-                        <a:latin typeface="Cambria Math" panose="02040503050406030204" pitchFamily="18" charset="0"/>
-                      </a:rPr>
-                      <m:t>|</m:t>
-                    </m:r>
-                    <m:r>
-                      <a:rPr lang="pt-BR" sz="2400" b="0" i="1" smtClean="0">
-                        <a:latin typeface="Cambria Math" panose="02040503050406030204" pitchFamily="18" charset="0"/>
-                      </a:rPr>
-                      <m:t>𝐵</m:t>
-                    </m:r>
-                    <m:r>
-                      <a:rPr lang="pt-BR" sz="2400" b="0" i="1" smtClean="0">
-                        <a:latin typeface="Cambria Math" panose="02040503050406030204" pitchFamily="18" charset="0"/>
-                      </a:rPr>
-                      <m:t>)</m:t>
-                    </m:r>
-                  </m:oMath>
-                </a14:m>
-                <a:r>
-                  <a:rPr lang="pt-BR" sz="2400" dirty="0"/>
-                  <a:t>, como</a:t>
-                </a:r>
-              </a:p>
-              <a:p>
-                <a:pPr>
-                  <a:lnSpc>
-                    <a:spcPct val="150000"/>
-                  </a:lnSpc>
-                </a:pPr>
-                <a:endParaRPr lang="pt-BR" sz="2400" dirty="0"/>
-              </a:p>
-              <a:p>
-                <a:pPr>
-                  <a:lnSpc>
-                    <a:spcPct val="150000"/>
-                  </a:lnSpc>
-                </a:pPr>
-                <a14:m>
-                  <m:oMathPara xmlns:m="http://schemas.openxmlformats.org/officeDocument/2006/math">
-                    <m:oMathParaPr>
-                      <m:jc m:val="centerGroup"/>
-                    </m:oMathParaPr>
-                    <m:oMath xmlns:m="http://schemas.openxmlformats.org/officeDocument/2006/math">
-                      <m:r>
-                        <a:rPr lang="pt-BR" sz="2400" b="0" i="1" smtClean="0">
-                          <a:latin typeface="Cambria Math" panose="02040503050406030204" pitchFamily="18" charset="0"/>
-                        </a:rPr>
-                        <m:t>𝑃</m:t>
-                      </m:r>
-                      <m:d>
-                        <m:dPr>
-                          <m:ctrlPr>
-                            <a:rPr lang="pt-BR" sz="2400" b="0" i="1" smtClean="0">
-                              <a:latin typeface="Cambria Math" panose="02040503050406030204" pitchFamily="18" charset="0"/>
-                            </a:rPr>
-                          </m:ctrlPr>
-                        </m:dPr>
-                        <m:e>
-                          <m:r>
-                            <a:rPr lang="pt-BR" sz="2400" b="0" i="1" smtClean="0">
-                              <a:latin typeface="Cambria Math" panose="02040503050406030204" pitchFamily="18" charset="0"/>
-                            </a:rPr>
-                            <m:t>𝐴</m:t>
-                          </m:r>
-                        </m:e>
-                        <m:e>
-                          <m:r>
-                            <a:rPr lang="pt-BR" sz="2400" b="0" i="1" smtClean="0">
-                              <a:latin typeface="Cambria Math" panose="02040503050406030204" pitchFamily="18" charset="0"/>
-                            </a:rPr>
-                            <m:t>𝐵</m:t>
-                          </m:r>
-                        </m:e>
-                      </m:d>
-                      <m:r>
-                        <a:rPr lang="pt-BR" sz="2400" b="0" i="1" smtClean="0">
-                          <a:latin typeface="Cambria Math" panose="02040503050406030204" pitchFamily="18" charset="0"/>
-                        </a:rPr>
-                        <m:t>=</m:t>
-                      </m:r>
-                      <m:f>
-                        <m:fPr>
-                          <m:ctrlPr>
-                            <a:rPr lang="pt-BR" sz="2400" b="0" i="1" smtClean="0">
-                              <a:latin typeface="Cambria Math" panose="02040503050406030204" pitchFamily="18" charset="0"/>
-                            </a:rPr>
-                          </m:ctrlPr>
-                        </m:fPr>
-                        <m:num>
-                          <m:r>
-                            <a:rPr lang="pt-BR" sz="2400" b="0" i="1" smtClean="0">
-                              <a:latin typeface="Cambria Math" panose="02040503050406030204" pitchFamily="18" charset="0"/>
-                            </a:rPr>
-                            <m:t>𝑃</m:t>
-                          </m:r>
-                          <m:d>
-                            <m:dPr>
-                              <m:ctrlPr>
-                                <a:rPr lang="pt-BR" sz="2400" b="0" i="1" smtClean="0">
-                                  <a:latin typeface="Cambria Math" panose="02040503050406030204" pitchFamily="18" charset="0"/>
-                                </a:rPr>
-                              </m:ctrlPr>
-                            </m:dPr>
-                            <m:e>
-                              <m:r>
-                                <a:rPr lang="pt-BR" sz="2400" b="0" i="1" smtClean="0">
-                                  <a:latin typeface="Cambria Math" panose="02040503050406030204" pitchFamily="18" charset="0"/>
-                                </a:rPr>
-                                <m:t>𝐴</m:t>
-                              </m:r>
-                              <m:r>
-                                <a:rPr lang="pt-BR" sz="2400" b="0" i="1" smtClean="0">
-                                  <a:latin typeface="Cambria Math" panose="02040503050406030204" pitchFamily="18" charset="0"/>
-                                </a:rPr>
-                                <m:t>∩</m:t>
-                              </m:r>
-                              <m:r>
-                                <a:rPr lang="pt-BR" sz="2400" b="0" i="1" smtClean="0">
-                                  <a:latin typeface="Cambria Math" panose="02040503050406030204" pitchFamily="18" charset="0"/>
-                                </a:rPr>
-                                <m:t>𝐵</m:t>
-                              </m:r>
-                            </m:e>
-                          </m:d>
-                        </m:num>
-                        <m:den>
-                          <m:r>
-                            <a:rPr lang="pt-BR" sz="2400" b="0" i="1" smtClean="0">
-                              <a:latin typeface="Cambria Math" panose="02040503050406030204" pitchFamily="18" charset="0"/>
-                            </a:rPr>
-                            <m:t>𝑃</m:t>
-                          </m:r>
-                          <m:r>
-                            <a:rPr lang="pt-BR" sz="2400" b="0" i="1" smtClean="0">
-                              <a:latin typeface="Cambria Math" panose="02040503050406030204" pitchFamily="18" charset="0"/>
-                            </a:rPr>
-                            <m:t>(</m:t>
-                          </m:r>
-                          <m:r>
-                            <a:rPr lang="pt-BR" sz="2400" b="0" i="1" smtClean="0">
-                              <a:latin typeface="Cambria Math" panose="02040503050406030204" pitchFamily="18" charset="0"/>
-                            </a:rPr>
-                            <m:t>𝐵</m:t>
-                          </m:r>
-                          <m:r>
-                            <a:rPr lang="pt-BR" sz="2400" b="0" i="1" smtClean="0">
-                              <a:latin typeface="Cambria Math" panose="02040503050406030204" pitchFamily="18" charset="0"/>
-                            </a:rPr>
-                            <m:t>)</m:t>
-                          </m:r>
-                        </m:den>
-                      </m:f>
-                      <m:r>
-                        <a:rPr lang="pt-BR" sz="2400" b="0" i="1" smtClean="0">
-                          <a:latin typeface="Cambria Math" panose="02040503050406030204" pitchFamily="18" charset="0"/>
-                        </a:rPr>
-                        <m:t>.</m:t>
-                      </m:r>
-                    </m:oMath>
-                  </m:oMathPara>
-                </a14:m>
-                <a:endParaRPr lang="pt-BR" sz="2400" b="0" dirty="0"/>
-              </a:p>
-              <a:p>
-                <a:pPr>
-                  <a:lnSpc>
-                    <a:spcPct val="150000"/>
-                  </a:lnSpc>
-                </a:pPr>
-                <a:endParaRPr lang="pt-BR" sz="2400" dirty="0"/>
-              </a:p>
-              <a:p>
-                <a:pPr>
-                  <a:lnSpc>
-                    <a:spcPct val="150000"/>
-                  </a:lnSpc>
-                </a:pPr>
-                <a:r>
-                  <a:rPr lang="pt-BR" sz="2400" dirty="0"/>
-                  <a:t>Observe que da definição podemos extrair a </a:t>
-                </a:r>
-                <a:r>
-                  <a:rPr lang="pt-BR" sz="2400" b="1" dirty="0"/>
-                  <a:t>regra do produto de probabilidades</a:t>
-                </a:r>
-              </a:p>
-              <a:p>
-                <a:pPr>
-                  <a:lnSpc>
-                    <a:spcPct val="150000"/>
-                  </a:lnSpc>
-                </a:pPr>
-                <a14:m>
-                  <m:oMathPara xmlns:m="http://schemas.openxmlformats.org/officeDocument/2006/math">
-                    <m:oMathParaPr>
-                      <m:jc m:val="centerGroup"/>
-                    </m:oMathParaPr>
-                    <m:oMath xmlns:m="http://schemas.openxmlformats.org/officeDocument/2006/math">
-                      <m:r>
-                        <a:rPr lang="pt-BR" sz="2400" i="1">
-                          <a:latin typeface="Cambria Math" panose="02040503050406030204" pitchFamily="18" charset="0"/>
-                        </a:rPr>
-                        <m:t>𝑃</m:t>
-                      </m:r>
-                      <m:d>
-                        <m:dPr>
-                          <m:ctrlPr>
-                            <a:rPr lang="pt-BR" sz="2400" i="1">
-                              <a:latin typeface="Cambria Math" panose="02040503050406030204" pitchFamily="18" charset="0"/>
-                            </a:rPr>
-                          </m:ctrlPr>
-                        </m:dPr>
-                        <m:e>
-                          <m:r>
-                            <a:rPr lang="pt-BR" sz="2400" i="1">
-                              <a:latin typeface="Cambria Math" panose="02040503050406030204" pitchFamily="18" charset="0"/>
-                            </a:rPr>
-                            <m:t>𝐴</m:t>
-                          </m:r>
-                          <m:r>
-                            <a:rPr lang="pt-BR" sz="2400" i="1">
-                              <a:latin typeface="Cambria Math" panose="02040503050406030204" pitchFamily="18" charset="0"/>
-                            </a:rPr>
-                            <m:t>∩</m:t>
-                          </m:r>
-                          <m:r>
-                            <a:rPr lang="pt-BR" sz="2400" i="1">
-                              <a:latin typeface="Cambria Math" panose="02040503050406030204" pitchFamily="18" charset="0"/>
-                            </a:rPr>
-                            <m:t>𝐵</m:t>
-                          </m:r>
-                        </m:e>
-                      </m:d>
-                      <m:r>
-                        <a:rPr lang="pt-BR" sz="2400" b="0" i="1" smtClean="0">
-                          <a:latin typeface="Cambria Math" panose="02040503050406030204" pitchFamily="18" charset="0"/>
-                        </a:rPr>
-                        <m:t>=</m:t>
-                      </m:r>
-                      <m:r>
-                        <a:rPr lang="pt-BR" sz="2400" b="0" i="1" smtClean="0">
-                          <a:latin typeface="Cambria Math" panose="02040503050406030204" pitchFamily="18" charset="0"/>
-                        </a:rPr>
-                        <m:t>𝑃</m:t>
-                      </m:r>
-                      <m:d>
-                        <m:dPr>
-                          <m:ctrlPr>
-                            <a:rPr lang="pt-BR" sz="2400" b="0" i="1" smtClean="0">
-                              <a:latin typeface="Cambria Math" panose="02040503050406030204" pitchFamily="18" charset="0"/>
-                            </a:rPr>
-                          </m:ctrlPr>
-                        </m:dPr>
-                        <m:e>
-                          <m:r>
-                            <a:rPr lang="pt-BR" sz="2400" b="0" i="1" smtClean="0">
-                              <a:latin typeface="Cambria Math" panose="02040503050406030204" pitchFamily="18" charset="0"/>
-                            </a:rPr>
-                            <m:t>𝐵</m:t>
-                          </m:r>
-                        </m:e>
-                      </m:d>
-                      <m:r>
-                        <a:rPr lang="pt-BR" sz="2400" i="1">
-                          <a:latin typeface="Cambria Math" panose="02040503050406030204" pitchFamily="18" charset="0"/>
-                        </a:rPr>
-                        <m:t>𝑃</m:t>
-                      </m:r>
-                      <m:d>
-                        <m:dPr>
-                          <m:ctrlPr>
-                            <a:rPr lang="pt-BR" sz="2400" i="1">
-                              <a:latin typeface="Cambria Math" panose="02040503050406030204" pitchFamily="18" charset="0"/>
-                            </a:rPr>
-                          </m:ctrlPr>
-                        </m:dPr>
-                        <m:e>
-                          <m:r>
-                            <a:rPr lang="pt-BR" sz="2400" i="1">
-                              <a:latin typeface="Cambria Math" panose="02040503050406030204" pitchFamily="18" charset="0"/>
-                            </a:rPr>
-                            <m:t>𝐴</m:t>
-                          </m:r>
-                        </m:e>
-                        <m:e>
-                          <m:r>
-                            <a:rPr lang="pt-BR" sz="2400" i="1">
-                              <a:latin typeface="Cambria Math" panose="02040503050406030204" pitchFamily="18" charset="0"/>
-                            </a:rPr>
-                            <m:t>𝐵</m:t>
-                          </m:r>
-                        </m:e>
-                      </m:d>
-                      <m:r>
-                        <a:rPr lang="pt-BR" sz="2400" i="1">
-                          <a:latin typeface="Cambria Math" panose="02040503050406030204" pitchFamily="18" charset="0"/>
-                        </a:rPr>
-                        <m:t>.</m:t>
-                      </m:r>
-                    </m:oMath>
-                  </m:oMathPara>
-                </a14:m>
-                <a:endParaRPr lang="pt-BR" sz="2400" dirty="0"/>
-              </a:p>
-            </p:txBody>
-          </p:sp>
-        </mc:Choice>
-        <mc:Fallback xmlns="">
-          <p:sp>
-            <p:nvSpPr>
-              <p:cNvPr id="6" name="CaixaDeTexto 5">
-                <a:extLst>
-                  <a:ext uri="{FF2B5EF4-FFF2-40B4-BE49-F238E27FC236}">
-                    <a16:creationId xmlns:a16="http://schemas.microsoft.com/office/drawing/2014/main" id="{720B10DA-C761-4DEE-8D86-E170E1C2E981}"/>
-                  </a:ext>
-                </a:extLst>
-              </p:cNvPr>
-              <p:cNvSpPr txBox="1">
-                <a:spLocks noRot="1" noChangeAspect="1" noMove="1" noResize="1" noEditPoints="1" noAdjustHandles="1" noChangeArrowheads="1" noChangeShapeType="1" noTextEdit="1"/>
-              </p:cNvSpPr>
-              <p:nvPr/>
-            </p:nvSpPr>
-            <p:spPr>
-              <a:xfrm>
-                <a:off x="721969" y="652794"/>
-                <a:ext cx="10748061" cy="5143716"/>
-              </a:xfrm>
-              <a:prstGeom prst="rect">
-                <a:avLst/>
-              </a:prstGeom>
-              <a:blipFill>
-                <a:blip r:embed="rId2"/>
-                <a:stretch>
-                  <a:fillRect l="-850"/>
-                </a:stretch>
-              </a:blipFill>
-            </p:spPr>
-            <p:txBody>
-              <a:bodyPr/>
-              <a:lstStyle/>
-              <a:p>
-                <a:r>
-                  <a:rPr lang="pt-BR">
-                    <a:noFill/>
-                  </a:rPr>
-                  <a:t> </a:t>
-                </a:r>
-              </a:p>
-            </p:txBody>
-          </p:sp>
-        </mc:Fallback>
-      </mc:AlternateContent>
-      <p:sp>
-        <p:nvSpPr>
-          <p:cNvPr id="3" name="CaixaDeTexto 2">
-            <a:extLst>
-              <a:ext uri="{FF2B5EF4-FFF2-40B4-BE49-F238E27FC236}">
-                <a16:creationId xmlns:a16="http://schemas.microsoft.com/office/drawing/2014/main" id="{19131A04-B5D6-4211-8B49-4615DE5797E9}"/>
-              </a:ext>
-            </a:extLst>
-          </p:cNvPr>
-          <p:cNvSpPr txBox="1"/>
-          <p:nvPr/>
-        </p:nvSpPr>
-        <p:spPr>
-          <a:xfrm>
-            <a:off x="361188" y="6463893"/>
-            <a:ext cx="7772400" cy="308152"/>
-          </a:xfrm>
-          <a:prstGeom prst="rect">
-            <a:avLst/>
-          </a:prstGeom>
-          <a:noFill/>
-        </p:spPr>
-        <p:txBody>
-          <a:bodyPr wrap="none" rtlCol="0">
-            <a:spAutoFit/>
-          </a:bodyPr>
-          <a:lstStyle/>
-          <a:p>
-            <a:r>
-              <a:rPr lang="pt-BR" sz="1400" dirty="0"/>
-              <a:t>CEA055 – Estatística e Probabilidade – Prof. Marcos Goulart Lima</a:t>
-            </a:r>
-          </a:p>
-        </p:txBody>
-      </p:sp>
-    </p:spTree>
-    <p:extLst>
-      <p:ext uri="{BB962C8B-B14F-4D97-AF65-F5344CB8AC3E}">
-        <p14:creationId xmlns:p14="http://schemas.microsoft.com/office/powerpoint/2010/main" val="86929316"/>
-      </p:ext>
-    </p:extLst>
-  </p:cSld>
-  <p:clrMapOvr>
-    <a:masterClrMapping/>
-  </p:clrMapOvr>
-</p:sld>
-</file>
-
-<file path=ppt/slides/slide5.xml><?xml version="1.0" encoding="utf-8"?>
-<p:sld xmlns:a="http://schemas.openxmlformats.org/drawingml/2006/main" xmlns:r="http://schemas.openxmlformats.org/officeDocument/2006/relationships" xmlns:p="http://schemas.openxmlformats.org/presentationml/2006/main">
-  <p:cSld>
-    <p:spTree>
-      <p:nvGrpSpPr>
-        <p:cNvPr id="1" name=""/>
-        <p:cNvGrpSpPr/>
-        <p:nvPr/>
-      </p:nvGrpSpPr>
-      <p:grpSpPr>
-        <a:xfrm>
-          <a:off x="0" y="0"/>
-          <a:ext cx="0" cy="0"/>
-          <a:chOff x="0" y="0"/>
-          <a:chExt cx="0" cy="0"/>
-        </a:xfrm>
-      </p:grpSpPr>
-      <p:sp>
-        <p:nvSpPr>
-          <p:cNvPr id="6" name="CaixaDeTexto 5">
-            <a:extLst>
-              <a:ext uri="{FF2B5EF4-FFF2-40B4-BE49-F238E27FC236}">
-                <a16:creationId xmlns:a16="http://schemas.microsoft.com/office/drawing/2014/main" id="{720B10DA-C761-4DEE-8D86-E170E1C2E981}"/>
-              </a:ext>
-            </a:extLst>
-          </p:cNvPr>
-          <p:cNvSpPr txBox="1"/>
-          <p:nvPr/>
-        </p:nvSpPr>
-        <p:spPr>
-          <a:xfrm>
-            <a:off x="721969" y="678920"/>
-            <a:ext cx="10748061" cy="4401205"/>
-          </a:xfrm>
-          <a:prstGeom prst="rect">
-            <a:avLst/>
-          </a:prstGeom>
-          <a:noFill/>
-        </p:spPr>
-        <p:txBody>
-          <a:bodyPr wrap="square" rtlCol="0">
-            <a:spAutoFit/>
-          </a:bodyPr>
-          <a:lstStyle/>
-          <a:p>
-            <a:r>
-              <a:rPr lang="pt-BR" sz="2800" b="1" dirty="0"/>
-              <a:t>Exemplo. Calculando P(A|B)</a:t>
-            </a:r>
-          </a:p>
-          <a:p>
-            <a:endParaRPr lang="pt-BR" sz="2800" dirty="0"/>
-          </a:p>
-          <a:p>
-            <a:r>
-              <a:rPr lang="pt-BR" sz="2800" dirty="0"/>
-              <a:t>Se P(A) = 1/3, P(B) = 3/4 e P(A∪B) = 11/12, calcule P(A|B).</a:t>
-            </a:r>
-          </a:p>
-          <a:p>
-            <a:endParaRPr lang="pt-BR" sz="2800" dirty="0"/>
-          </a:p>
-          <a:p>
-            <a:r>
-              <a:rPr lang="pt-BR" sz="2800" dirty="0"/>
-              <a:t>Resposta:</a:t>
-            </a:r>
-          </a:p>
-          <a:p>
-            <a:endParaRPr lang="pt-BR" sz="2800" dirty="0"/>
-          </a:p>
-          <a:p>
-            <a:r>
-              <a:rPr lang="pt-BR" sz="2800" dirty="0"/>
-              <a:t>Da regra da soma: P(A∩B) = P(A) + P(B) − P(A∪B) = 1/3 + 3/4 − 11/12 = 1/6.</a:t>
-            </a:r>
-          </a:p>
-          <a:p>
-            <a:endParaRPr lang="pt-BR" sz="2800" dirty="0"/>
-          </a:p>
-          <a:p>
-            <a:r>
-              <a:rPr lang="pt-BR" sz="2800" dirty="0"/>
-              <a:t>P(A|B) = P(A∩B) / P(B) = (1/6) / (3/4) = 2/9.</a:t>
-            </a:r>
-          </a:p>
-        </p:txBody>
-      </p:sp>
-      <p:sp>
-        <p:nvSpPr>
-          <p:cNvPr id="3" name="CaixaDeTexto 2">
-            <a:extLst>
-              <a:ext uri="{FF2B5EF4-FFF2-40B4-BE49-F238E27FC236}">
-                <a16:creationId xmlns:a16="http://schemas.microsoft.com/office/drawing/2014/main" id="{19131A04-B5D6-4211-8B49-4615DE5797E9}"/>
-              </a:ext>
-            </a:extLst>
-          </p:cNvPr>
-          <p:cNvSpPr txBox="1"/>
-          <p:nvPr/>
-        </p:nvSpPr>
-        <p:spPr>
-          <a:xfrm>
-            <a:off x="361188" y="6463893"/>
-            <a:ext cx="7772400" cy="308152"/>
-          </a:xfrm>
-          <a:prstGeom prst="rect">
-            <a:avLst/>
-          </a:prstGeom>
-          <a:noFill/>
-        </p:spPr>
-        <p:txBody>
-          <a:bodyPr wrap="none" rtlCol="0">
-            <a:spAutoFit/>
-          </a:bodyPr>
-          <a:lstStyle/>
-          <a:p>
-            <a:r>
-              <a:rPr lang="pt-BR" sz="1400" dirty="0"/>
-              <a:t>CEA055 – Estatística e Probabilidade – Prof. Marcos Goulart Lima</a:t>
-            </a:r>
-          </a:p>
-        </p:txBody>
-      </p:sp>
-    </p:spTree>
-    <p:extLst>
-      <p:ext uri="{BB962C8B-B14F-4D97-AF65-F5344CB8AC3E}">
-        <p14:creationId xmlns:p14="http://schemas.microsoft.com/office/powerpoint/2010/main" val="1131317111"/>
-      </p:ext>
-    </p:extLst>
-  </p:cSld>
-  <p:clrMapOvr>
-    <a:masterClrMapping/>
-  </p:clrMapOvr>
-</p:sld>
-</file>
-
-<file path=ppt/slides/slide6.xml><?xml version="1.0" encoding="utf-8"?>
-<p:sld xmlns:a="http://schemas.openxmlformats.org/drawingml/2006/main" xmlns:r="http://schemas.openxmlformats.org/officeDocument/2006/relationships" xmlns:p="http://schemas.openxmlformats.org/presentationml/2006/main">
-  <p:cSld>
-    <p:spTree>
-      <p:nvGrpSpPr>
-        <p:cNvPr id="1" name=""/>
-        <p:cNvGrpSpPr/>
-        <p:nvPr/>
-      </p:nvGrpSpPr>
-      <p:grpSpPr>
-        <a:xfrm>
-          <a:off x="0" y="0"/>
-          <a:ext cx="0" cy="0"/>
-          <a:chOff x="0" y="0"/>
-          <a:chExt cx="0" cy="0"/>
-        </a:xfrm>
-      </p:grpSpPr>
-      <p:sp>
-        <p:nvSpPr>
-          <p:cNvPr id="6" name="CaixaDeTexto 5">
-            <a:extLst>
-              <a:ext uri="{FF2B5EF4-FFF2-40B4-BE49-F238E27FC236}">
-                <a16:creationId xmlns:a16="http://schemas.microsoft.com/office/drawing/2014/main" id="{720B10DA-C761-4DEE-8D86-E170E1C2E981}"/>
-              </a:ext>
-            </a:extLst>
-          </p:cNvPr>
-          <p:cNvSpPr txBox="1"/>
-          <p:nvPr/>
-        </p:nvSpPr>
-        <p:spPr>
-          <a:xfrm>
-            <a:off x="721969" y="739879"/>
-            <a:ext cx="10748061" cy="1697068"/>
-          </a:xfrm>
-          <a:prstGeom prst="rect">
-            <a:avLst/>
-          </a:prstGeom>
-          <a:noFill/>
-        </p:spPr>
-        <p:txBody>
-          <a:bodyPr wrap="square" rtlCol="0">
-            <a:spAutoFit/>
-          </a:bodyPr>
-          <a:lstStyle/>
-          <a:p>
-            <a:pPr>
-              <a:lnSpc>
-                <a:spcPct val="150000"/>
-              </a:lnSpc>
-            </a:pPr>
-            <a:r>
-              <a:rPr lang="pt-BR" sz="2400" b="1" dirty="0"/>
-              <a:t>Exemplo: </a:t>
-            </a:r>
-            <a:r>
-              <a:rPr lang="pt-BR" sz="2400" dirty="0"/>
-              <a:t>Urna sem reposição. Uma urna contém 2 bolas brancas (B) e 3 vermelhas (V). Sorteiam-se 2 bolas ao acaso, sem reposição. Quais são os resultados possíveis e suas probabilidades?</a:t>
-            </a:r>
-          </a:p>
-        </p:txBody>
-      </p:sp>
-      <p:sp>
-        <p:nvSpPr>
-          <p:cNvPr id="3" name="CaixaDeTexto 2">
-            <a:extLst>
-              <a:ext uri="{FF2B5EF4-FFF2-40B4-BE49-F238E27FC236}">
-                <a16:creationId xmlns:a16="http://schemas.microsoft.com/office/drawing/2014/main" id="{19131A04-B5D6-4211-8B49-4615DE5797E9}"/>
-              </a:ext>
-            </a:extLst>
-          </p:cNvPr>
-          <p:cNvSpPr txBox="1"/>
-          <p:nvPr/>
-        </p:nvSpPr>
-        <p:spPr>
-          <a:xfrm>
-            <a:off x="361188" y="6463893"/>
-            <a:ext cx="7772400" cy="308152"/>
-          </a:xfrm>
-          <a:prstGeom prst="rect">
-            <a:avLst/>
-          </a:prstGeom>
-          <a:noFill/>
-        </p:spPr>
-        <p:txBody>
-          <a:bodyPr wrap="none" rtlCol="0">
-            <a:spAutoFit/>
-          </a:bodyPr>
-          <a:lstStyle/>
-          <a:p>
-            <a:r>
-              <a:rPr lang="pt-BR" sz="1400" dirty="0"/>
-              <a:t>CEA055 – Estatística e Probabilidade – Prof. Marcos Goulart Lima</a:t>
-            </a:r>
-          </a:p>
-        </p:txBody>
-      </p:sp>
-      <p:pic>
-        <p:nvPicPr>
-          <p:cNvPr id="7" name="Imagem 6">
-            <a:extLst>
-              <a:ext uri="{FF2B5EF4-FFF2-40B4-BE49-F238E27FC236}">
-                <a16:creationId xmlns:a16="http://schemas.microsoft.com/office/drawing/2014/main" id="{DD111532-239E-48EB-A3D5-D8708BD430D5}"/>
-              </a:ext>
-            </a:extLst>
-          </p:cNvPr>
-          <p:cNvPicPr>
-            <a:picLocks noChangeAspect="1"/>
-          </p:cNvPicPr>
-          <p:nvPr/>
-        </p:nvPicPr>
-        <p:blipFill>
-          <a:blip r:embed="rId2"/>
-          <a:stretch>
-            <a:fillRect/>
-          </a:stretch>
-        </p:blipFill>
-        <p:spPr>
-          <a:xfrm>
-            <a:off x="721969" y="2690601"/>
-            <a:ext cx="5794328" cy="2926428"/>
-          </a:xfrm>
-          <a:prstGeom prst="rect">
-            <a:avLst/>
-          </a:prstGeom>
-        </p:spPr>
-      </p:pic>
-      <p:sp>
-        <p:nvSpPr>
-          <p:cNvPr id="4" name="CaixaDeTexto 3">
-            <a:extLst>
-              <a:ext uri="{FF2B5EF4-FFF2-40B4-BE49-F238E27FC236}">
-                <a16:creationId xmlns:a16="http://schemas.microsoft.com/office/drawing/2014/main" id="{720B10DA-C761-4DEE-8D86-E170E1C2E981}"/>
-              </a:ext>
-            </a:extLst>
-          </p:cNvPr>
-          <p:cNvSpPr txBox="1"/>
-          <p:nvPr/>
-        </p:nvSpPr>
-        <p:spPr>
-          <a:xfrm>
-            <a:off x="6911642" y="2436599"/>
-            <a:ext cx="4558388" cy="3416320"/>
-          </a:xfrm>
-          <a:prstGeom prst="rect">
-            <a:avLst/>
-          </a:prstGeom>
-          <a:noFill/>
-        </p:spPr>
-        <p:txBody>
-          <a:bodyPr wrap="square" rtlCol="0">
-            <a:spAutoFit/>
-          </a:bodyPr>
-          <a:lstStyle/>
-          <a:p>
-            <a:pPr algn="ctr"/>
-            <a:r>
-              <a:rPr lang="pt-BR" sz="2400" dirty="0"/>
-              <a:t>Resultados possíveis</a:t>
-            </a:r>
-          </a:p>
-          <a:p>
-            <a:pPr algn="ctr"/>
-            <a:endParaRPr lang="pt-BR" sz="2400" dirty="0"/>
-          </a:p>
-          <a:p>
-            <a:r>
-              <a:rPr lang="pt-BR" sz="2400" dirty="0"/>
-              <a:t>BV</a:t>
-            </a:r>
-          </a:p>
-          <a:p>
-            <a:endParaRPr lang="pt-BR" sz="2400" dirty="0"/>
-          </a:p>
-          <a:p>
-            <a:r>
-              <a:rPr lang="pt-BR" sz="2400" dirty="0"/>
-              <a:t>BB</a:t>
-            </a:r>
-          </a:p>
-          <a:p>
-            <a:endParaRPr lang="pt-BR" sz="2400" dirty="0"/>
-          </a:p>
-          <a:p>
-            <a:r>
-              <a:rPr lang="pt-BR" sz="2400" dirty="0"/>
-              <a:t>VV</a:t>
-            </a:r>
-          </a:p>
-          <a:p>
-            <a:endParaRPr lang="pt-BR" sz="2400" dirty="0"/>
-          </a:p>
-          <a:p>
-            <a:r>
-              <a:rPr lang="pt-BR" sz="2400" dirty="0"/>
-              <a:t>VB</a:t>
-            </a:r>
-          </a:p>
-        </p:txBody>
-      </p:sp>
-    </p:spTree>
-    <p:extLst>
-      <p:ext uri="{BB962C8B-B14F-4D97-AF65-F5344CB8AC3E}">
-        <p14:creationId xmlns:p14="http://schemas.microsoft.com/office/powerpoint/2010/main" val="3028240649"/>
-      </p:ext>
-    </p:extLst>
-  </p:cSld>
-  <p:clrMapOvr>
-    <a:masterClrMapping/>
-  </p:clrMapOvr>
-</p:sld>
-</file>
-
-<file path=ppt/slides/slide7.xml><?xml version="1.0" encoding="utf-8"?>
-<p:sld xmlns:a="http://schemas.openxmlformats.org/drawingml/2006/main" xmlns:r="http://schemas.openxmlformats.org/officeDocument/2006/relationships" xmlns:p="http://schemas.openxmlformats.org/presentationml/2006/main">
-  <p:cSld>
-    <p:spTree>
-      <p:nvGrpSpPr>
-        <p:cNvPr id="1" name=""/>
-        <p:cNvGrpSpPr/>
-        <p:nvPr/>
-      </p:nvGrpSpPr>
-      <p:grpSpPr>
-        <a:xfrm>
-          <a:off x="0" y="0"/>
-          <a:ext cx="0" cy="0"/>
-          <a:chOff x="0" y="0"/>
-          <a:chExt cx="0" cy="0"/>
-        </a:xfrm>
-      </p:grpSpPr>
-      <p:sp>
-        <p:nvSpPr>
-          <p:cNvPr id="6" name="CaixaDeTexto 5">
-            <a:extLst>
-              <a:ext uri="{FF2B5EF4-FFF2-40B4-BE49-F238E27FC236}">
-                <a16:creationId xmlns:a16="http://schemas.microsoft.com/office/drawing/2014/main" id="{720B10DA-C761-4DEE-8D86-E170E1C2E981}"/>
-              </a:ext>
-            </a:extLst>
-          </p:cNvPr>
-          <p:cNvSpPr txBox="1"/>
-          <p:nvPr/>
-        </p:nvSpPr>
-        <p:spPr>
-          <a:xfrm>
-            <a:off x="658143" y="853091"/>
-            <a:ext cx="10597137" cy="5196166"/>
-          </a:xfrm>
-          <a:prstGeom prst="rect">
-            <a:avLst/>
-          </a:prstGeom>
-          <a:noFill/>
-        </p:spPr>
-        <p:txBody>
-          <a:bodyPr wrap="square" rtlCol="0">
-            <a:spAutoFit/>
-          </a:bodyPr>
-          <a:lstStyle/>
-          <a:p>
-            <a:pPr rtl="0">
-              <a:lnSpc>
-                <a:spcPct val="150000"/>
-              </a:lnSpc>
-            </a:pPr>
-            <a:r>
-              <a:rPr lang="pt-BR" sz="2800" b="1" dirty="0"/>
-              <a:t>Por que a probabilidade muda entre as extrações?</a:t>
-            </a:r>
-            <a:endParaRPr lang="pt-BR" sz="2800" dirty="0"/>
-          </a:p>
-          <a:p>
-            <a:pPr rtl="0">
-              <a:lnSpc>
-                <a:spcPct val="150000"/>
-              </a:lnSpc>
-              <a:buFont typeface="+mj-lt"/>
-              <a:buAutoNum type="arabicPeriod"/>
-            </a:pPr>
-            <a:r>
-              <a:rPr lang="pt-BR" sz="2800" dirty="0"/>
-              <a:t> Se a primeira bola sorteada foi branca, quantas bolas brancas e quantas vermelhas sobram na urna para a segunda extração? E se a primeira foi vermelha?</a:t>
-            </a:r>
-          </a:p>
-          <a:p>
-            <a:pPr rtl="0">
-              <a:lnSpc>
-                <a:spcPct val="150000"/>
-              </a:lnSpc>
-              <a:buFont typeface="+mj-lt"/>
-              <a:buAutoNum type="arabicPeriod"/>
-            </a:pPr>
-            <a:r>
-              <a:rPr lang="pt-BR" sz="2800" dirty="0"/>
-              <a:t> Com isso, qual é P(branca na 2ª | branca na 1ª)? E P(branca na 2ª | vermelha na 1ª)?</a:t>
-            </a:r>
-          </a:p>
-          <a:p>
-            <a:pPr rtl="0">
-              <a:lnSpc>
-                <a:spcPct val="150000"/>
-              </a:lnSpc>
-              <a:buFont typeface="+mj-lt"/>
-              <a:buAutoNum type="arabicPeriod"/>
-            </a:pPr>
-            <a:r>
-              <a:rPr lang="pt-BR" sz="2800" dirty="0"/>
-              <a:t> O resultado da segunda extração depende do resultado da primeira? Por quê?</a:t>
-            </a:r>
-          </a:p>
-        </p:txBody>
-      </p:sp>
-      <p:sp>
-        <p:nvSpPr>
-          <p:cNvPr id="3" name="CaixaDeTexto 2">
-            <a:extLst>
-              <a:ext uri="{FF2B5EF4-FFF2-40B4-BE49-F238E27FC236}">
-                <a16:creationId xmlns:a16="http://schemas.microsoft.com/office/drawing/2014/main" id="{19131A04-B5D6-4211-8B49-4615DE5797E9}"/>
-              </a:ext>
-            </a:extLst>
-          </p:cNvPr>
-          <p:cNvSpPr txBox="1"/>
-          <p:nvPr/>
-        </p:nvSpPr>
-        <p:spPr>
-          <a:xfrm>
-            <a:off x="361188" y="6463893"/>
-            <a:ext cx="7772400" cy="308152"/>
-          </a:xfrm>
-          <a:prstGeom prst="rect">
-            <a:avLst/>
-          </a:prstGeom>
-          <a:noFill/>
-        </p:spPr>
-        <p:txBody>
-          <a:bodyPr wrap="none" rtlCol="0">
-            <a:spAutoFit/>
-          </a:bodyPr>
-          <a:lstStyle/>
-          <a:p>
-            <a:r>
-              <a:rPr lang="pt-BR" sz="1400" dirty="0"/>
-              <a:t>CEA055 – Estatística e Probabilidade – Prof. Marcos Goulart Lima</a:t>
-            </a:r>
-          </a:p>
-        </p:txBody>
-      </p:sp>
-    </p:spTree>
-    <p:extLst>
-      <p:ext uri="{BB962C8B-B14F-4D97-AF65-F5344CB8AC3E}">
-        <p14:creationId xmlns:p14="http://schemas.microsoft.com/office/powerpoint/2010/main" val="3781395873"/>
-      </p:ext>
-    </p:extLst>
-  </p:cSld>
-  <p:clrMapOvr>
-    <a:masterClrMapping/>
-  </p:clrMapOvr>
-</p:sld>
-</file>
-
-<file path=ppt/slides/slide8.xml><?xml version="1.0" encoding="utf-8"?>
-<p:sld xmlns:a="http://schemas.openxmlformats.org/drawingml/2006/main" xmlns:r="http://schemas.openxmlformats.org/officeDocument/2006/relationships" xmlns:p="http://schemas.openxmlformats.org/presentationml/2006/main">
-  <p:cSld>
-    <p:spTree>
-      <p:nvGrpSpPr>
-        <p:cNvPr id="1" name=""/>
-        <p:cNvGrpSpPr/>
-        <p:nvPr/>
-      </p:nvGrpSpPr>
-      <p:grpSpPr>
-        <a:xfrm>
-          <a:off x="0" y="0"/>
-          <a:ext cx="0" cy="0"/>
-          <a:chOff x="0" y="0"/>
-          <a:chExt cx="0" cy="0"/>
-        </a:xfrm>
-      </p:grpSpPr>
-      <mc:AlternateContent xmlns:mc="http://schemas.openxmlformats.org/markup-compatibility/2006">
-        <mc:Choice xmlns:a14="http://schemas.microsoft.com/office/drawing/2010/main" Requires="a14">
-          <p:sp>
-            <p:nvSpPr>
-              <p:cNvPr id="6" name="CaixaDeTexto 5">
-                <a:extLst>
-                  <a:ext uri="{FF2B5EF4-FFF2-40B4-BE49-F238E27FC236}">
-                    <a16:creationId xmlns:a16="http://schemas.microsoft.com/office/drawing/2014/main" id="{720B10DA-C761-4DEE-8D86-E170E1C2E981}"/>
-                  </a:ext>
-                </a:extLst>
-              </p:cNvPr>
-              <p:cNvSpPr txBox="1"/>
-              <p:nvPr/>
-            </p:nvSpPr>
-            <p:spPr>
-              <a:xfrm>
-                <a:off x="658143" y="853091"/>
-                <a:ext cx="10597137" cy="5020092"/>
-              </a:xfrm>
-              <a:prstGeom prst="rect">
-                <a:avLst/>
-              </a:prstGeom>
-              <a:noFill/>
-            </p:spPr>
-            <p:txBody>
-              <a:bodyPr wrap="square" rtlCol="0">
-                <a:spAutoFit/>
-              </a:bodyPr>
-              <a:lstStyle/>
-              <a:p>
-                <a:pPr>
-                  <a:lnSpc>
-                    <a:spcPct val="150000"/>
-                  </a:lnSpc>
-                </a:pPr>
-                <a:r>
-                  <a:rPr lang="pt-BR" sz="2400" b="1" dirty="0"/>
-                  <a:t>Exemplo. </a:t>
-                </a:r>
-                <a:r>
-                  <a:rPr lang="pt-BR" sz="2400" dirty="0"/>
-                  <a:t>Duas bolas vão ser retiradas de uma urna que contém 2 bolas brancas, 3 pretas e 4 verdes. Qual a probabilidade de que ambas</a:t>
-                </a:r>
-              </a:p>
-              <a:p>
-                <a:pPr>
-                  <a:lnSpc>
-                    <a:spcPct val="150000"/>
-                  </a:lnSpc>
-                </a:pPr>
-                <a:r>
-                  <a:rPr lang="pt-BR" sz="2400" dirty="0"/>
-                  <a:t>a) sejam verdes?</a:t>
-                </a:r>
-              </a:p>
-              <a:p>
-                <a:pPr>
-                  <a:lnSpc>
-                    <a:spcPct val="150000"/>
-                  </a:lnSpc>
-                </a:pPr>
-                <a:r>
-                  <a:rPr lang="pt-BR" sz="2400" dirty="0"/>
-                  <a:t>b) sejam da mesma cor?</a:t>
-                </a:r>
-              </a:p>
-              <a:p>
-                <a:pPr>
-                  <a:lnSpc>
-                    <a:spcPct val="150000"/>
-                  </a:lnSpc>
-                </a:pPr>
-                <a:endParaRPr lang="pt-BR" sz="2400" dirty="0"/>
-              </a:p>
-              <a:p>
-                <a:pPr>
-                  <a:lnSpc>
-                    <a:spcPct val="150000"/>
-                  </a:lnSpc>
-                </a:pPr>
-                <a:r>
-                  <a:rPr lang="pt-BR" sz="2400" b="1" dirty="0"/>
-                  <a:t>Resposta:</a:t>
-                </a:r>
-              </a:p>
-              <a:p>
-                <a:pPr>
-                  <a:lnSpc>
-                    <a:spcPct val="150000"/>
-                  </a:lnSpc>
-                </a:pPr>
-                <a:r>
-                  <a:rPr lang="pt-BR" sz="2400" dirty="0"/>
-                  <a:t>a) P(ambas verdes) </a:t>
-                </a:r>
-                <a14:m>
-                  <m:oMath xmlns:m="http://schemas.openxmlformats.org/officeDocument/2006/math">
-                    <m:r>
-                      <a:rPr lang="pt-BR" sz="2400" i="1" dirty="0" smtClean="0">
-                        <a:latin typeface="Cambria Math" panose="02040503050406030204" pitchFamily="18" charset="0"/>
-                      </a:rPr>
-                      <m:t>=</m:t>
-                    </m:r>
-                    <m:r>
-                      <a:rPr lang="pt-BR" sz="2400" i="1" dirty="0" smtClean="0">
-                        <a:latin typeface="Cambria Math" panose="02040503050406030204" pitchFamily="18" charset="0"/>
-                      </a:rPr>
-                      <m:t>𝑃</m:t>
-                    </m:r>
-                    <m:d>
-                      <m:dPr>
-                        <m:ctrlPr>
-                          <a:rPr lang="pt-BR" sz="2400" i="1" dirty="0" smtClean="0">
-                            <a:latin typeface="Cambria Math" panose="02040503050406030204" pitchFamily="18" charset="0"/>
-                          </a:rPr>
-                        </m:ctrlPr>
-                      </m:dPr>
-                      <m:e>
-                        <m:r>
-                          <a:rPr lang="pt-BR" sz="2400" i="1" dirty="0" smtClean="0">
-                            <a:latin typeface="Cambria Math" panose="02040503050406030204" pitchFamily="18" charset="0"/>
-                          </a:rPr>
-                          <m:t>𝑉𝑉</m:t>
-                        </m:r>
-                      </m:e>
-                    </m:d>
-                    <m:r>
-                      <a:rPr lang="pt-BR" sz="2400" i="1" dirty="0" smtClean="0">
-                        <a:latin typeface="Cambria Math" panose="02040503050406030204" pitchFamily="18" charset="0"/>
-                      </a:rPr>
-                      <m:t>=</m:t>
-                    </m:r>
-                    <m:r>
-                      <a:rPr lang="pt-BR" sz="2400" i="1" dirty="0" smtClean="0">
-                        <a:latin typeface="Cambria Math" panose="02040503050406030204" pitchFamily="18" charset="0"/>
-                      </a:rPr>
-                      <m:t>𝑃</m:t>
-                    </m:r>
-                    <m:d>
-                      <m:dPr>
-                        <m:ctrlPr>
-                          <a:rPr lang="pt-BR" sz="2400" i="1" dirty="0" smtClean="0">
-                            <a:latin typeface="Cambria Math" panose="02040503050406030204" pitchFamily="18" charset="0"/>
-                          </a:rPr>
-                        </m:ctrlPr>
-                      </m:dPr>
-                      <m:e>
-                        <m:r>
-                          <a:rPr lang="pt-BR" sz="2400" i="1" dirty="0" smtClean="0">
-                            <a:latin typeface="Cambria Math" panose="02040503050406030204" pitchFamily="18" charset="0"/>
-                          </a:rPr>
-                          <m:t>𝑉</m:t>
-                        </m:r>
-                      </m:e>
-                    </m:d>
-                    <m:r>
-                      <a:rPr lang="pt-BR" sz="2400" i="1" dirty="0" smtClean="0">
-                        <a:latin typeface="Cambria Math" panose="02040503050406030204" pitchFamily="18" charset="0"/>
-                      </a:rPr>
-                      <m:t>·</m:t>
-                    </m:r>
-                    <m:r>
-                      <a:rPr lang="pt-BR" sz="2400" i="1" dirty="0" smtClean="0">
-                        <a:latin typeface="Cambria Math" panose="02040503050406030204" pitchFamily="18" charset="0"/>
-                      </a:rPr>
-                      <m:t>𝑃</m:t>
-                    </m:r>
-                    <m:d>
-                      <m:dPr>
-                        <m:ctrlPr>
-                          <a:rPr lang="pt-BR" sz="2400" i="1" dirty="0" smtClean="0">
-                            <a:latin typeface="Cambria Math" panose="02040503050406030204" pitchFamily="18" charset="0"/>
-                          </a:rPr>
-                        </m:ctrlPr>
-                      </m:dPr>
-                      <m:e>
-                        <m:r>
-                          <a:rPr lang="pt-BR" sz="2400" i="1" dirty="0" smtClean="0">
-                            <a:latin typeface="Cambria Math" panose="02040503050406030204" pitchFamily="18" charset="0"/>
-                          </a:rPr>
-                          <m:t>𝑉</m:t>
-                        </m:r>
-                      </m:e>
-                      <m:e>
-                        <m:r>
-                          <a:rPr lang="pt-BR" sz="2400" i="1" dirty="0" smtClean="0">
-                            <a:latin typeface="Cambria Math" panose="02040503050406030204" pitchFamily="18" charset="0"/>
-                          </a:rPr>
-                          <m:t>𝑉</m:t>
-                        </m:r>
-                      </m:e>
-                    </m:d>
-                    <m:r>
-                      <a:rPr lang="pt-BR" sz="2400" i="1" dirty="0" smtClean="0">
-                        <a:latin typeface="Cambria Math" panose="02040503050406030204" pitchFamily="18" charset="0"/>
-                      </a:rPr>
-                      <m:t> = 4/9·3/8 = 1/6.</m:t>
-                    </m:r>
-                  </m:oMath>
-                </a14:m>
-                <a:endParaRPr lang="pt-BR" sz="2400" dirty="0"/>
-              </a:p>
-              <a:p>
-                <a:pPr>
-                  <a:lnSpc>
-                    <a:spcPct val="150000"/>
-                  </a:lnSpc>
-                </a:pPr>
-                <a:r>
-                  <a:rPr lang="pt-BR" sz="2400" dirty="0"/>
-                  <a:t>b) P(mesma cor) = </a:t>
-                </a:r>
-                <a14:m>
-                  <m:oMath xmlns:m="http://schemas.openxmlformats.org/officeDocument/2006/math">
-                    <m:r>
-                      <a:rPr lang="pt-BR" sz="2400" i="1" dirty="0" smtClean="0">
-                        <a:latin typeface="Cambria Math" panose="02040503050406030204" pitchFamily="18" charset="0"/>
-                      </a:rPr>
-                      <m:t>𝑃</m:t>
-                    </m:r>
-                    <m:r>
-                      <a:rPr lang="pt-BR" sz="2400" i="1" dirty="0" smtClean="0">
-                        <a:latin typeface="Cambria Math" panose="02040503050406030204" pitchFamily="18" charset="0"/>
-                      </a:rPr>
-                      <m:t>(</m:t>
-                    </m:r>
-                    <m:r>
-                      <a:rPr lang="pt-BR" sz="2400" i="1" dirty="0" smtClean="0">
-                        <a:latin typeface="Cambria Math" panose="02040503050406030204" pitchFamily="18" charset="0"/>
-                      </a:rPr>
-                      <m:t>𝐵𝐵</m:t>
-                    </m:r>
-                    <m:r>
-                      <a:rPr lang="pt-BR" sz="2400" i="1" dirty="0" smtClean="0">
-                        <a:latin typeface="Cambria Math" panose="02040503050406030204" pitchFamily="18" charset="0"/>
-                      </a:rPr>
-                      <m:t>)+</m:t>
-                    </m:r>
-                    <m:r>
-                      <a:rPr lang="pt-BR" sz="2400" i="1" dirty="0" smtClean="0">
-                        <a:latin typeface="Cambria Math" panose="02040503050406030204" pitchFamily="18" charset="0"/>
-                      </a:rPr>
-                      <m:t>𝑃</m:t>
-                    </m:r>
-                    <m:r>
-                      <a:rPr lang="pt-BR" sz="2400" i="1" dirty="0" smtClean="0">
-                        <a:latin typeface="Cambria Math" panose="02040503050406030204" pitchFamily="18" charset="0"/>
-                      </a:rPr>
-                      <m:t>(</m:t>
-                    </m:r>
-                    <m:r>
-                      <a:rPr lang="pt-BR" sz="2400" i="1" dirty="0" smtClean="0">
-                        <a:latin typeface="Cambria Math" panose="02040503050406030204" pitchFamily="18" charset="0"/>
-                      </a:rPr>
-                      <m:t>𝑃𝑃</m:t>
-                    </m:r>
-                    <m:r>
-                      <a:rPr lang="pt-BR" sz="2400" i="1" dirty="0" smtClean="0">
-                        <a:latin typeface="Cambria Math" panose="02040503050406030204" pitchFamily="18" charset="0"/>
-                      </a:rPr>
-                      <m:t>)+</m:t>
-                    </m:r>
-                    <m:r>
-                      <a:rPr lang="pt-BR" sz="2400" i="1" dirty="0" smtClean="0">
-                        <a:latin typeface="Cambria Math" panose="02040503050406030204" pitchFamily="18" charset="0"/>
-                      </a:rPr>
-                      <m:t>𝑃</m:t>
-                    </m:r>
-                    <m:r>
-                      <a:rPr lang="pt-BR" sz="2400" i="1" dirty="0" smtClean="0">
-                        <a:latin typeface="Cambria Math" panose="02040503050406030204" pitchFamily="18" charset="0"/>
-                      </a:rPr>
-                      <m:t>(</m:t>
-                    </m:r>
-                    <m:r>
-                      <a:rPr lang="pt-BR" sz="2400" i="1" dirty="0" smtClean="0">
-                        <a:latin typeface="Cambria Math" panose="02040503050406030204" pitchFamily="18" charset="0"/>
-                      </a:rPr>
-                      <m:t>𝑉𝑉</m:t>
-                    </m:r>
-                    <m:r>
-                      <a:rPr lang="pt-BR" sz="2400" i="1" dirty="0" smtClean="0">
-                        <a:latin typeface="Cambria Math" panose="02040503050406030204" pitchFamily="18" charset="0"/>
-                      </a:rPr>
-                      <m:t>)=(2/9·1/8)+(3/9·2/8)+ 1/6=5/18</m:t>
-                    </m:r>
-                  </m:oMath>
-                </a14:m>
-                <a:r>
-                  <a:rPr lang="pt-BR" sz="2400" dirty="0"/>
-                  <a:t>.</a:t>
-                </a:r>
-              </a:p>
-            </p:txBody>
-          </p:sp>
-        </mc:Choice>
-        <mc:Fallback>
-          <p:sp>
-            <p:nvSpPr>
-              <p:cNvPr id="6" name="CaixaDeTexto 5">
-                <a:extLst>
-                  <a:ext uri="{FF2B5EF4-FFF2-40B4-BE49-F238E27FC236}">
-                    <a16:creationId xmlns:a16="http://schemas.microsoft.com/office/drawing/2014/main" id="{720B10DA-C761-4DEE-8D86-E170E1C2E981}"/>
-                  </a:ext>
-                </a:extLst>
-              </p:cNvPr>
-              <p:cNvSpPr txBox="1">
-                <a:spLocks noRot="1" noChangeAspect="1" noMove="1" noResize="1" noEditPoints="1" noAdjustHandles="1" noChangeArrowheads="1" noChangeShapeType="1" noTextEdit="1"/>
-              </p:cNvSpPr>
-              <p:nvPr/>
-            </p:nvSpPr>
-            <p:spPr>
-              <a:xfrm>
-                <a:off x="658143" y="853091"/>
-                <a:ext cx="10597137" cy="5020092"/>
-              </a:xfrm>
-              <a:prstGeom prst="rect">
-                <a:avLst/>
-              </a:prstGeom>
-              <a:blipFill>
-                <a:blip r:embed="rId2"/>
-                <a:stretch>
-                  <a:fillRect l="-921" b="-1944"/>
-                </a:stretch>
-              </a:blipFill>
-            </p:spPr>
-            <p:txBody>
-              <a:bodyPr/>
-              <a:lstStyle/>
-              <a:p>
-                <a:r>
-                  <a:rPr lang="pt-BR">
-                    <a:noFill/>
-                  </a:rPr>
-                  <a:t> </a:t>
-                </a:r>
-              </a:p>
-            </p:txBody>
-          </p:sp>
-        </mc:Fallback>
-      </mc:AlternateContent>
-      <p:sp>
-        <p:nvSpPr>
-          <p:cNvPr id="3" name="CaixaDeTexto 2">
-            <a:extLst>
-              <a:ext uri="{FF2B5EF4-FFF2-40B4-BE49-F238E27FC236}">
-                <a16:creationId xmlns:a16="http://schemas.microsoft.com/office/drawing/2014/main" id="{19131A04-B5D6-4211-8B49-4615DE5797E9}"/>
-              </a:ext>
-            </a:extLst>
-          </p:cNvPr>
-          <p:cNvSpPr txBox="1"/>
-          <p:nvPr/>
-        </p:nvSpPr>
-        <p:spPr>
-          <a:xfrm>
-            <a:off x="361188" y="6463893"/>
-            <a:ext cx="7772400" cy="308152"/>
-          </a:xfrm>
-          <a:prstGeom prst="rect">
-            <a:avLst/>
-          </a:prstGeom>
-          <a:noFill/>
-        </p:spPr>
-        <p:txBody>
-          <a:bodyPr wrap="none" rtlCol="0">
-            <a:spAutoFit/>
-          </a:bodyPr>
-          <a:lstStyle/>
-          <a:p>
-            <a:r>
-              <a:rPr lang="pt-BR" sz="1400" dirty="0"/>
-              <a:t>CEA055 – Estatística e Probabilidade – Prof. Marcos Goulart Lima</a:t>
-            </a:r>
-          </a:p>
-        </p:txBody>
-      </p:sp>
-    </p:spTree>
-    <p:extLst>
-      <p:ext uri="{BB962C8B-B14F-4D97-AF65-F5344CB8AC3E}">
-        <p14:creationId xmlns:p14="http://schemas.microsoft.com/office/powerpoint/2010/main" val="3258435062"/>
+        <p14:creationId xmlns:p14="http://schemas.microsoft.com/office/powerpoint/2010/main" val="2633401551"/>
       </p:ext>
     </p:extLst>
   </p:cSld>
